--- a/Boek 2 - Kosten, opbrengsten, elasticiteit en surplus/edities/chat-2026/bronnen/H3/paragrafen/2.3.2 Producentensurplus en totaal surplus/2.3.2 Producentensurplus en totaal surplus – presentatie.pptx
+++ b/Boek 2 - Kosten, opbrengsten, elasticiteit en surplus/edities/chat-2026/bronnen/H3/paragrafen/2.3.2 Producentensurplus en totaal surplus/2.3.2 Producentensurplus en totaal surplus – presentatie.pptx
@@ -2,39 +2,39 @@
 <file path=ppt/presentation.xml><?xml version="1.0" encoding="utf-8"?>
 <p:presentation xmlns:p="http://schemas.openxmlformats.org/presentationml/2006/main">
   <p:sldMasterIdLst>
-    <p:sldMasterId xmlns:r="http://schemas.openxmlformats.org/officeDocument/2006/relationships" id="2147483648" r:id="R3cc4f245a6a44f0d"/>
+    <p:sldMasterId xmlns:r="http://schemas.openxmlformats.org/officeDocument/2006/relationships" id="2147483648" r:id="R98c8da11dcc04067"/>
   </p:sldMasterIdLst>
   <p:notesMasterIdLst>
-    <p:notesMasterId xmlns:r="http://schemas.openxmlformats.org/officeDocument/2006/relationships" r:id="Re055d05f04dd474b"/>
+    <p:notesMasterId xmlns:r="http://schemas.openxmlformats.org/officeDocument/2006/relationships" r:id="Rb11ecb26b2ac49a1"/>
   </p:notesMasterIdLst>
   <p:sldIdLst>
-    <p:sldId xmlns:r="http://schemas.openxmlformats.org/officeDocument/2006/relationships" id="256" r:id="R94d586e720524e69"/>
-    <p:sldId xmlns:r="http://schemas.openxmlformats.org/officeDocument/2006/relationships" id="257" r:id="R4ad1a8ef5861408f"/>
-    <p:sldId xmlns:r="http://schemas.openxmlformats.org/officeDocument/2006/relationships" id="258" r:id="R35a79d9e640b404d"/>
-    <p:sldId xmlns:r="http://schemas.openxmlformats.org/officeDocument/2006/relationships" id="259" r:id="R1eb0edc0cf9b42b8"/>
-    <p:sldId xmlns:r="http://schemas.openxmlformats.org/officeDocument/2006/relationships" id="260" r:id="R731760ba542643fb"/>
-    <p:sldId xmlns:r="http://schemas.openxmlformats.org/officeDocument/2006/relationships" id="261" r:id="Reb5164f49df848c8"/>
-    <p:sldId xmlns:r="http://schemas.openxmlformats.org/officeDocument/2006/relationships" id="262" r:id="R74aa351474374c94"/>
-    <p:sldId xmlns:r="http://schemas.openxmlformats.org/officeDocument/2006/relationships" id="263" r:id="Rbe18a161cc864e67"/>
-    <p:sldId xmlns:r="http://schemas.openxmlformats.org/officeDocument/2006/relationships" id="264" r:id="Rb202b04245b740e7"/>
-    <p:sldId xmlns:r="http://schemas.openxmlformats.org/officeDocument/2006/relationships" id="265" r:id="Rb4e3009b25b34282"/>
-    <p:sldId xmlns:r="http://schemas.openxmlformats.org/officeDocument/2006/relationships" id="266" r:id="R0c850ace53174c3b"/>
-    <p:sldId xmlns:r="http://schemas.openxmlformats.org/officeDocument/2006/relationships" id="267" r:id="R465228fc420b45f1"/>
-    <p:sldId xmlns:r="http://schemas.openxmlformats.org/officeDocument/2006/relationships" id="268" r:id="R2f1f46f121eb4aa3"/>
-    <p:sldId xmlns:r="http://schemas.openxmlformats.org/officeDocument/2006/relationships" id="269" r:id="Ra88305411d184d73"/>
-    <p:sldId xmlns:r="http://schemas.openxmlformats.org/officeDocument/2006/relationships" id="270" r:id="R8645455108d54f08"/>
-    <p:sldId xmlns:r="http://schemas.openxmlformats.org/officeDocument/2006/relationships" id="271" r:id="R04a04161e4c64726"/>
-    <p:sldId xmlns:r="http://schemas.openxmlformats.org/officeDocument/2006/relationships" id="272" r:id="R472e32c37f8a4bfe"/>
-    <p:sldId xmlns:r="http://schemas.openxmlformats.org/officeDocument/2006/relationships" id="273" r:id="R3cd364f01d974208"/>
-    <p:sldId xmlns:r="http://schemas.openxmlformats.org/officeDocument/2006/relationships" id="274" r:id="R822e24b104644101"/>
-    <p:sldId xmlns:r="http://schemas.openxmlformats.org/officeDocument/2006/relationships" id="275" r:id="R44e7e22208b940f2"/>
-    <p:sldId xmlns:r="http://schemas.openxmlformats.org/officeDocument/2006/relationships" id="276" r:id="R6e01dfcbfd3c4a5d"/>
-    <p:sldId xmlns:r="http://schemas.openxmlformats.org/officeDocument/2006/relationships" id="277" r:id="R473d472203cc471f"/>
-    <p:sldId xmlns:r="http://schemas.openxmlformats.org/officeDocument/2006/relationships" id="278" r:id="Rb1813fd17d404dfc"/>
-    <p:sldId xmlns:r="http://schemas.openxmlformats.org/officeDocument/2006/relationships" id="279" r:id="R2a652f1f80204290"/>
-    <p:sldId xmlns:r="http://schemas.openxmlformats.org/officeDocument/2006/relationships" id="280" r:id="R27ba8a0da5684e58"/>
-    <p:sldId xmlns:r="http://schemas.openxmlformats.org/officeDocument/2006/relationships" id="281" r:id="R7b78643df1ea40e4"/>
-    <p:sldId xmlns:r="http://schemas.openxmlformats.org/officeDocument/2006/relationships" id="282" r:id="R383cf2b304854302"/>
+    <p:sldId xmlns:r="http://schemas.openxmlformats.org/officeDocument/2006/relationships" id="256" r:id="R289aa0aeb862441a"/>
+    <p:sldId xmlns:r="http://schemas.openxmlformats.org/officeDocument/2006/relationships" id="257" r:id="Rdfd902995b1f4c67"/>
+    <p:sldId xmlns:r="http://schemas.openxmlformats.org/officeDocument/2006/relationships" id="258" r:id="R72928353733d44d8"/>
+    <p:sldId xmlns:r="http://schemas.openxmlformats.org/officeDocument/2006/relationships" id="259" r:id="R3fd1a6771bb342f6"/>
+    <p:sldId xmlns:r="http://schemas.openxmlformats.org/officeDocument/2006/relationships" id="260" r:id="Re627762dc9d84b1f"/>
+    <p:sldId xmlns:r="http://schemas.openxmlformats.org/officeDocument/2006/relationships" id="261" r:id="R7a4c8f5fa3984ab7"/>
+    <p:sldId xmlns:r="http://schemas.openxmlformats.org/officeDocument/2006/relationships" id="262" r:id="Rfa772b40661745c3"/>
+    <p:sldId xmlns:r="http://schemas.openxmlformats.org/officeDocument/2006/relationships" id="263" r:id="R59ba1ab9c0df4a0e"/>
+    <p:sldId xmlns:r="http://schemas.openxmlformats.org/officeDocument/2006/relationships" id="264" r:id="R9a3ee96710bc4ad2"/>
+    <p:sldId xmlns:r="http://schemas.openxmlformats.org/officeDocument/2006/relationships" id="265" r:id="R48301670e7864c7f"/>
+    <p:sldId xmlns:r="http://schemas.openxmlformats.org/officeDocument/2006/relationships" id="266" r:id="Re9cc01d04d3048f8"/>
+    <p:sldId xmlns:r="http://schemas.openxmlformats.org/officeDocument/2006/relationships" id="267" r:id="R558b9e6a4bfe4bc0"/>
+    <p:sldId xmlns:r="http://schemas.openxmlformats.org/officeDocument/2006/relationships" id="268" r:id="R78da5c7b047145ea"/>
+    <p:sldId xmlns:r="http://schemas.openxmlformats.org/officeDocument/2006/relationships" id="269" r:id="Rc13c500f822e4af4"/>
+    <p:sldId xmlns:r="http://schemas.openxmlformats.org/officeDocument/2006/relationships" id="270" r:id="R244c3f3cd06f459a"/>
+    <p:sldId xmlns:r="http://schemas.openxmlformats.org/officeDocument/2006/relationships" id="271" r:id="Re901faa1bb124f44"/>
+    <p:sldId xmlns:r="http://schemas.openxmlformats.org/officeDocument/2006/relationships" id="272" r:id="R07023737899744c3"/>
+    <p:sldId xmlns:r="http://schemas.openxmlformats.org/officeDocument/2006/relationships" id="273" r:id="R97b9e233d613470e"/>
+    <p:sldId xmlns:r="http://schemas.openxmlformats.org/officeDocument/2006/relationships" id="274" r:id="R72d4db4b00af483a"/>
+    <p:sldId xmlns:r="http://schemas.openxmlformats.org/officeDocument/2006/relationships" id="275" r:id="R4d46051ffac5466f"/>
+    <p:sldId xmlns:r="http://schemas.openxmlformats.org/officeDocument/2006/relationships" id="276" r:id="Rc89c59503d7949f0"/>
+    <p:sldId xmlns:r="http://schemas.openxmlformats.org/officeDocument/2006/relationships" id="277" r:id="R110a3d61378e40ed"/>
+    <p:sldId xmlns:r="http://schemas.openxmlformats.org/officeDocument/2006/relationships" id="278" r:id="R9ff36f3d8b4b4005"/>
+    <p:sldId xmlns:r="http://schemas.openxmlformats.org/officeDocument/2006/relationships" id="279" r:id="R571bf712e2574a8b"/>
+    <p:sldId xmlns:r="http://schemas.openxmlformats.org/officeDocument/2006/relationships" id="280" r:id="R526d37d7b73f4f3b"/>
+    <p:sldId xmlns:r="http://schemas.openxmlformats.org/officeDocument/2006/relationships" id="281" r:id="R27e9771945164122"/>
+    <p:sldId xmlns:r="http://schemas.openxmlformats.org/officeDocument/2006/relationships" id="282" r:id="Rd189c3ae38884130"/>
   </p:sldIdLst>
   <p:sldSz cx="15240000" cy="8572500"/>
   <p:notesSz cx="6858000" cy="9144000"/>
@@ -469,7 +469,7 @@
           <a:p xmlns:a="http://schemas.openxmlformats.org/drawingml/2006/main">
             <a:r>
               <a:rPr sz="1400"/>
-              <a:t>Vraag: Welke uitleg op p. 80 helpt bij startopgave 2?</a:t>
+              <a:t>Vraag: Welke uitleg op p. 81 helpt bij startopgave 2?</a:t>
             </a:r>
           </a:p>
           <a:p xmlns:a="http://schemas.openxmlformats.org/drawingml/2006/main">
@@ -481,7 +481,7 @@
           <a:p xmlns:a="http://schemas.openxmlformats.org/drawingml/2006/main">
             <a:r>
               <a:rPr sz="1400"/>
-              <a:t>Uitleg: Laat het overzicht staan tijdens startopdracht. Start: 1–2 op p. 84. Basis: 3 op p. 85, 4–5 op p. 86. Zelfstandig: 6–7 op p. 87. Doel: 8, bronnen p. 88 en vragen p. 89. Huiswerk 3–8 maken en nakijken. Bonus 9 en herhaling 10–11 zijn extra. De volledige route hoeft niet in één les af. Opgave 1 haalt evenwicht op uit §1.3.2, maar daar stonden Qv(P) en Qa(P). De inverse vorm P(Q) is een verandering van voorstelling. Geef daarom zo nodig vooraf de steun op p. 82: beide formules geven P bij dezelfde Q; stel ze gelijk, los Q op en vul in. Laat dit na dia 7 opnieuw verwoorden. In opgave 2 is kopersvoordeel bekend uit §2.3.1, maar verkopersvoordeel en het wegvallen van de prijs zijn nieuw. Laat de leerling eerst op p. 80 de twee voordelen en figuur 1 lezen, de passende verschillen aanwijzen en twijfel noteren. Dit is verkennen met steun. Bij terugkeer vóór basiswerk: laat 2a–b opnieuw proberen en vraag waarom de betaling wegvalt. Bespreek dan zo nodig de antwoorden: CS 3, PS 4, samen 7 euro.</a:t>
+              <a:t>Uitleg: Laat het overzicht staan tijdens startopdracht. Start: 1–2 op p. 85. Basis: 3 op p. 86, 4–5 op p. 87. Zelfstandig: 6–7 op p. 88. Doel: 8, bronnen p. 89 en vragen p. 90. Huiswerk 3–8 maken en nakijken. Bonus 9 en herhaling 10–11 zijn extra. De volledige route hoeft niet in één les af. Opgave 1 haalt evenwicht op uit §1.3.2, maar daar stonden Qv(P) en Qa(P). De inverse vorm P(Q) is een verandering van voorstelling. Geef daarom zo nodig vooraf de steun op p. 83: beide formules geven P bij dezelfde Q; stel ze gelijk, los Q op en vul in. Laat dit na dia 7 opnieuw verwoorden. In opgave 2 is kopersvoordeel bekend uit §2.3.1, maar verkopersvoordeel en het wegvallen van de prijs zijn nieuw. Laat de leerling eerst op p. 81 de twee voordelen en figuur 1 lezen, de passende verschillen aanwijzen en twijfel noteren. Dit is verkennen met steun. Bij terugkeer vóór basiswerk: laat 2a–b opnieuw proberen en vraag waarom de betaling wegvalt. Bespreek dan zo nodig de antwoorden: CS 3, PS 4, samen 7 euro.</a:t>
             </a:r>
           </a:p>
           <a:p xmlns:a="http://schemas.openxmlformats.org/drawingml/2006/main">
@@ -517,13 +517,13 @@
           <a:p xmlns:a="http://schemas.openxmlformats.org/drawingml/2006/main">
             <a:r>
               <a:rPr sz="1400"/>
-              <a:t>Bron: leerlingenboek Boek 2, chat-2026, gedrukte pagina 80, 84–89. https://github.com/meijer1973/4veco-lessen/blob/d53080f38ebbdbba319e6d9b89dcba86067a72be/Boek%202%20-%20Kosten%2C%20opbrengsten%2C%20elasticiteit%20en%20surplus/edities/chat-2026/boek/Boek_2_Compleet.pdf</a:t>
+              <a:t>Bron: leerlingenboek Boek 2, chat-2026, gedrukte pagina 81, 85–90. https://github.com/meijer1973/4veco-lessen/blob/a8940a7a79e22857a3e306a91fe923c48c63e716/Boek%202%20-%20Kosten%2C%20opbrengsten%2C%20elasticiteit%20en%20surplus/edities/chat-2026/boek/Boek_2_Compleet.pdf</a:t>
             </a:r>
           </a:p>
           <a:p xmlns:a="http://schemas.openxmlformats.org/drawingml/2006/main">
             <a:r>
               <a:rPr sz="1400"/>
-              <a:t>Antwoordmodel: https://github.com/meijer1973/4veco-lessen/blob/d53080f38ebbdbba319e6d9b89dcba86067a72be/Boek%202%20-%20Kosten%2C%20opbrengsten%2C%20elasticiteit%20en%20surplus/edities/chat-2026/boek/Boek_2_Compleet_Antwoorden.pdf</a:t>
+              <a:t>Antwoordmodel: https://github.com/meijer1973/4veco-lessen/blob/a8940a7a79e22857a3e306a91fe923c48c63e716/Boek%202%20-%20Kosten%2C%20opbrengsten%2C%20elasticiteit%20en%20surplus/edities/chat-2026/boek/Boek_2_Compleet_Antwoorden.pdf</a:t>
             </a:r>
           </a:p>
           <a:p xmlns:a="http://schemas.openxmlformats.org/drawingml/2006/main">
@@ -648,13 +648,13 @@
           <a:p xmlns:a="http://schemas.openxmlformats.org/drawingml/2006/main">
             <a:r>
               <a:rPr sz="1400"/>
-              <a:t>Bron: leerlingenboek Boek 2, chat-2026, gedrukte pagina 81–83. https://github.com/meijer1973/4veco-lessen/blob/d53080f38ebbdbba319e6d9b89dcba86067a72be/Boek%202%20-%20Kosten%2C%20opbrengsten%2C%20elasticiteit%20en%20surplus/edities/chat-2026/boek/Boek_2_Compleet.pdf</a:t>
+              <a:t>Bron: leerlingenboek Boek 2, chat-2026, gedrukte pagina 82–84. https://github.com/meijer1973/4veco-lessen/blob/a8940a7a79e22857a3e306a91fe923c48c63e716/Boek%202%20-%20Kosten%2C%20opbrengsten%2C%20elasticiteit%20en%20surplus/edities/chat-2026/boek/Boek_2_Compleet.pdf</a:t>
             </a:r>
           </a:p>
           <a:p xmlns:a="http://schemas.openxmlformats.org/drawingml/2006/main">
             <a:r>
               <a:rPr sz="1400"/>
-              <a:t>Antwoordmodel: https://github.com/meijer1973/4veco-lessen/blob/d53080f38ebbdbba319e6d9b89dcba86067a72be/Boek%202%20-%20Kosten%2C%20opbrengsten%2C%20elasticiteit%20en%20surplus/edities/chat-2026/boek/Boek_2_Compleet_Antwoorden.pdf</a:t>
+              <a:t>Antwoordmodel: https://github.com/meijer1973/4veco-lessen/blob/a8940a7a79e22857a3e306a91fe923c48c63e716/Boek%202%20-%20Kosten%2C%20opbrengsten%2C%20elasticiteit%20en%20surplus/edities/chat-2026/boek/Boek_2_Compleet_Antwoorden.pdf</a:t>
             </a:r>
           </a:p>
           <a:p xmlns:a="http://schemas.openxmlformats.org/drawingml/2006/main">
@@ -779,13 +779,13 @@
           <a:p xmlns:a="http://schemas.openxmlformats.org/drawingml/2006/main">
             <a:r>
               <a:rPr sz="1400"/>
-              <a:t>Bron: leerlingenboek Boek 2, chat-2026, gedrukte pagina 82–83. https://github.com/meijer1973/4veco-lessen/blob/d53080f38ebbdbba319e6d9b89dcba86067a72be/Boek%202%20-%20Kosten%2C%20opbrengsten%2C%20elasticiteit%20en%20surplus/edities/chat-2026/boek/Boek_2_Compleet.pdf</a:t>
+              <a:t>Bron: leerlingenboek Boek 2, chat-2026, gedrukte pagina 83–84. https://github.com/meijer1973/4veco-lessen/blob/a8940a7a79e22857a3e306a91fe923c48c63e716/Boek%202%20-%20Kosten%2C%20opbrengsten%2C%20elasticiteit%20en%20surplus/edities/chat-2026/boek/Boek_2_Compleet.pdf</a:t>
             </a:r>
           </a:p>
           <a:p xmlns:a="http://schemas.openxmlformats.org/drawingml/2006/main">
             <a:r>
               <a:rPr sz="1400"/>
-              <a:t>Antwoordmodel: https://github.com/meijer1973/4veco-lessen/blob/d53080f38ebbdbba319e6d9b89dcba86067a72be/Boek%202%20-%20Kosten%2C%20opbrengsten%2C%20elasticiteit%20en%20surplus/edities/chat-2026/boek/Boek_2_Compleet_Antwoorden.pdf</a:t>
+              <a:t>Antwoordmodel: https://github.com/meijer1973/4veco-lessen/blob/a8940a7a79e22857a3e306a91fe923c48c63e716/Boek%202%20-%20Kosten%2C%20opbrengsten%2C%20elasticiteit%20en%20surplus/edities/chat-2026/boek/Boek_2_Compleet_Antwoorden.pdf</a:t>
             </a:r>
           </a:p>
           <a:p xmlns:a="http://schemas.openxmlformats.org/drawingml/2006/main">
@@ -910,13 +910,13 @@
           <a:p xmlns:a="http://schemas.openxmlformats.org/drawingml/2006/main">
             <a:r>
               <a:rPr sz="1400"/>
-              <a:t>Bron: leerlingenboek Boek 2, chat-2026, gedrukte pagina 82, 84. https://github.com/meijer1973/4veco-lessen/blob/d53080f38ebbdbba319e6d9b89dcba86067a72be/Boek%202%20-%20Kosten%2C%20opbrengsten%2C%20elasticiteit%20en%20surplus/edities/chat-2026/boek/Boek_2_Compleet.pdf</a:t>
+              <a:t>Bron: leerlingenboek Boek 2, chat-2026, gedrukte pagina 83, 85. https://github.com/meijer1973/4veco-lessen/blob/a8940a7a79e22857a3e306a91fe923c48c63e716/Boek%202%20-%20Kosten%2C%20opbrengsten%2C%20elasticiteit%20en%20surplus/edities/chat-2026/boek/Boek_2_Compleet.pdf</a:t>
             </a:r>
           </a:p>
           <a:p xmlns:a="http://schemas.openxmlformats.org/drawingml/2006/main">
             <a:r>
               <a:rPr sz="1400"/>
-              <a:t>Antwoordmodel: https://github.com/meijer1973/4veco-lessen/blob/d53080f38ebbdbba319e6d9b89dcba86067a72be/Boek%202%20-%20Kosten%2C%20opbrengsten%2C%20elasticiteit%20en%20surplus/edities/chat-2026/boek/Boek_2_Compleet_Antwoorden.pdf</a:t>
+              <a:t>Antwoordmodel: https://github.com/meijer1973/4veco-lessen/blob/a8940a7a79e22857a3e306a91fe923c48c63e716/Boek%202%20-%20Kosten%2C%20opbrengsten%2C%20elasticiteit%20en%20surplus/edities/chat-2026/boek/Boek_2_Compleet_Antwoorden.pdf</a:t>
             </a:r>
           </a:p>
           <a:p xmlns:a="http://schemas.openxmlformats.org/drawingml/2006/main">
@@ -1041,13 +1041,13 @@
           <a:p xmlns:a="http://schemas.openxmlformats.org/drawingml/2006/main">
             <a:r>
               <a:rPr sz="1400"/>
-              <a:t>Bron: leerlingenboek Boek 2, chat-2026, gedrukte pagina 82–84. https://github.com/meijer1973/4veco-lessen/blob/d53080f38ebbdbba319e6d9b89dcba86067a72be/Boek%202%20-%20Kosten%2C%20opbrengsten%2C%20elasticiteit%20en%20surplus/edities/chat-2026/boek/Boek_2_Compleet.pdf</a:t>
+              <a:t>Bron: leerlingenboek Boek 2, chat-2026, gedrukte pagina 83–85. https://github.com/meijer1973/4veco-lessen/blob/a8940a7a79e22857a3e306a91fe923c48c63e716/Boek%202%20-%20Kosten%2C%20opbrengsten%2C%20elasticiteit%20en%20surplus/edities/chat-2026/boek/Boek_2_Compleet.pdf</a:t>
             </a:r>
           </a:p>
           <a:p xmlns:a="http://schemas.openxmlformats.org/drawingml/2006/main">
             <a:r>
               <a:rPr sz="1400"/>
-              <a:t>Antwoordmodel: https://github.com/meijer1973/4veco-lessen/blob/d53080f38ebbdbba319e6d9b89dcba86067a72be/Boek%202%20-%20Kosten%2C%20opbrengsten%2C%20elasticiteit%20en%20surplus/edities/chat-2026/boek/Boek_2_Compleet_Antwoorden.pdf</a:t>
+              <a:t>Antwoordmodel: https://github.com/meijer1973/4veco-lessen/blob/a8940a7a79e22857a3e306a91fe923c48c63e716/Boek%202%20-%20Kosten%2C%20opbrengsten%2C%20elasticiteit%20en%20surplus/edities/chat-2026/boek/Boek_2_Compleet_Antwoorden.pdf</a:t>
             </a:r>
           </a:p>
           <a:p xmlns:a="http://schemas.openxmlformats.org/drawingml/2006/main">
@@ -1172,13 +1172,13 @@
           <a:p xmlns:a="http://schemas.openxmlformats.org/drawingml/2006/main">
             <a:r>
               <a:rPr sz="1400"/>
-              <a:t>Bron: leerlingenboek Boek 2, chat-2026, gedrukte pagina 82–84. https://github.com/meijer1973/4veco-lessen/blob/d53080f38ebbdbba319e6d9b89dcba86067a72be/Boek%202%20-%20Kosten%2C%20opbrengsten%2C%20elasticiteit%20en%20surplus/edities/chat-2026/boek/Boek_2_Compleet.pdf</a:t>
+              <a:t>Bron: leerlingenboek Boek 2, chat-2026, gedrukte pagina 83–85. https://github.com/meijer1973/4veco-lessen/blob/a8940a7a79e22857a3e306a91fe923c48c63e716/Boek%202%20-%20Kosten%2C%20opbrengsten%2C%20elasticiteit%20en%20surplus/edities/chat-2026/boek/Boek_2_Compleet.pdf</a:t>
             </a:r>
           </a:p>
           <a:p xmlns:a="http://schemas.openxmlformats.org/drawingml/2006/main">
             <a:r>
               <a:rPr sz="1400"/>
-              <a:t>Antwoordmodel: https://github.com/meijer1973/4veco-lessen/blob/d53080f38ebbdbba319e6d9b89dcba86067a72be/Boek%202%20-%20Kosten%2C%20opbrengsten%2C%20elasticiteit%20en%20surplus/edities/chat-2026/boek/Boek_2_Compleet_Antwoorden.pdf</a:t>
+              <a:t>Antwoordmodel: https://github.com/meijer1973/4veco-lessen/blob/a8940a7a79e22857a3e306a91fe923c48c63e716/Boek%202%20-%20Kosten%2C%20opbrengsten%2C%20elasticiteit%20en%20surplus/edities/chat-2026/boek/Boek_2_Compleet_Antwoorden.pdf</a:t>
             </a:r>
           </a:p>
           <a:p xmlns:a="http://schemas.openxmlformats.org/drawingml/2006/main">
@@ -1303,13 +1303,13 @@
           <a:p xmlns:a="http://schemas.openxmlformats.org/drawingml/2006/main">
             <a:r>
               <a:rPr sz="1400"/>
-              <a:t>Bron: leerlingenboek Boek 2, chat-2026, gedrukte pagina 82–84. https://github.com/meijer1973/4veco-lessen/blob/d53080f38ebbdbba319e6d9b89dcba86067a72be/Boek%202%20-%20Kosten%2C%20opbrengsten%2C%20elasticiteit%20en%20surplus/edities/chat-2026/boek/Boek_2_Compleet.pdf</a:t>
+              <a:t>Bron: leerlingenboek Boek 2, chat-2026, gedrukte pagina 83–85. https://github.com/meijer1973/4veco-lessen/blob/a8940a7a79e22857a3e306a91fe923c48c63e716/Boek%202%20-%20Kosten%2C%20opbrengsten%2C%20elasticiteit%20en%20surplus/edities/chat-2026/boek/Boek_2_Compleet.pdf</a:t>
             </a:r>
           </a:p>
           <a:p xmlns:a="http://schemas.openxmlformats.org/drawingml/2006/main">
             <a:r>
               <a:rPr sz="1400"/>
-              <a:t>Antwoordmodel: https://github.com/meijer1973/4veco-lessen/blob/d53080f38ebbdbba319e6d9b89dcba86067a72be/Boek%202%20-%20Kosten%2C%20opbrengsten%2C%20elasticiteit%20en%20surplus/edities/chat-2026/boek/Boek_2_Compleet_Antwoorden.pdf</a:t>
+              <a:t>Antwoordmodel: https://github.com/meijer1973/4veco-lessen/blob/a8940a7a79e22857a3e306a91fe923c48c63e716/Boek%202%20-%20Kosten%2C%20opbrengsten%2C%20elasticiteit%20en%20surplus/edities/chat-2026/boek/Boek_2_Compleet_Antwoorden.pdf</a:t>
             </a:r>
           </a:p>
           <a:p xmlns:a="http://schemas.openxmlformats.org/drawingml/2006/main">
@@ -1398,7 +1398,7 @@
           <a:p xmlns:a="http://schemas.openxmlformats.org/drawingml/2006/main">
             <a:r>
               <a:rPr sz="1400"/>
-              <a:t>Uitleg: Laat het overzicht staan tijdens zelfstandig werken. Start: 1–2 op p. 84. Basis: 3 op p. 85, 4–5 op p. 86. Zelfstandig: 6–7 op p. 87. Doel: 8, bronnen p. 88 en vragen p. 89. Huiswerk 3–8 maken en nakijken. Bonus 9 en herhaling 10–11 zijn extra. De volledige route hoeft niet in één les af. Opgave 1 haalt evenwicht op uit §1.3.2, maar daar stonden Qv(P) en Qa(P). De inverse vorm P(Q) is een verandering van voorstelling. Geef daarom zo nodig vooraf de steun op p. 82: beide formules geven P bij dezelfde Q; stel ze gelijk, los Q op en vul in. Laat dit na dia 7 opnieuw verwoorden. In opgave 2 is kopersvoordeel bekend uit §2.3.1, maar verkopersvoordeel en het wegvallen van de prijs zijn nieuw. Laat de leerling eerst op p. 80 de twee voordelen en figuur 1 lezen, de passende verschillen aanwijzen en twijfel noteren. Dit is verkennen met steun. Bij terugkeer vóór basiswerk: laat 2a–b opnieuw proberen en vraag waarom de betaling wegvalt. Bespreek dan zo nodig de antwoorden: CS 3, PS 4, samen 7 euro.</a:t>
+              <a:t>Uitleg: Laat het overzicht staan tijdens zelfstandig werken. Start: 1–2 op p. 85. Basis: 3 op p. 86, 4–5 op p. 87. Zelfstandig: 6–7 op p. 88. Doel: 8, bronnen p. 89 en vragen p. 90. Huiswerk 3–8 maken en nakijken. Bonus 9 en herhaling 10–11 zijn extra. De volledige route hoeft niet in één les af. Opgave 1 haalt evenwicht op uit §1.3.2, maar daar stonden Qv(P) en Qa(P). De inverse vorm P(Q) is een verandering van voorstelling. Geef daarom zo nodig vooraf de steun op p. 83: beide formules geven P bij dezelfde Q; stel ze gelijk, los Q op en vul in. Laat dit na dia 7 opnieuw verwoorden. In opgave 2 is kopersvoordeel bekend uit §2.3.1, maar verkopersvoordeel en het wegvallen van de prijs zijn nieuw. Laat de leerling eerst op p. 81 de twee voordelen en figuur 1 lezen, de passende verschillen aanwijzen en twijfel noteren. Dit is verkennen met steun. Bij terugkeer vóór basiswerk: laat 2a–b opnieuw proberen en vraag waarom de betaling wegvalt. Bespreek dan zo nodig de antwoorden: CS 3, PS 4, samen 7 euro.</a:t>
             </a:r>
           </a:p>
           <a:p xmlns:a="http://schemas.openxmlformats.org/drawingml/2006/main">
@@ -1434,13 +1434,13 @@
           <a:p xmlns:a="http://schemas.openxmlformats.org/drawingml/2006/main">
             <a:r>
               <a:rPr sz="1400"/>
-              <a:t>Bron: leerlingenboek Boek 2, chat-2026, gedrukte pagina 80, 84–89. https://github.com/meijer1973/4veco-lessen/blob/d53080f38ebbdbba319e6d9b89dcba86067a72be/Boek%202%20-%20Kosten%2C%20opbrengsten%2C%20elasticiteit%20en%20surplus/edities/chat-2026/boek/Boek_2_Compleet.pdf</a:t>
+              <a:t>Bron: leerlingenboek Boek 2, chat-2026, gedrukte pagina 81, 85–90. https://github.com/meijer1973/4veco-lessen/blob/a8940a7a79e22857a3e306a91fe923c48c63e716/Boek%202%20-%20Kosten%2C%20opbrengsten%2C%20elasticiteit%20en%20surplus/edities/chat-2026/boek/Boek_2_Compleet.pdf</a:t>
             </a:r>
           </a:p>
           <a:p xmlns:a="http://schemas.openxmlformats.org/drawingml/2006/main">
             <a:r>
               <a:rPr sz="1400"/>
-              <a:t>Antwoordmodel: https://github.com/meijer1973/4veco-lessen/blob/d53080f38ebbdbba319e6d9b89dcba86067a72be/Boek%202%20-%20Kosten%2C%20opbrengsten%2C%20elasticiteit%20en%20surplus/edities/chat-2026/boek/Boek_2_Compleet_Antwoorden.pdf</a:t>
+              <a:t>Antwoordmodel: https://github.com/meijer1973/4veco-lessen/blob/a8940a7a79e22857a3e306a91fe923c48c63e716/Boek%202%20-%20Kosten%2C%20opbrengsten%2C%20elasticiteit%20en%20surplus/edities/chat-2026/boek/Boek_2_Compleet_Antwoorden.pdf</a:t>
             </a:r>
           </a:p>
           <a:p xmlns:a="http://schemas.openxmlformats.org/drawingml/2006/main">
@@ -1565,13 +1565,13 @@
           <a:p xmlns:a="http://schemas.openxmlformats.org/drawingml/2006/main">
             <a:r>
               <a:rPr sz="1400"/>
-              <a:t>Bron: leerlingenboek Boek 2, chat-2026, gedrukte pagina 88. https://github.com/meijer1973/4veco-lessen/blob/d53080f38ebbdbba319e6d9b89dcba86067a72be/Boek%202%20-%20Kosten%2C%20opbrengsten%2C%20elasticiteit%20en%20surplus/edities/chat-2026/boek/Boek_2_Compleet.pdf</a:t>
+              <a:t>Bron: leerlingenboek Boek 2, chat-2026, gedrukte pagina 89. https://github.com/meijer1973/4veco-lessen/blob/a8940a7a79e22857a3e306a91fe923c48c63e716/Boek%202%20-%20Kosten%2C%20opbrengsten%2C%20elasticiteit%20en%20surplus/edities/chat-2026/boek/Boek_2_Compleet.pdf</a:t>
             </a:r>
           </a:p>
           <a:p xmlns:a="http://schemas.openxmlformats.org/drawingml/2006/main">
             <a:r>
               <a:rPr sz="1400"/>
-              <a:t>Antwoordmodel: https://github.com/meijer1973/4veco-lessen/blob/d53080f38ebbdbba319e6d9b89dcba86067a72be/Boek%202%20-%20Kosten%2C%20opbrengsten%2C%20elasticiteit%20en%20surplus/edities/chat-2026/boek/Boek_2_Compleet_Antwoorden.pdf</a:t>
+              <a:t>Antwoordmodel: https://github.com/meijer1973/4veco-lessen/blob/a8940a7a79e22857a3e306a91fe923c48c63e716/Boek%202%20-%20Kosten%2C%20opbrengsten%2C%20elasticiteit%20en%20surplus/edities/chat-2026/boek/Boek_2_Compleet_Antwoorden.pdf</a:t>
             </a:r>
           </a:p>
           <a:p xmlns:a="http://schemas.openxmlformats.org/drawingml/2006/main">
@@ -1696,13 +1696,13 @@
           <a:p xmlns:a="http://schemas.openxmlformats.org/drawingml/2006/main">
             <a:r>
               <a:rPr sz="1400"/>
-              <a:t>Bron: leerlingenboek Boek 2, chat-2026, gedrukte pagina 88. https://github.com/meijer1973/4veco-lessen/blob/d53080f38ebbdbba319e6d9b89dcba86067a72be/Boek%202%20-%20Kosten%2C%20opbrengsten%2C%20elasticiteit%20en%20surplus/edities/chat-2026/boek/Boek_2_Compleet.pdf</a:t>
+              <a:t>Bron: leerlingenboek Boek 2, chat-2026, gedrukte pagina 89. https://github.com/meijer1973/4veco-lessen/blob/a8940a7a79e22857a3e306a91fe923c48c63e716/Boek%202%20-%20Kosten%2C%20opbrengsten%2C%20elasticiteit%20en%20surplus/edities/chat-2026/boek/Boek_2_Compleet.pdf</a:t>
             </a:r>
           </a:p>
           <a:p xmlns:a="http://schemas.openxmlformats.org/drawingml/2006/main">
             <a:r>
               <a:rPr sz="1400"/>
-              <a:t>Antwoordmodel: https://github.com/meijer1973/4veco-lessen/blob/d53080f38ebbdbba319e6d9b89dcba86067a72be/Boek%202%20-%20Kosten%2C%20opbrengsten%2C%20elasticiteit%20en%20surplus/edities/chat-2026/boek/Boek_2_Compleet_Antwoorden.pdf</a:t>
+              <a:t>Antwoordmodel: https://github.com/meijer1973/4veco-lessen/blob/a8940a7a79e22857a3e306a91fe923c48c63e716/Boek%202%20-%20Kosten%2C%20opbrengsten%2C%20elasticiteit%20en%20surplus/edities/chat-2026/boek/Boek_2_Compleet_Antwoorden.pdf</a:t>
             </a:r>
           </a:p>
           <a:p xmlns:a="http://schemas.openxmlformats.org/drawingml/2006/main">
@@ -1791,7 +1791,7 @@
           <a:p xmlns:a="http://schemas.openxmlformats.org/drawingml/2006/main">
             <a:r>
               <a:rPr sz="1400"/>
-              <a:t>Uitleg: Lees de volledige deelvragen a tot en met c. De context en de tabel staan op de voorafgaande dia’s en op boekpagina 88. Toon nog geen uitwerkingen.</a:t>
+              <a:t>Uitleg: Lees de volledige deelvragen a tot en met c. De context en de tabel staan op de voorafgaande dia’s en op boekpagina 89. Toon nog geen uitwerkingen.</a:t>
             </a:r>
           </a:p>
           <a:p xmlns:a="http://schemas.openxmlformats.org/drawingml/2006/main">
@@ -1827,13 +1827,13 @@
           <a:p xmlns:a="http://schemas.openxmlformats.org/drawingml/2006/main">
             <a:r>
               <a:rPr sz="1400"/>
-              <a:t>Bron: leerlingenboek Boek 2, chat-2026, gedrukte pagina 89. https://github.com/meijer1973/4veco-lessen/blob/d53080f38ebbdbba319e6d9b89dcba86067a72be/Boek%202%20-%20Kosten%2C%20opbrengsten%2C%20elasticiteit%20en%20surplus/edities/chat-2026/boek/Boek_2_Compleet.pdf</a:t>
+              <a:t>Bron: leerlingenboek Boek 2, chat-2026, gedrukte pagina 90. https://github.com/meijer1973/4veco-lessen/blob/a8940a7a79e22857a3e306a91fe923c48c63e716/Boek%202%20-%20Kosten%2C%20opbrengsten%2C%20elasticiteit%20en%20surplus/edities/chat-2026/boek/Boek_2_Compleet.pdf</a:t>
             </a:r>
           </a:p>
           <a:p xmlns:a="http://schemas.openxmlformats.org/drawingml/2006/main">
             <a:r>
               <a:rPr sz="1400"/>
-              <a:t>Antwoordmodel: https://github.com/meijer1973/4veco-lessen/blob/d53080f38ebbdbba319e6d9b89dcba86067a72be/Boek%202%20-%20Kosten%2C%20opbrengsten%2C%20elasticiteit%20en%20surplus/edities/chat-2026/boek/Boek_2_Compleet_Antwoorden.pdf</a:t>
+              <a:t>Antwoordmodel: https://github.com/meijer1973/4veco-lessen/blob/a8940a7a79e22857a3e306a91fe923c48c63e716/Boek%202%20-%20Kosten%2C%20opbrengsten%2C%20elasticiteit%20en%20surplus/edities/chat-2026/boek/Boek_2_Compleet_Antwoorden.pdf</a:t>
             </a:r>
           </a:p>
           <a:p xmlns:a="http://schemas.openxmlformats.org/drawingml/2006/main">
@@ -1922,7 +1922,7 @@
           <a:p xmlns:a="http://schemas.openxmlformats.org/drawingml/2006/main">
             <a:r>
               <a:rPr sz="1400"/>
-              <a:t>Uitleg: De les bereidt voor op opgave 8a–e. Haal betalingsbereidheid en de driehoeksformule op uit §2.3.1 (p. 72–75). MK zijn extra kosten per extra product (§2.1.3, p. 19–21). We gaan van één transactie naar een doorlopende marktgrafiek.</a:t>
+              <a:t>Uitleg: De les bereidt voor op opgave 8a–e. Haal betalingsbereidheid en de driehoeksformule op uit §2.3.1 (p. 73–76). MK zijn extra kosten per extra product (§2.1.3, p. 19–21). We gaan van één transactie naar een doorlopende marktgrafiek.</a:t>
             </a:r>
           </a:p>
           <a:p xmlns:a="http://schemas.openxmlformats.org/drawingml/2006/main">
@@ -1958,13 +1958,13 @@
           <a:p xmlns:a="http://schemas.openxmlformats.org/drawingml/2006/main">
             <a:r>
               <a:rPr sz="1400"/>
-              <a:t>Bron: leerlingenboek Boek 2, chat-2026, gedrukte pagina 80–84. https://github.com/meijer1973/4veco-lessen/blob/d53080f38ebbdbba319e6d9b89dcba86067a72be/Boek%202%20-%20Kosten%2C%20opbrengsten%2C%20elasticiteit%20en%20surplus/edities/chat-2026/boek/Boek_2_Compleet.pdf</a:t>
+              <a:t>Bron: leerlingenboek Boek 2, chat-2026, gedrukte pagina 81–85. https://github.com/meijer1973/4veco-lessen/blob/a8940a7a79e22857a3e306a91fe923c48c63e716/Boek%202%20-%20Kosten%2C%20opbrengsten%2C%20elasticiteit%20en%20surplus/edities/chat-2026/boek/Boek_2_Compleet.pdf</a:t>
             </a:r>
           </a:p>
           <a:p xmlns:a="http://schemas.openxmlformats.org/drawingml/2006/main">
             <a:r>
               <a:rPr sz="1400"/>
-              <a:t>Antwoordmodel: https://github.com/meijer1973/4veco-lessen/blob/d53080f38ebbdbba319e6d9b89dcba86067a72be/Boek%202%20-%20Kosten%2C%20opbrengsten%2C%20elasticiteit%20en%20surplus/edities/chat-2026/boek/Boek_2_Compleet_Antwoorden.pdf</a:t>
+              <a:t>Antwoordmodel: https://github.com/meijer1973/4veco-lessen/blob/a8940a7a79e22857a3e306a91fe923c48c63e716/Boek%202%20-%20Kosten%2C%20opbrengsten%2C%20elasticiteit%20en%20surplus/edities/chat-2026/boek/Boek_2_Compleet_Antwoorden.pdf</a:t>
             </a:r>
           </a:p>
           <a:p xmlns:a="http://schemas.openxmlformats.org/drawingml/2006/main">
@@ -2089,13 +2089,13 @@
           <a:p xmlns:a="http://schemas.openxmlformats.org/drawingml/2006/main">
             <a:r>
               <a:rPr sz="1400"/>
-              <a:t>Bron: leerlingenboek Boek 2, chat-2026, gedrukte pagina 89. https://github.com/meijer1973/4veco-lessen/blob/d53080f38ebbdbba319e6d9b89dcba86067a72be/Boek%202%20-%20Kosten%2C%20opbrengsten%2C%20elasticiteit%20en%20surplus/edities/chat-2026/boek/Boek_2_Compleet.pdf</a:t>
+              <a:t>Bron: leerlingenboek Boek 2, chat-2026, gedrukte pagina 90. https://github.com/meijer1973/4veco-lessen/blob/a8940a7a79e22857a3e306a91fe923c48c63e716/Boek%202%20-%20Kosten%2C%20opbrengsten%2C%20elasticiteit%20en%20surplus/edities/chat-2026/boek/Boek_2_Compleet.pdf</a:t>
             </a:r>
           </a:p>
           <a:p xmlns:a="http://schemas.openxmlformats.org/drawingml/2006/main">
             <a:r>
               <a:rPr sz="1400"/>
-              <a:t>Antwoordmodel: https://github.com/meijer1973/4veco-lessen/blob/d53080f38ebbdbba319e6d9b89dcba86067a72be/Boek%202%20-%20Kosten%2C%20opbrengsten%2C%20elasticiteit%20en%20surplus/edities/chat-2026/boek/Boek_2_Compleet_Antwoorden.pdf</a:t>
+              <a:t>Antwoordmodel: https://github.com/meijer1973/4veco-lessen/blob/a8940a7a79e22857a3e306a91fe923c48c63e716/Boek%202%20-%20Kosten%2C%20opbrengsten%2C%20elasticiteit%20en%20surplus/edities/chat-2026/boek/Boek_2_Compleet_Antwoorden.pdf</a:t>
             </a:r>
           </a:p>
           <a:p xmlns:a="http://schemas.openxmlformats.org/drawingml/2006/main">
@@ -2220,13 +2220,13 @@
           <a:p xmlns:a="http://schemas.openxmlformats.org/drawingml/2006/main">
             <a:r>
               <a:rPr sz="1400"/>
-              <a:t>Bron: leerlingenboek Boek 2, chat-2026, gedrukte pagina 88–89. https://github.com/meijer1973/4veco-lessen/blob/d53080f38ebbdbba319e6d9b89dcba86067a72be/Boek%202%20-%20Kosten%2C%20opbrengsten%2C%20elasticiteit%20en%20surplus/edities/chat-2026/boek/Boek_2_Compleet.pdf</a:t>
+              <a:t>Bron: leerlingenboek Boek 2, chat-2026, gedrukte pagina 89–90. https://github.com/meijer1973/4veco-lessen/blob/a8940a7a79e22857a3e306a91fe923c48c63e716/Boek%202%20-%20Kosten%2C%20opbrengsten%2C%20elasticiteit%20en%20surplus/edities/chat-2026/boek/Boek_2_Compleet.pdf</a:t>
             </a:r>
           </a:p>
           <a:p xmlns:a="http://schemas.openxmlformats.org/drawingml/2006/main">
             <a:r>
               <a:rPr sz="1400"/>
-              <a:t>Antwoordmodel: https://github.com/meijer1973/4veco-lessen/blob/d53080f38ebbdbba319e6d9b89dcba86067a72be/Boek%202%20-%20Kosten%2C%20opbrengsten%2C%20elasticiteit%20en%20surplus/edities/chat-2026/boek/Boek_2_Compleet_Antwoorden.pdf</a:t>
+              <a:t>Antwoordmodel: https://github.com/meijer1973/4veco-lessen/blob/a8940a7a79e22857a3e306a91fe923c48c63e716/Boek%202%20-%20Kosten%2C%20opbrengsten%2C%20elasticiteit%20en%20surplus/edities/chat-2026/boek/Boek_2_Compleet_Antwoorden.pdf</a:t>
             </a:r>
           </a:p>
           <a:p xmlns:a="http://schemas.openxmlformats.org/drawingml/2006/main">
@@ -2351,13 +2351,13 @@
           <a:p xmlns:a="http://schemas.openxmlformats.org/drawingml/2006/main">
             <a:r>
               <a:rPr sz="1400"/>
-              <a:t>Bron: leerlingenboek Boek 2, chat-2026, gedrukte pagina 88–89. https://github.com/meijer1973/4veco-lessen/blob/d53080f38ebbdbba319e6d9b89dcba86067a72be/Boek%202%20-%20Kosten%2C%20opbrengsten%2C%20elasticiteit%20en%20surplus/edities/chat-2026/boek/Boek_2_Compleet.pdf</a:t>
+              <a:t>Bron: leerlingenboek Boek 2, chat-2026, gedrukte pagina 89–90. https://github.com/meijer1973/4veco-lessen/blob/a8940a7a79e22857a3e306a91fe923c48c63e716/Boek%202%20-%20Kosten%2C%20opbrengsten%2C%20elasticiteit%20en%20surplus/edities/chat-2026/boek/Boek_2_Compleet.pdf</a:t>
             </a:r>
           </a:p>
           <a:p xmlns:a="http://schemas.openxmlformats.org/drawingml/2006/main">
             <a:r>
               <a:rPr sz="1400"/>
-              <a:t>Antwoordmodel: https://github.com/meijer1973/4veco-lessen/blob/d53080f38ebbdbba319e6d9b89dcba86067a72be/Boek%202%20-%20Kosten%2C%20opbrengsten%2C%20elasticiteit%20en%20surplus/edities/chat-2026/boek/Boek_2_Compleet_Antwoorden.pdf</a:t>
+              <a:t>Antwoordmodel: https://github.com/meijer1973/4veco-lessen/blob/a8940a7a79e22857a3e306a91fe923c48c63e716/Boek%202%20-%20Kosten%2C%20opbrengsten%2C%20elasticiteit%20en%20surplus/edities/chat-2026/boek/Boek_2_Compleet_Antwoorden.pdf</a:t>
             </a:r>
           </a:p>
           <a:p xmlns:a="http://schemas.openxmlformats.org/drawingml/2006/main">
@@ -2482,13 +2482,13 @@
           <a:p xmlns:a="http://schemas.openxmlformats.org/drawingml/2006/main">
             <a:r>
               <a:rPr sz="1400"/>
-              <a:t>Bron: leerlingenboek Boek 2, chat-2026, gedrukte pagina 88–89. https://github.com/meijer1973/4veco-lessen/blob/d53080f38ebbdbba319e6d9b89dcba86067a72be/Boek%202%20-%20Kosten%2C%20opbrengsten%2C%20elasticiteit%20en%20surplus/edities/chat-2026/boek/Boek_2_Compleet.pdf</a:t>
+              <a:t>Bron: leerlingenboek Boek 2, chat-2026, gedrukte pagina 89–90. https://github.com/meijer1973/4veco-lessen/blob/a8940a7a79e22857a3e306a91fe923c48c63e716/Boek%202%20-%20Kosten%2C%20opbrengsten%2C%20elasticiteit%20en%20surplus/edities/chat-2026/boek/Boek_2_Compleet.pdf</a:t>
             </a:r>
           </a:p>
           <a:p xmlns:a="http://schemas.openxmlformats.org/drawingml/2006/main">
             <a:r>
               <a:rPr sz="1400"/>
-              <a:t>Antwoordmodel: https://github.com/meijer1973/4veco-lessen/blob/d53080f38ebbdbba319e6d9b89dcba86067a72be/Boek%202%20-%20Kosten%2C%20opbrengsten%2C%20elasticiteit%20en%20surplus/edities/chat-2026/boek/Boek_2_Compleet_Antwoorden.pdf</a:t>
+              <a:t>Antwoordmodel: https://github.com/meijer1973/4veco-lessen/blob/a8940a7a79e22857a3e306a91fe923c48c63e716/Boek%202%20-%20Kosten%2C%20opbrengsten%2C%20elasticiteit%20en%20surplus/edities/chat-2026/boek/Boek_2_Compleet_Antwoorden.pdf</a:t>
             </a:r>
           </a:p>
           <a:p xmlns:a="http://schemas.openxmlformats.org/drawingml/2006/main">
@@ -2613,13 +2613,13 @@
           <a:p xmlns:a="http://schemas.openxmlformats.org/drawingml/2006/main">
             <a:r>
               <a:rPr sz="1400"/>
-              <a:t>Bron: leerlingenboek Boek 2, chat-2026, gedrukte pagina 88–89. https://github.com/meijer1973/4veco-lessen/blob/d53080f38ebbdbba319e6d9b89dcba86067a72be/Boek%202%20-%20Kosten%2C%20opbrengsten%2C%20elasticiteit%20en%20surplus/edities/chat-2026/boek/Boek_2_Compleet.pdf</a:t>
+              <a:t>Bron: leerlingenboek Boek 2, chat-2026, gedrukte pagina 89–90. https://github.com/meijer1973/4veco-lessen/blob/a8940a7a79e22857a3e306a91fe923c48c63e716/Boek%202%20-%20Kosten%2C%20opbrengsten%2C%20elasticiteit%20en%20surplus/edities/chat-2026/boek/Boek_2_Compleet.pdf</a:t>
             </a:r>
           </a:p>
           <a:p xmlns:a="http://schemas.openxmlformats.org/drawingml/2006/main">
             <a:r>
               <a:rPr sz="1400"/>
-              <a:t>Antwoordmodel: https://github.com/meijer1973/4veco-lessen/blob/d53080f38ebbdbba319e6d9b89dcba86067a72be/Boek%202%20-%20Kosten%2C%20opbrengsten%2C%20elasticiteit%20en%20surplus/edities/chat-2026/boek/Boek_2_Compleet_Antwoorden.pdf</a:t>
+              <a:t>Antwoordmodel: https://github.com/meijer1973/4veco-lessen/blob/a8940a7a79e22857a3e306a91fe923c48c63e716/Boek%202%20-%20Kosten%2C%20opbrengsten%2C%20elasticiteit%20en%20surplus/edities/chat-2026/boek/Boek_2_Compleet_Antwoorden.pdf</a:t>
             </a:r>
           </a:p>
           <a:p xmlns:a="http://schemas.openxmlformats.org/drawingml/2006/main">
@@ -2744,13 +2744,13 @@
           <a:p xmlns:a="http://schemas.openxmlformats.org/drawingml/2006/main">
             <a:r>
               <a:rPr sz="1400"/>
-              <a:t>Bron: leerlingenboek Boek 2, chat-2026, gedrukte pagina 88–89. https://github.com/meijer1973/4veco-lessen/blob/d53080f38ebbdbba319e6d9b89dcba86067a72be/Boek%202%20-%20Kosten%2C%20opbrengsten%2C%20elasticiteit%20en%20surplus/edities/chat-2026/boek/Boek_2_Compleet.pdf</a:t>
+              <a:t>Bron: leerlingenboek Boek 2, chat-2026, gedrukte pagina 89–90. https://github.com/meijer1973/4veco-lessen/blob/a8940a7a79e22857a3e306a91fe923c48c63e716/Boek%202%20-%20Kosten%2C%20opbrengsten%2C%20elasticiteit%20en%20surplus/edities/chat-2026/boek/Boek_2_Compleet.pdf</a:t>
             </a:r>
           </a:p>
           <a:p xmlns:a="http://schemas.openxmlformats.org/drawingml/2006/main">
             <a:r>
               <a:rPr sz="1400"/>
-              <a:t>Antwoordmodel: https://github.com/meijer1973/4veco-lessen/blob/d53080f38ebbdbba319e6d9b89dcba86067a72be/Boek%202%20-%20Kosten%2C%20opbrengsten%2C%20elasticiteit%20en%20surplus/edities/chat-2026/boek/Boek_2_Compleet_Antwoorden.pdf</a:t>
+              <a:t>Antwoordmodel: https://github.com/meijer1973/4veco-lessen/blob/a8940a7a79e22857a3e306a91fe923c48c63e716/Boek%202%20-%20Kosten%2C%20opbrengsten%2C%20elasticiteit%20en%20surplus/edities/chat-2026/boek/Boek_2_Compleet_Antwoorden.pdf</a:t>
             </a:r>
           </a:p>
           <a:p xmlns:a="http://schemas.openxmlformats.org/drawingml/2006/main">
@@ -2875,13 +2875,13 @@
           <a:p xmlns:a="http://schemas.openxmlformats.org/drawingml/2006/main">
             <a:r>
               <a:rPr sz="1400"/>
-              <a:t>Bron: leerlingenboek Boek 2, chat-2026, gedrukte pagina 88–89. https://github.com/meijer1973/4veco-lessen/blob/d53080f38ebbdbba319e6d9b89dcba86067a72be/Boek%202%20-%20Kosten%2C%20opbrengsten%2C%20elasticiteit%20en%20surplus/edities/chat-2026/boek/Boek_2_Compleet.pdf</a:t>
+              <a:t>Bron: leerlingenboek Boek 2, chat-2026, gedrukte pagina 89–90. https://github.com/meijer1973/4veco-lessen/blob/a8940a7a79e22857a3e306a91fe923c48c63e716/Boek%202%20-%20Kosten%2C%20opbrengsten%2C%20elasticiteit%20en%20surplus/edities/chat-2026/boek/Boek_2_Compleet.pdf</a:t>
             </a:r>
           </a:p>
           <a:p xmlns:a="http://schemas.openxmlformats.org/drawingml/2006/main">
             <a:r>
               <a:rPr sz="1400"/>
-              <a:t>Antwoordmodel: https://github.com/meijer1973/4veco-lessen/blob/d53080f38ebbdbba319e6d9b89dcba86067a72be/Boek%202%20-%20Kosten%2C%20opbrengsten%2C%20elasticiteit%20en%20surplus/edities/chat-2026/boek/Boek_2_Compleet_Antwoorden.pdf</a:t>
+              <a:t>Antwoordmodel: https://github.com/meijer1973/4veco-lessen/blob/a8940a7a79e22857a3e306a91fe923c48c63e716/Boek%202%20-%20Kosten%2C%20opbrengsten%2C%20elasticiteit%20en%20surplus/edities/chat-2026/boek/Boek_2_Compleet_Antwoorden.pdf</a:t>
             </a:r>
           </a:p>
           <a:p xmlns:a="http://schemas.openxmlformats.org/drawingml/2006/main">
@@ -2970,7 +2970,7 @@
           <a:p xmlns:a="http://schemas.openxmlformats.org/drawingml/2006/main">
             <a:r>
               <a:rPr sz="1400"/>
-              <a:t>Uitleg: Laat het overzicht staan tijdens afsluiting / huiswerk. Start: 1–2 op p. 84. Basis: 3 op p. 85, 4–5 op p. 86. Zelfstandig: 6–7 op p. 87. Doel: 8, bronnen p. 88 en vragen p. 89. Huiswerk 3–8 maken en nakijken. Bonus 9 en herhaling 10–11 zijn extra. De volledige route hoeft niet in één les af. Opgave 1 haalt evenwicht op uit §1.3.2, maar daar stonden Qv(P) en Qa(P). De inverse vorm P(Q) is een verandering van voorstelling. Geef daarom zo nodig vooraf de steun op p. 82: beide formules geven P bij dezelfde Q; stel ze gelijk, los Q op en vul in. Laat dit na dia 7 opnieuw verwoorden. In opgave 2 is kopersvoordeel bekend uit §2.3.1, maar verkopersvoordeel en het wegvallen van de prijs zijn nieuw. Laat de leerling eerst op p. 80 de twee voordelen en figuur 1 lezen, de passende verschillen aanwijzen en twijfel noteren. Dit is verkennen met steun. Bij terugkeer vóór basiswerk: laat 2a–b opnieuw proberen en vraag waarom de betaling wegvalt. Bespreek dan zo nodig de antwoorden: CS 3, PS 4, samen 7 euro.</a:t>
+              <a:t>Uitleg: Laat het overzicht staan tijdens afsluiting / huiswerk. Start: 1–2 op p. 85. Basis: 3 op p. 86, 4–5 op p. 87. Zelfstandig: 6–7 op p. 88. Doel: 8, bronnen p. 89 en vragen p. 90. Huiswerk 3–8 maken en nakijken. Bonus 9 en herhaling 10–11 zijn extra. De volledige route hoeft niet in één les af. Opgave 1 haalt evenwicht op uit §1.3.2, maar daar stonden Qv(P) en Qa(P). De inverse vorm P(Q) is een verandering van voorstelling. Geef daarom zo nodig vooraf de steun op p. 83: beide formules geven P bij dezelfde Q; stel ze gelijk, los Q op en vul in. Laat dit na dia 7 opnieuw verwoorden. In opgave 2 is kopersvoordeel bekend uit §2.3.1, maar verkopersvoordeel en het wegvallen van de prijs zijn nieuw. Laat de leerling eerst op p. 81 de twee voordelen en figuur 1 lezen, de passende verschillen aanwijzen en twijfel noteren. Dit is verkennen met steun. Bij terugkeer vóór basiswerk: laat 2a–b opnieuw proberen en vraag waarom de betaling wegvalt. Bespreek dan zo nodig de antwoorden: CS 3, PS 4, samen 7 euro.</a:t>
             </a:r>
           </a:p>
           <a:p xmlns:a="http://schemas.openxmlformats.org/drawingml/2006/main">
@@ -3006,13 +3006,13 @@
           <a:p xmlns:a="http://schemas.openxmlformats.org/drawingml/2006/main">
             <a:r>
               <a:rPr sz="1400"/>
-              <a:t>Bron: leerlingenboek Boek 2, chat-2026, gedrukte pagina 80, 84–89. https://github.com/meijer1973/4veco-lessen/blob/d53080f38ebbdbba319e6d9b89dcba86067a72be/Boek%202%20-%20Kosten%2C%20opbrengsten%2C%20elasticiteit%20en%20surplus/edities/chat-2026/boek/Boek_2_Compleet.pdf</a:t>
+              <a:t>Bron: leerlingenboek Boek 2, chat-2026, gedrukte pagina 81, 85–90. https://github.com/meijer1973/4veco-lessen/blob/a8940a7a79e22857a3e306a91fe923c48c63e716/Boek%202%20-%20Kosten%2C%20opbrengsten%2C%20elasticiteit%20en%20surplus/edities/chat-2026/boek/Boek_2_Compleet.pdf</a:t>
             </a:r>
           </a:p>
           <a:p xmlns:a="http://schemas.openxmlformats.org/drawingml/2006/main">
             <a:r>
               <a:rPr sz="1400"/>
-              <a:t>Antwoordmodel: https://github.com/meijer1973/4veco-lessen/blob/d53080f38ebbdbba319e6d9b89dcba86067a72be/Boek%202%20-%20Kosten%2C%20opbrengsten%2C%20elasticiteit%20en%20surplus/edities/chat-2026/boek/Boek_2_Compleet_Antwoorden.pdf</a:t>
+              <a:t>Antwoordmodel: https://github.com/meijer1973/4veco-lessen/blob/a8940a7a79e22857a3e306a91fe923c48c63e716/Boek%202%20-%20Kosten%2C%20opbrengsten%2C%20elasticiteit%20en%20surplus/edities/chat-2026/boek/Boek_2_Compleet_Antwoorden.pdf</a:t>
             </a:r>
           </a:p>
           <a:p xmlns:a="http://schemas.openxmlformats.org/drawingml/2006/main">
@@ -3137,13 +3137,13 @@
           <a:p xmlns:a="http://schemas.openxmlformats.org/drawingml/2006/main">
             <a:r>
               <a:rPr sz="1400"/>
-              <a:t>Bron: leerlingenboek Boek 2, chat-2026, gedrukte pagina 80. https://github.com/meijer1973/4veco-lessen/blob/d53080f38ebbdbba319e6d9b89dcba86067a72be/Boek%202%20-%20Kosten%2C%20opbrengsten%2C%20elasticiteit%20en%20surplus/edities/chat-2026/boek/Boek_2_Compleet.pdf</a:t>
+              <a:t>Bron: leerlingenboek Boek 2, chat-2026, gedrukte pagina 81. https://github.com/meijer1973/4veco-lessen/blob/a8940a7a79e22857a3e306a91fe923c48c63e716/Boek%202%20-%20Kosten%2C%20opbrengsten%2C%20elasticiteit%20en%20surplus/edities/chat-2026/boek/Boek_2_Compleet.pdf</a:t>
             </a:r>
           </a:p>
           <a:p xmlns:a="http://schemas.openxmlformats.org/drawingml/2006/main">
             <a:r>
               <a:rPr sz="1400"/>
-              <a:t>Antwoordmodel: https://github.com/meijer1973/4veco-lessen/blob/d53080f38ebbdbba319e6d9b89dcba86067a72be/Boek%202%20-%20Kosten%2C%20opbrengsten%2C%20elasticiteit%20en%20surplus/edities/chat-2026/boek/Boek_2_Compleet_Antwoorden.pdf</a:t>
+              <a:t>Antwoordmodel: https://github.com/meijer1973/4veco-lessen/blob/a8940a7a79e22857a3e306a91fe923c48c63e716/Boek%202%20-%20Kosten%2C%20opbrengsten%2C%20elasticiteit%20en%20surplus/edities/chat-2026/boek/Boek_2_Compleet_Antwoorden.pdf</a:t>
             </a:r>
           </a:p>
           <a:p xmlns:a="http://schemas.openxmlformats.org/drawingml/2006/main">
@@ -3268,13 +3268,13 @@
           <a:p xmlns:a="http://schemas.openxmlformats.org/drawingml/2006/main">
             <a:r>
               <a:rPr sz="1400"/>
-              <a:t>Bron: leerlingenboek Boek 2, chat-2026, gedrukte pagina 80–81. https://github.com/meijer1973/4veco-lessen/blob/d53080f38ebbdbba319e6d9b89dcba86067a72be/Boek%202%20-%20Kosten%2C%20opbrengsten%2C%20elasticiteit%20en%20surplus/edities/chat-2026/boek/Boek_2_Compleet.pdf</a:t>
+              <a:t>Bron: leerlingenboek Boek 2, chat-2026, gedrukte pagina 81–82. https://github.com/meijer1973/4veco-lessen/blob/a8940a7a79e22857a3e306a91fe923c48c63e716/Boek%202%20-%20Kosten%2C%20opbrengsten%2C%20elasticiteit%20en%20surplus/edities/chat-2026/boek/Boek_2_Compleet.pdf</a:t>
             </a:r>
           </a:p>
           <a:p xmlns:a="http://schemas.openxmlformats.org/drawingml/2006/main">
             <a:r>
               <a:rPr sz="1400"/>
-              <a:t>Antwoordmodel: https://github.com/meijer1973/4veco-lessen/blob/d53080f38ebbdbba319e6d9b89dcba86067a72be/Boek%202%20-%20Kosten%2C%20opbrengsten%2C%20elasticiteit%20en%20surplus/edities/chat-2026/boek/Boek_2_Compleet_Antwoorden.pdf</a:t>
+              <a:t>Antwoordmodel: https://github.com/meijer1973/4veco-lessen/blob/a8940a7a79e22857a3e306a91fe923c48c63e716/Boek%202%20-%20Kosten%2C%20opbrengsten%2C%20elasticiteit%20en%20surplus/edities/chat-2026/boek/Boek_2_Compleet_Antwoorden.pdf</a:t>
             </a:r>
           </a:p>
           <a:p xmlns:a="http://schemas.openxmlformats.org/drawingml/2006/main">
@@ -3399,13 +3399,13 @@
           <a:p xmlns:a="http://schemas.openxmlformats.org/drawingml/2006/main">
             <a:r>
               <a:rPr sz="1400"/>
-              <a:t>Bron: leerlingenboek Boek 2, chat-2026, gedrukte pagina 80, 86. https://github.com/meijer1973/4veco-lessen/blob/d53080f38ebbdbba319e6d9b89dcba86067a72be/Boek%202%20-%20Kosten%2C%20opbrengsten%2C%20elasticiteit%20en%20surplus/edities/chat-2026/boek/Boek_2_Compleet.pdf</a:t>
+              <a:t>Bron: leerlingenboek Boek 2, chat-2026, gedrukte pagina 81, 87. https://github.com/meijer1973/4veco-lessen/blob/a8940a7a79e22857a3e306a91fe923c48c63e716/Boek%202%20-%20Kosten%2C%20opbrengsten%2C%20elasticiteit%20en%20surplus/edities/chat-2026/boek/Boek_2_Compleet.pdf</a:t>
             </a:r>
           </a:p>
           <a:p xmlns:a="http://schemas.openxmlformats.org/drawingml/2006/main">
             <a:r>
               <a:rPr sz="1400"/>
-              <a:t>Antwoordmodel: https://github.com/meijer1973/4veco-lessen/blob/d53080f38ebbdbba319e6d9b89dcba86067a72be/Boek%202%20-%20Kosten%2C%20opbrengsten%2C%20elasticiteit%20en%20surplus/edities/chat-2026/boek/Boek_2_Compleet_Antwoorden.pdf</a:t>
+              <a:t>Antwoordmodel: https://github.com/meijer1973/4veco-lessen/blob/a8940a7a79e22857a3e306a91fe923c48c63e716/Boek%202%20-%20Kosten%2C%20opbrengsten%2C%20elasticiteit%20en%20surplus/edities/chat-2026/boek/Boek_2_Compleet_Antwoorden.pdf</a:t>
             </a:r>
           </a:p>
           <a:p xmlns:a="http://schemas.openxmlformats.org/drawingml/2006/main">
@@ -3530,13 +3530,13 @@
           <a:p xmlns:a="http://schemas.openxmlformats.org/drawingml/2006/main">
             <a:r>
               <a:rPr sz="1400"/>
-              <a:t>Bron: leerlingenboek Boek 2, chat-2026, gedrukte pagina 81. https://github.com/meijer1973/4veco-lessen/blob/d53080f38ebbdbba319e6d9b89dcba86067a72be/Boek%202%20-%20Kosten%2C%20opbrengsten%2C%20elasticiteit%20en%20surplus/edities/chat-2026/boek/Boek_2_Compleet.pdf</a:t>
+              <a:t>Bron: leerlingenboek Boek 2, chat-2026, gedrukte pagina 82. https://github.com/meijer1973/4veco-lessen/blob/a8940a7a79e22857a3e306a91fe923c48c63e716/Boek%202%20-%20Kosten%2C%20opbrengsten%2C%20elasticiteit%20en%20surplus/edities/chat-2026/boek/Boek_2_Compleet.pdf</a:t>
             </a:r>
           </a:p>
           <a:p xmlns:a="http://schemas.openxmlformats.org/drawingml/2006/main">
             <a:r>
               <a:rPr sz="1400"/>
-              <a:t>Antwoordmodel: https://github.com/meijer1973/4veco-lessen/blob/d53080f38ebbdbba319e6d9b89dcba86067a72be/Boek%202%20-%20Kosten%2C%20opbrengsten%2C%20elasticiteit%20en%20surplus/edities/chat-2026/boek/Boek_2_Compleet_Antwoorden.pdf</a:t>
+              <a:t>Antwoordmodel: https://github.com/meijer1973/4veco-lessen/blob/a8940a7a79e22857a3e306a91fe923c48c63e716/Boek%202%20-%20Kosten%2C%20opbrengsten%2C%20elasticiteit%20en%20surplus/edities/chat-2026/boek/Boek_2_Compleet_Antwoorden.pdf</a:t>
             </a:r>
           </a:p>
           <a:p xmlns:a="http://schemas.openxmlformats.org/drawingml/2006/main">
@@ -3661,13 +3661,13 @@
           <a:p xmlns:a="http://schemas.openxmlformats.org/drawingml/2006/main">
             <a:r>
               <a:rPr sz="1400"/>
-              <a:t>Bron: leerlingenboek Boek 2, chat-2026, gedrukte pagina 82–83. https://github.com/meijer1973/4veco-lessen/blob/d53080f38ebbdbba319e6d9b89dcba86067a72be/Boek%202%20-%20Kosten%2C%20opbrengsten%2C%20elasticiteit%20en%20surplus/edities/chat-2026/boek/Boek_2_Compleet.pdf</a:t>
+              <a:t>Bron: leerlingenboek Boek 2, chat-2026, gedrukte pagina 83–84. https://github.com/meijer1973/4veco-lessen/blob/a8940a7a79e22857a3e306a91fe923c48c63e716/Boek%202%20-%20Kosten%2C%20opbrengsten%2C%20elasticiteit%20en%20surplus/edities/chat-2026/boek/Boek_2_Compleet.pdf</a:t>
             </a:r>
           </a:p>
           <a:p xmlns:a="http://schemas.openxmlformats.org/drawingml/2006/main">
             <a:r>
               <a:rPr sz="1400"/>
-              <a:t>Antwoordmodel: https://github.com/meijer1973/4veco-lessen/blob/d53080f38ebbdbba319e6d9b89dcba86067a72be/Boek%202%20-%20Kosten%2C%20opbrengsten%2C%20elasticiteit%20en%20surplus/edities/chat-2026/boek/Boek_2_Compleet_Antwoorden.pdf</a:t>
+              <a:t>Antwoordmodel: https://github.com/meijer1973/4veco-lessen/blob/a8940a7a79e22857a3e306a91fe923c48c63e716/Boek%202%20-%20Kosten%2C%20opbrengsten%2C%20elasticiteit%20en%20surplus/edities/chat-2026/boek/Boek_2_Compleet_Antwoorden.pdf</a:t>
             </a:r>
           </a:p>
           <a:p xmlns:a="http://schemas.openxmlformats.org/drawingml/2006/main">
@@ -3792,13 +3792,13 @@
           <a:p xmlns:a="http://schemas.openxmlformats.org/drawingml/2006/main">
             <a:r>
               <a:rPr sz="1400"/>
-              <a:t>Bron: leerlingenboek Boek 2, chat-2026, gedrukte pagina 81–83. https://github.com/meijer1973/4veco-lessen/blob/d53080f38ebbdbba319e6d9b89dcba86067a72be/Boek%202%20-%20Kosten%2C%20opbrengsten%2C%20elasticiteit%20en%20surplus/edities/chat-2026/boek/Boek_2_Compleet.pdf</a:t>
+              <a:t>Bron: leerlingenboek Boek 2, chat-2026, gedrukte pagina 82–84. https://github.com/meijer1973/4veco-lessen/blob/a8940a7a79e22857a3e306a91fe923c48c63e716/Boek%202%20-%20Kosten%2C%20opbrengsten%2C%20elasticiteit%20en%20surplus/edities/chat-2026/boek/Boek_2_Compleet.pdf</a:t>
             </a:r>
           </a:p>
           <a:p xmlns:a="http://schemas.openxmlformats.org/drawingml/2006/main">
             <a:r>
               <a:rPr sz="1400"/>
-              <a:t>Antwoordmodel: https://github.com/meijer1973/4veco-lessen/blob/d53080f38ebbdbba319e6d9b89dcba86067a72be/Boek%202%20-%20Kosten%2C%20opbrengsten%2C%20elasticiteit%20en%20surplus/edities/chat-2026/boek/Boek_2_Compleet_Antwoorden.pdf</a:t>
+              <a:t>Antwoordmodel: https://github.com/meijer1973/4veco-lessen/blob/a8940a7a79e22857a3e306a91fe923c48c63e716/Boek%202%20-%20Kosten%2C%20opbrengsten%2C%20elasticiteit%20en%20surplus/edities/chat-2026/boek/Boek_2_Compleet_Antwoorden.pdf</a:t>
             </a:r>
           </a:p>
           <a:p xmlns:a="http://schemas.openxmlformats.org/drawingml/2006/main">
@@ -3923,13 +3923,13 @@
           <a:p xmlns:a="http://schemas.openxmlformats.org/drawingml/2006/main">
             <a:r>
               <a:rPr sz="1400"/>
-              <a:t>Bron: leerlingenboek Boek 2, chat-2026, gedrukte pagina 74–75, 82–83. https://github.com/meijer1973/4veco-lessen/blob/d53080f38ebbdbba319e6d9b89dcba86067a72be/Boek%202%20-%20Kosten%2C%20opbrengsten%2C%20elasticiteit%20en%20surplus/edities/chat-2026/boek/Boek_2_Compleet.pdf</a:t>
+              <a:t>Bron: leerlingenboek Boek 2, chat-2026, gedrukte pagina 75–76, 83–84. https://github.com/meijer1973/4veco-lessen/blob/a8940a7a79e22857a3e306a91fe923c48c63e716/Boek%202%20-%20Kosten%2C%20opbrengsten%2C%20elasticiteit%20en%20surplus/edities/chat-2026/boek/Boek_2_Compleet.pdf</a:t>
             </a:r>
           </a:p>
           <a:p xmlns:a="http://schemas.openxmlformats.org/drawingml/2006/main">
             <a:r>
               <a:rPr sz="1400"/>
-              <a:t>Antwoordmodel: https://github.com/meijer1973/4veco-lessen/blob/d53080f38ebbdbba319e6d9b89dcba86067a72be/Boek%202%20-%20Kosten%2C%20opbrengsten%2C%20elasticiteit%20en%20surplus/edities/chat-2026/boek/Boek_2_Compleet_Antwoorden.pdf</a:t>
+              <a:t>Antwoordmodel: https://github.com/meijer1973/4veco-lessen/blob/a8940a7a79e22857a3e306a91fe923c48c63e716/Boek%202%20-%20Kosten%2C%20opbrengsten%2C%20elasticiteit%20en%20surplus/edities/chat-2026/boek/Boek_2_Compleet_Antwoorden.pdf</a:t>
             </a:r>
           </a:p>
           <a:p xmlns:a="http://schemas.openxmlformats.org/drawingml/2006/main">
@@ -4003,7 +4003,7 @@
   </p:cSld>
   <p:clrMap bg1="lt1" tx1="dk1" bg2="lt2" tx2="dk2" accent1="accent1" accent2="accent2" accent3="accent3" accent4="accent4" accent5="accent5" accent6="accent6" hlink="hlink" folHlink="folHlink"/>
   <p:sldLayoutIdLst>
-    <p:sldLayoutId xmlns:r="http://schemas.openxmlformats.org/officeDocument/2006/relationships" id="2147483649" r:id="R21e4dd89c3f547ec"/>
+    <p:sldLayoutId xmlns:r="http://schemas.openxmlformats.org/officeDocument/2006/relationships" id="2147483649" r:id="Rc5ab9d3943da462e"/>
   </p:sldLayoutIdLst>
   <p:txStyles>
     <p:titleStyle>
@@ -15737,7 +15737,7 @@
           <p:cNvPr id="29" name="Deze les: §2.3.2 Producentensurplus en totaal surplus">
             <a:extLst xmlns:a="http://schemas.openxmlformats.org/drawingml/2006/main">
               <a:ext uri="{FF2B5EF4-FFF2-40B4-BE49-F238E27FC236}">
-                <a16:creationId xmlns:a16="http://schemas.microsoft.com/office/drawing/2014/main" id="{AAB43CAF-002F-4B74-B24E-EB1D9843D7A8}"/>
+                <a16:creationId xmlns:a16="http://schemas.microsoft.com/office/drawing/2014/main" id="{3FBB1DD0-8E75-4103-88DE-C983E128F086}"/>
               </a:ext>
             </a:extLst>
           </p:cNvPr>
@@ -15794,7 +15794,7 @@
           <p:cNvPr id="2" name="">
             <a:extLst xmlns:a="http://schemas.openxmlformats.org/drawingml/2006/main">
               <a:ext uri="{FF2B5EF4-FFF2-40B4-BE49-F238E27FC236}">
-                <a16:creationId xmlns:a16="http://schemas.microsoft.com/office/drawing/2014/main" id="{DE544A5F-5605-4392-A533-4286A074A496}"/>
+                <a16:creationId xmlns:a16="http://schemas.microsoft.com/office/drawing/2014/main" id="{CE90E898-D4E5-4603-B873-C49D03D03814}"/>
               </a:ext>
             </a:extLst>
           </p:cNvPr>
@@ -15823,7 +15823,7 @@
           <p:cNvPr id="3" name="§2.3.2 Producentensurplus en totaal surplus">
             <a:extLst xmlns:a="http://schemas.openxmlformats.org/drawingml/2006/main">
               <a:ext uri="{FF2B5EF4-FFF2-40B4-BE49-F238E27FC236}">
-                <a16:creationId xmlns:a16="http://schemas.microsoft.com/office/drawing/2014/main" id="{11AD8E4E-9921-47E9-9264-FB48ECC3ECDF}"/>
+                <a16:creationId xmlns:a16="http://schemas.microsoft.com/office/drawing/2014/main" id="{6388B5A9-7F77-4FA2-B050-C1BCBA6473C9}"/>
               </a:ext>
             </a:extLst>
           </p:cNvPr>
@@ -15880,7 +15880,7 @@
           <p:cNvPr id="4" name="1">
             <a:extLst xmlns:a="http://schemas.openxmlformats.org/drawingml/2006/main">
               <a:ext uri="{FF2B5EF4-FFF2-40B4-BE49-F238E27FC236}">
-                <a16:creationId xmlns:a16="http://schemas.microsoft.com/office/drawing/2014/main" id="{4B41647D-8D49-4569-A59B-F7C46236F081}"/>
+                <a16:creationId xmlns:a16="http://schemas.microsoft.com/office/drawing/2014/main" id="{97E82D33-9374-4CAB-8AC0-AFB2A855E426}"/>
               </a:ext>
             </a:extLst>
           </p:cNvPr>
@@ -15937,7 +15937,7 @@
           <p:cNvPr id="5" name="phase">
             <a:extLst xmlns:a="http://schemas.openxmlformats.org/drawingml/2006/main">
               <a:ext uri="{FF2B5EF4-FFF2-40B4-BE49-F238E27FC236}">
-                <a16:creationId xmlns:a16="http://schemas.microsoft.com/office/drawing/2014/main" id="{7E5C6879-093F-4366-A778-FDD3C7BE0179}"/>
+                <a16:creationId xmlns:a16="http://schemas.microsoft.com/office/drawing/2014/main" id="{C2D9BF18-4272-4E06-9ABF-B16D31FC3730}"/>
               </a:ext>
             </a:extLst>
           </p:cNvPr>
@@ -15994,7 +15994,7 @@
           <p:cNvPr id="6" name="Lesroute">
             <a:extLst xmlns:a="http://schemas.openxmlformats.org/drawingml/2006/main">
               <a:ext uri="{FF2B5EF4-FFF2-40B4-BE49-F238E27FC236}">
-                <a16:creationId xmlns:a16="http://schemas.microsoft.com/office/drawing/2014/main" id="{389C28C8-3C48-4BE5-87A0-736D504A4E2E}"/>
+                <a16:creationId xmlns:a16="http://schemas.microsoft.com/office/drawing/2014/main" id="{8ECF283F-4462-4BB0-8F30-01ECFC9FE624}"/>
               </a:ext>
             </a:extLst>
           </p:cNvPr>
@@ -16051,7 +16051,7 @@
           <p:cNvPr id="7" name="route-number-1">
             <a:extLst xmlns:a="http://schemas.openxmlformats.org/drawingml/2006/main">
               <a:ext uri="{FF2B5EF4-FFF2-40B4-BE49-F238E27FC236}">
-                <a16:creationId xmlns:a16="http://schemas.microsoft.com/office/drawing/2014/main" id="{E1FB8CD1-365C-47E3-B352-0BF3246B677A}"/>
+                <a16:creationId xmlns:a16="http://schemas.microsoft.com/office/drawing/2014/main" id="{38CE88F8-9392-481F-8686-236159AF1EFF}"/>
               </a:ext>
             </a:extLst>
           </p:cNvPr>
@@ -16108,7 +16108,7 @@
           <p:cNvPr id="8" name="route-1">
             <a:extLst xmlns:a="http://schemas.openxmlformats.org/drawingml/2006/main">
               <a:ext uri="{FF2B5EF4-FFF2-40B4-BE49-F238E27FC236}">
-                <a16:creationId xmlns:a16="http://schemas.microsoft.com/office/drawing/2014/main" id="{554EA9E7-F450-40DC-94D1-E9D1B7812BB9}"/>
+                <a16:creationId xmlns:a16="http://schemas.microsoft.com/office/drawing/2014/main" id="{B8CFEAAD-A84F-4863-B3F0-0AA9C935EE5E}"/>
               </a:ext>
             </a:extLst>
           </p:cNvPr>
@@ -16165,7 +16165,7 @@
           <p:cNvPr id="9" name="route-number-2">
             <a:extLst xmlns:a="http://schemas.openxmlformats.org/drawingml/2006/main">
               <a:ext uri="{FF2B5EF4-FFF2-40B4-BE49-F238E27FC236}">
-                <a16:creationId xmlns:a16="http://schemas.microsoft.com/office/drawing/2014/main" id="{DB999994-9FC2-4F4C-A562-AC5678F817A6}"/>
+                <a16:creationId xmlns:a16="http://schemas.microsoft.com/office/drawing/2014/main" id="{E7602BFF-8858-4775-97D4-E1FDE727EDEE}"/>
               </a:ext>
             </a:extLst>
           </p:cNvPr>
@@ -16222,7 +16222,7 @@
           <p:cNvPr id="10" name="route-2">
             <a:extLst xmlns:a="http://schemas.openxmlformats.org/drawingml/2006/main">
               <a:ext uri="{FF2B5EF4-FFF2-40B4-BE49-F238E27FC236}">
-                <a16:creationId xmlns:a16="http://schemas.microsoft.com/office/drawing/2014/main" id="{403B29A4-6E2A-4905-B1FD-CA28740515E1}"/>
+                <a16:creationId xmlns:a16="http://schemas.microsoft.com/office/drawing/2014/main" id="{B87D1EF2-F704-4D0D-A3CD-2F2443F4CDC3}"/>
               </a:ext>
             </a:extLst>
           </p:cNvPr>
@@ -16279,7 +16279,7 @@
           <p:cNvPr id="11" name="route-number-3">
             <a:extLst xmlns:a="http://schemas.openxmlformats.org/drawingml/2006/main">
               <a:ext uri="{FF2B5EF4-FFF2-40B4-BE49-F238E27FC236}">
-                <a16:creationId xmlns:a16="http://schemas.microsoft.com/office/drawing/2014/main" id="{690EC574-DAEB-4588-88BD-0BA43FB9C877}"/>
+                <a16:creationId xmlns:a16="http://schemas.microsoft.com/office/drawing/2014/main" id="{B81801CA-5B3C-4072-B662-C071FFF11B11}"/>
               </a:ext>
             </a:extLst>
           </p:cNvPr>
@@ -16336,7 +16336,7 @@
           <p:cNvPr id="12" name="route-3">
             <a:extLst xmlns:a="http://schemas.openxmlformats.org/drawingml/2006/main">
               <a:ext uri="{FF2B5EF4-FFF2-40B4-BE49-F238E27FC236}">
-                <a16:creationId xmlns:a16="http://schemas.microsoft.com/office/drawing/2014/main" id="{A6AF8F20-5E6A-412D-A2FA-2F6E8E30C215}"/>
+                <a16:creationId xmlns:a16="http://schemas.microsoft.com/office/drawing/2014/main" id="{6F3AC546-F961-4ACC-9F8F-B07D5B6F5C09}"/>
               </a:ext>
             </a:extLst>
           </p:cNvPr>
@@ -16393,7 +16393,7 @@
           <p:cNvPr id="13" name="route-number-4">
             <a:extLst xmlns:a="http://schemas.openxmlformats.org/drawingml/2006/main">
               <a:ext uri="{FF2B5EF4-FFF2-40B4-BE49-F238E27FC236}">
-                <a16:creationId xmlns:a16="http://schemas.microsoft.com/office/drawing/2014/main" id="{C2B13A4F-3B85-44AF-8CA7-72086DFC94BF}"/>
+                <a16:creationId xmlns:a16="http://schemas.microsoft.com/office/drawing/2014/main" id="{F18A71EA-0AD1-4062-812A-1C5CF840321E}"/>
               </a:ext>
             </a:extLst>
           </p:cNvPr>
@@ -16450,7 +16450,7 @@
           <p:cNvPr id="14" name="route-4">
             <a:extLst xmlns:a="http://schemas.openxmlformats.org/drawingml/2006/main">
               <a:ext uri="{FF2B5EF4-FFF2-40B4-BE49-F238E27FC236}">
-                <a16:creationId xmlns:a16="http://schemas.microsoft.com/office/drawing/2014/main" id="{BFE6ABB3-518F-4622-BB94-6F455131366F}"/>
+                <a16:creationId xmlns:a16="http://schemas.microsoft.com/office/drawing/2014/main" id="{F84C3369-A6ED-4C08-839C-4CCCD209036F}"/>
               </a:ext>
             </a:extLst>
           </p:cNvPr>
@@ -16507,7 +16507,7 @@
           <p:cNvPr id="15" name="route-number-5">
             <a:extLst xmlns:a="http://schemas.openxmlformats.org/drawingml/2006/main">
               <a:ext uri="{FF2B5EF4-FFF2-40B4-BE49-F238E27FC236}">
-                <a16:creationId xmlns:a16="http://schemas.microsoft.com/office/drawing/2014/main" id="{6C44160F-1FB1-4557-B860-B202EF0824FE}"/>
+                <a16:creationId xmlns:a16="http://schemas.microsoft.com/office/drawing/2014/main" id="{48F1526B-57C5-4F69-9545-0EB2B2A77977}"/>
               </a:ext>
             </a:extLst>
           </p:cNvPr>
@@ -16564,7 +16564,7 @@
           <p:cNvPr id="16" name="route-5">
             <a:extLst xmlns:a="http://schemas.openxmlformats.org/drawingml/2006/main">
               <a:ext uri="{FF2B5EF4-FFF2-40B4-BE49-F238E27FC236}">
-                <a16:creationId xmlns:a16="http://schemas.microsoft.com/office/drawing/2014/main" id="{F47DE462-3AC2-4D25-B3EB-4374383BB16C}"/>
+                <a16:creationId xmlns:a16="http://schemas.microsoft.com/office/drawing/2014/main" id="{76F8B5E7-40F1-479E-8139-12C772CD103A}"/>
               </a:ext>
             </a:extLst>
           </p:cNvPr>
@@ -16621,7 +16621,7 @@
           <p:cNvPr id="17" name="route-number-6">
             <a:extLst xmlns:a="http://schemas.openxmlformats.org/drawingml/2006/main">
               <a:ext uri="{FF2B5EF4-FFF2-40B4-BE49-F238E27FC236}">
-                <a16:creationId xmlns:a16="http://schemas.microsoft.com/office/drawing/2014/main" id="{9C81E9F0-B7F7-4E23-922F-B767067D9D26}"/>
+                <a16:creationId xmlns:a16="http://schemas.microsoft.com/office/drawing/2014/main" id="{E24474F7-F0BB-477F-88EB-8B4B8581E4AE}"/>
               </a:ext>
             </a:extLst>
           </p:cNvPr>
@@ -16678,7 +16678,7 @@
           <p:cNvPr id="18" name="route-6">
             <a:extLst xmlns:a="http://schemas.openxmlformats.org/drawingml/2006/main">
               <a:ext uri="{FF2B5EF4-FFF2-40B4-BE49-F238E27FC236}">
-                <a16:creationId xmlns:a16="http://schemas.microsoft.com/office/drawing/2014/main" id="{38121F88-C9E5-4B93-94A0-F61C9D601DA4}"/>
+                <a16:creationId xmlns:a16="http://schemas.microsoft.com/office/drawing/2014/main" id="{9DA69601-E56B-4C01-9D53-CA53CD910213}"/>
               </a:ext>
             </a:extLst>
           </p:cNvPr>
@@ -16735,7 +16735,7 @@
           <p:cNvPr id="19" name="route-number-7">
             <a:extLst xmlns:a="http://schemas.openxmlformats.org/drawingml/2006/main">
               <a:ext uri="{FF2B5EF4-FFF2-40B4-BE49-F238E27FC236}">
-                <a16:creationId xmlns:a16="http://schemas.microsoft.com/office/drawing/2014/main" id="{5E2617B3-A7EF-4FAB-B9D9-3425C59C3F25}"/>
+                <a16:creationId xmlns:a16="http://schemas.microsoft.com/office/drawing/2014/main" id="{B6490040-6FF3-4753-9F1A-B6B825ADEB72}"/>
               </a:ext>
             </a:extLst>
           </p:cNvPr>
@@ -16792,7 +16792,7 @@
           <p:cNvPr id="20" name="route-7">
             <a:extLst xmlns:a="http://schemas.openxmlformats.org/drawingml/2006/main">
               <a:ext uri="{FF2B5EF4-FFF2-40B4-BE49-F238E27FC236}">
-                <a16:creationId xmlns:a16="http://schemas.microsoft.com/office/drawing/2014/main" id="{17261A8D-49B1-4559-9677-35AD9FD55D66}"/>
+                <a16:creationId xmlns:a16="http://schemas.microsoft.com/office/drawing/2014/main" id="{217F2EF9-6E6D-4E6D-99D3-66F27B62365A}"/>
               </a:ext>
             </a:extLst>
           </p:cNvPr>
@@ -16849,7 +16849,7 @@
           <p:cNvPr id="21" name="Lesdoelen">
             <a:extLst xmlns:a="http://schemas.openxmlformats.org/drawingml/2006/main">
               <a:ext uri="{FF2B5EF4-FFF2-40B4-BE49-F238E27FC236}">
-                <a16:creationId xmlns:a16="http://schemas.microsoft.com/office/drawing/2014/main" id="{A88DDAC6-2622-4B26-ABEF-7052B9722172}"/>
+                <a16:creationId xmlns:a16="http://schemas.microsoft.com/office/drawing/2014/main" id="{50DA2C95-2F94-4FFA-8C4C-CDF329F6FCAC}"/>
               </a:ext>
             </a:extLst>
           </p:cNvPr>
@@ -16906,7 +16906,7 @@
           <p:cNvPr id="22" name="overview-goals">
             <a:extLst xmlns:a="http://schemas.openxmlformats.org/drawingml/2006/main">
               <a:ext uri="{FF2B5EF4-FFF2-40B4-BE49-F238E27FC236}">
-                <a16:creationId xmlns:a16="http://schemas.microsoft.com/office/drawing/2014/main" id="{F249B307-40FE-473C-B51D-F99170A1D9A7}"/>
+                <a16:creationId xmlns:a16="http://schemas.microsoft.com/office/drawing/2014/main" id="{763DF7B4-5990-427C-B6EA-2C9CBEA97A20}"/>
               </a:ext>
             </a:extLst>
           </p:cNvPr>
@@ -17009,7 +17009,7 @@
           <p:cNvPr id="23" name="">
             <a:extLst xmlns:a="http://schemas.openxmlformats.org/drawingml/2006/main">
               <a:ext uri="{FF2B5EF4-FFF2-40B4-BE49-F238E27FC236}">
-                <a16:creationId xmlns:a16="http://schemas.microsoft.com/office/drawing/2014/main" id="{4AD95305-CB8D-4DE3-96F9-2AE36E1D3921}"/>
+                <a16:creationId xmlns:a16="http://schemas.microsoft.com/office/drawing/2014/main" id="{6BEAD25D-992D-4130-8918-68EC0ED8F8CD}"/>
               </a:ext>
             </a:extLst>
           </p:cNvPr>
@@ -17038,7 +17038,7 @@
           <p:cNvPr id="24" name="Startopdracht">
             <a:extLst xmlns:a="http://schemas.openxmlformats.org/drawingml/2006/main">
               <a:ext uri="{FF2B5EF4-FFF2-40B4-BE49-F238E27FC236}">
-                <a16:creationId xmlns:a16="http://schemas.microsoft.com/office/drawing/2014/main" id="{5E119B52-1E71-45ED-9BBE-3DB40A4AD747}"/>
+                <a16:creationId xmlns:a16="http://schemas.microsoft.com/office/drawing/2014/main" id="{2E308438-368D-4458-A33F-02AEF39F7450}"/>
               </a:ext>
             </a:extLst>
           </p:cNvPr>
@@ -17095,7 +17095,7 @@
           <p:cNvPr id="25" name="overview-start">
             <a:extLst xmlns:a="http://schemas.openxmlformats.org/drawingml/2006/main">
               <a:ext uri="{FF2B5EF4-FFF2-40B4-BE49-F238E27FC236}">
-                <a16:creationId xmlns:a16="http://schemas.microsoft.com/office/drawing/2014/main" id="{62854A92-5EBD-4C9B-9EF6-94F5FEEB0C11}"/>
+                <a16:creationId xmlns:a16="http://schemas.microsoft.com/office/drawing/2014/main" id="{F49E1B13-50B2-4709-A354-CE42FC83CD90}"/>
               </a:ext>
             </a:extLst>
           </p:cNvPr>
@@ -17142,7 +17142,7 @@
                 <a:ea typeface="Arial"/>
                 <a:cs typeface="Arial"/>
               </a:rPr>
-              <a:t>Pagina 84 · Opgaven 1 en 2</a:t>
+              <a:t>Pagina 85 · Opgaven 1 en 2</a:t>
             </a:r>
           </a:p>
           <a:p xmlns:a="http://schemas.openxmlformats.org/drawingml/2006/main">
@@ -17165,7 +17165,7 @@
                 <a:ea typeface="Arial"/>
                 <a:cs typeface="Arial"/>
               </a:rPr>
-              <a:t>1: hulp p. 82; 2: verkennen p. 80</a:t>
+              <a:t>1: hulp p. 83; 2: verkennen p. 81</a:t>
             </a:r>
           </a:p>
         </p:txBody>
@@ -17175,7 +17175,7 @@
           <p:cNvPr id="26" name="">
             <a:extLst xmlns:a="http://schemas.openxmlformats.org/drawingml/2006/main">
               <a:ext uri="{FF2B5EF4-FFF2-40B4-BE49-F238E27FC236}">
-                <a16:creationId xmlns:a16="http://schemas.microsoft.com/office/drawing/2014/main" id="{9ED5543B-C878-43C6-92C8-4492052C98C1}"/>
+                <a16:creationId xmlns:a16="http://schemas.microsoft.com/office/drawing/2014/main" id="{963CA5EF-2EDE-4AE7-9EE8-79A0E9685E14}"/>
               </a:ext>
             </a:extLst>
           </p:cNvPr>
@@ -17204,7 +17204,7 @@
           <p:cNvPr id="27" name="Huiswerk">
             <a:extLst xmlns:a="http://schemas.openxmlformats.org/drawingml/2006/main">
               <a:ext uri="{FF2B5EF4-FFF2-40B4-BE49-F238E27FC236}">
-                <a16:creationId xmlns:a16="http://schemas.microsoft.com/office/drawing/2014/main" id="{0D821ED8-CD85-48D0-990A-EB02775F7ADC}"/>
+                <a16:creationId xmlns:a16="http://schemas.microsoft.com/office/drawing/2014/main" id="{D082831D-F310-493D-82CD-F4CFFC72366F}"/>
               </a:ext>
             </a:extLst>
           </p:cNvPr>
@@ -17261,7 +17261,7 @@
           <p:cNvPr id="28" name="overview-homework">
             <a:extLst xmlns:a="http://schemas.openxmlformats.org/drawingml/2006/main">
               <a:ext uri="{FF2B5EF4-FFF2-40B4-BE49-F238E27FC236}">
-                <a16:creationId xmlns:a16="http://schemas.microsoft.com/office/drawing/2014/main" id="{2390E912-9C27-4C1B-85BB-965A688EF8AF}"/>
+                <a16:creationId xmlns:a16="http://schemas.microsoft.com/office/drawing/2014/main" id="{F601597B-074B-420E-8BD5-D09277E52AF5}"/>
               </a:ext>
             </a:extLst>
           </p:cNvPr>
@@ -17408,7 +17408,7 @@
     </p:spTree>
     <p:extLst>
       <p:ext uri="{BB962C8B-B14F-4D97-AF65-F5344CB8AC3E}">
-        <p14:creationId xmlns:p14="http://schemas.microsoft.com/office/powerpoint/2010/main" val="1839709711"/>
+        <p14:creationId xmlns:p14="http://schemas.microsoft.com/office/powerpoint/2010/main" val="1366268194"/>
       </p:ext>
     </p:extLst>
   </p:cSld>
@@ -17439,7 +17439,7 @@
           <p:cNvPr id="10" name="Producentensurplus onder de prijs">
             <a:extLst xmlns:a="http://schemas.openxmlformats.org/drawingml/2006/main">
               <a:ext uri="{FF2B5EF4-FFF2-40B4-BE49-F238E27FC236}">
-                <a16:creationId xmlns:a16="http://schemas.microsoft.com/office/drawing/2014/main" id="{E9067A24-9917-459A-9499-8331EEBABF78}"/>
+                <a16:creationId xmlns:a16="http://schemas.microsoft.com/office/drawing/2014/main" id="{11D241BB-5FA6-4380-9B88-8B6864FC1C35}"/>
               </a:ext>
             </a:extLst>
           </p:cNvPr>
@@ -17496,7 +17496,7 @@
           <p:cNvPr id="2" name="">
             <a:extLst xmlns:a="http://schemas.openxmlformats.org/drawingml/2006/main">
               <a:ext uri="{FF2B5EF4-FFF2-40B4-BE49-F238E27FC236}">
-                <a16:creationId xmlns:a16="http://schemas.microsoft.com/office/drawing/2014/main" id="{B73CA579-7488-458C-99F3-95B55E8881A8}"/>
+                <a16:creationId xmlns:a16="http://schemas.microsoft.com/office/drawing/2014/main" id="{2A2007F4-F49A-46C4-B8D7-D095C015BDEE}"/>
               </a:ext>
             </a:extLst>
           </p:cNvPr>
@@ -17525,7 +17525,7 @@
           <p:cNvPr id="3" name="§2.3.2 Producentensurplus en totaal surplus">
             <a:extLst xmlns:a="http://schemas.openxmlformats.org/drawingml/2006/main">
               <a:ext uri="{FF2B5EF4-FFF2-40B4-BE49-F238E27FC236}">
-                <a16:creationId xmlns:a16="http://schemas.microsoft.com/office/drawing/2014/main" id="{6A01624F-028A-4743-B12D-3C387F8C5B3C}"/>
+                <a16:creationId xmlns:a16="http://schemas.microsoft.com/office/drawing/2014/main" id="{E350EF8A-FBAC-4FCF-858F-F131E8FCC41A}"/>
               </a:ext>
             </a:extLst>
           </p:cNvPr>
@@ -17582,7 +17582,7 @@
           <p:cNvPr id="4" name="10">
             <a:extLst xmlns:a="http://schemas.openxmlformats.org/drawingml/2006/main">
               <a:ext uri="{FF2B5EF4-FFF2-40B4-BE49-F238E27FC236}">
-                <a16:creationId xmlns:a16="http://schemas.microsoft.com/office/drawing/2014/main" id="{6CDD57E8-319D-4BF6-A736-A6EA35D284E5}"/>
+                <a16:creationId xmlns:a16="http://schemas.microsoft.com/office/drawing/2014/main" id="{63B4E80C-8D27-48E2-8F45-59B6B9D198F9}"/>
               </a:ext>
             </a:extLst>
           </p:cNvPr>
@@ -17639,7 +17639,7 @@
           <p:cNvPr id="5" name="Uitlegvoorbeeld — niet uit het boek · Fietsbellen">
             <a:extLst xmlns:a="http://schemas.openxmlformats.org/drawingml/2006/main">
               <a:ext uri="{FF2B5EF4-FFF2-40B4-BE49-F238E27FC236}">
-                <a16:creationId xmlns:a16="http://schemas.microsoft.com/office/drawing/2014/main" id="{34FA9808-19CD-4782-9790-D3DFE6E6971E}"/>
+                <a16:creationId xmlns:a16="http://schemas.microsoft.com/office/drawing/2014/main" id="{9160BB48-3B6D-4023-B6B4-90903CA9D732}"/>
               </a:ext>
             </a:extLst>
           </p:cNvPr>
@@ -17703,7 +17703,7 @@
         </p:xfrm>
         <a:graphic xmlns:a="http://schemas.openxmlformats.org/drawingml/2006/main">
           <a:graphicData uri="http://schemas.openxmlformats.org/drawingml/2006/chart">
-            <c:chart xmlns:r="http://schemas.openxmlformats.org/officeDocument/2006/relationships" xmlns:c="http://schemas.openxmlformats.org/drawingml/2006/chart" r:id="R478127fed87b417e"/>
+            <c:chart xmlns:r="http://schemas.openxmlformats.org/officeDocument/2006/relationships" xmlns:c="http://schemas.openxmlformats.org/drawingml/2006/chart" r:id="R43ae3adc8f6a4855"/>
           </a:graphicData>
         </a:graphic>
       </p:graphicFrame>
@@ -17712,7 +17712,7 @@
           <p:cNvPr id="7" name="Basis: 32 fietsbellen">
             <a:extLst xmlns:a="http://schemas.openxmlformats.org/drawingml/2006/main">
               <a:ext uri="{FF2B5EF4-FFF2-40B4-BE49-F238E27FC236}">
-                <a16:creationId xmlns:a16="http://schemas.microsoft.com/office/drawing/2014/main" id="{A512A314-83EF-4D1B-A14C-7A96EADBB440}"/>
+                <a16:creationId xmlns:a16="http://schemas.microsoft.com/office/drawing/2014/main" id="{D0511DFB-98C0-4E68-A5C3-1D49FD97359C}"/>
               </a:ext>
             </a:extLst>
           </p:cNvPr>
@@ -17769,7 +17769,7 @@
           <p:cNvPr id="8" name="Hoogte PS:&#10;12 − 4 = € 8&#10;per fietsbel">
             <a:extLst xmlns:a="http://schemas.openxmlformats.org/drawingml/2006/main">
               <a:ext uri="{FF2B5EF4-FFF2-40B4-BE49-F238E27FC236}">
-                <a16:creationId xmlns:a16="http://schemas.microsoft.com/office/drawing/2014/main" id="{8A82320F-743A-4D27-A0A3-69F26C82E898}"/>
+                <a16:creationId xmlns:a16="http://schemas.microsoft.com/office/drawing/2014/main" id="{17BABD0F-AE5B-4046-802C-8C55DE9EDDE7}"/>
               </a:ext>
             </a:extLst>
           </p:cNvPr>
@@ -17872,7 +17872,7 @@
           <p:cNvPr id="9" name="PS = ½ × 32 × 8&#10;= € 128">
             <a:extLst xmlns:a="http://schemas.openxmlformats.org/drawingml/2006/main">
               <a:ext uri="{FF2B5EF4-FFF2-40B4-BE49-F238E27FC236}">
-                <a16:creationId xmlns:a16="http://schemas.microsoft.com/office/drawing/2014/main" id="{D36FCED4-CD21-409C-BBB6-538AC070FF6C}"/>
+                <a16:creationId xmlns:a16="http://schemas.microsoft.com/office/drawing/2014/main" id="{CB99C0E8-9811-41A6-8A68-3C48D70E3DE6}"/>
               </a:ext>
             </a:extLst>
           </p:cNvPr>
@@ -17950,7 +17950,7 @@
     </p:spTree>
     <p:extLst>
       <p:ext uri="{BB962C8B-B14F-4D97-AF65-F5344CB8AC3E}">
-        <p14:creationId xmlns:p14="http://schemas.microsoft.com/office/powerpoint/2010/main" val="1124823325"/>
+        <p14:creationId xmlns:p14="http://schemas.microsoft.com/office/powerpoint/2010/main" val="1215545510"/>
       </p:ext>
     </p:extLst>
   </p:cSld>
@@ -17981,7 +17981,7 @@
           <p:cNvPr id="8" name="Totaal surplus en de eenheden">
             <a:extLst xmlns:a="http://schemas.openxmlformats.org/drawingml/2006/main">
               <a:ext uri="{FF2B5EF4-FFF2-40B4-BE49-F238E27FC236}">
-                <a16:creationId xmlns:a16="http://schemas.microsoft.com/office/drawing/2014/main" id="{3929C5B4-73AD-4C77-BFC3-BC22B54E43BC}"/>
+                <a16:creationId xmlns:a16="http://schemas.microsoft.com/office/drawing/2014/main" id="{3337595B-CA13-4CD9-80A3-7FC983FCC441}"/>
               </a:ext>
             </a:extLst>
           </p:cNvPr>
@@ -18038,7 +18038,7 @@
           <p:cNvPr id="2" name="">
             <a:extLst xmlns:a="http://schemas.openxmlformats.org/drawingml/2006/main">
               <a:ext uri="{FF2B5EF4-FFF2-40B4-BE49-F238E27FC236}">
-                <a16:creationId xmlns:a16="http://schemas.microsoft.com/office/drawing/2014/main" id="{6D319128-A580-41C4-84D0-23144CBD8A23}"/>
+                <a16:creationId xmlns:a16="http://schemas.microsoft.com/office/drawing/2014/main" id="{4F37D081-97E6-44EB-B2B2-2A1100C584EE}"/>
               </a:ext>
             </a:extLst>
           </p:cNvPr>
@@ -18067,7 +18067,7 @@
           <p:cNvPr id="3" name="§2.3.2 Producentensurplus en totaal surplus">
             <a:extLst xmlns:a="http://schemas.openxmlformats.org/drawingml/2006/main">
               <a:ext uri="{FF2B5EF4-FFF2-40B4-BE49-F238E27FC236}">
-                <a16:creationId xmlns:a16="http://schemas.microsoft.com/office/drawing/2014/main" id="{AF426FC4-EE2E-4D3E-AB13-4CB5DBB1508A}"/>
+                <a16:creationId xmlns:a16="http://schemas.microsoft.com/office/drawing/2014/main" id="{B166460E-9F3D-4378-8AE7-20CDDF3176C4}"/>
               </a:ext>
             </a:extLst>
           </p:cNvPr>
@@ -18124,7 +18124,7 @@
           <p:cNvPr id="4" name="11">
             <a:extLst xmlns:a="http://schemas.openxmlformats.org/drawingml/2006/main">
               <a:ext uri="{FF2B5EF4-FFF2-40B4-BE49-F238E27FC236}">
-                <a16:creationId xmlns:a16="http://schemas.microsoft.com/office/drawing/2014/main" id="{A967175E-7C64-415A-A324-ACCC1DBE16A5}"/>
+                <a16:creationId xmlns:a16="http://schemas.microsoft.com/office/drawing/2014/main" id="{CBD6AAC1-743D-4E01-A054-1CF89A9FA9B9}"/>
               </a:ext>
             </a:extLst>
           </p:cNvPr>
@@ -18181,7 +18181,7 @@
           <p:cNvPr id="5" name="Uitlegvoorbeeld — niet uit het boek · Fietsbellen">
             <a:extLst xmlns:a="http://schemas.openxmlformats.org/drawingml/2006/main">
               <a:ext uri="{FF2B5EF4-FFF2-40B4-BE49-F238E27FC236}">
-                <a16:creationId xmlns:a16="http://schemas.microsoft.com/office/drawing/2014/main" id="{73441DC0-296D-4CB6-AE2B-D0798981070A}"/>
+                <a16:creationId xmlns:a16="http://schemas.microsoft.com/office/drawing/2014/main" id="{74CDF91A-AADB-4793-A357-9431A0225AEA}"/>
               </a:ext>
             </a:extLst>
           </p:cNvPr>
@@ -18557,7 +18557,7 @@
           <p:cNvPr id="7" name="Fietsbellen × euro per fietsbel = euro">
             <a:extLst xmlns:a="http://schemas.openxmlformats.org/drawingml/2006/main">
               <a:ext uri="{FF2B5EF4-FFF2-40B4-BE49-F238E27FC236}">
-                <a16:creationId xmlns:a16="http://schemas.microsoft.com/office/drawing/2014/main" id="{C9B4A242-69AD-4A31-8FB7-AEAEF5B9D71E}"/>
+                <a16:creationId xmlns:a16="http://schemas.microsoft.com/office/drawing/2014/main" id="{8A16FA75-06D1-4001-9E4B-2B654E43020F}"/>
               </a:ext>
             </a:extLst>
           </p:cNvPr>
@@ -18612,7 +18612,7 @@
     </p:spTree>
     <p:extLst>
       <p:ext uri="{BB962C8B-B14F-4D97-AF65-F5344CB8AC3E}">
-        <p14:creationId xmlns:p14="http://schemas.microsoft.com/office/powerpoint/2010/main" val="1555956011"/>
+        <p14:creationId xmlns:p14="http://schemas.microsoft.com/office/powerpoint/2010/main" val="1365467376"/>
       </p:ext>
     </p:extLst>
   </p:cSld>
@@ -18643,7 +18643,7 @@
           <p:cNvPr id="9" name="Extra handel vóór en na het evenwicht">
             <a:extLst xmlns:a="http://schemas.openxmlformats.org/drawingml/2006/main">
               <a:ext uri="{FF2B5EF4-FFF2-40B4-BE49-F238E27FC236}">
-                <a16:creationId xmlns:a16="http://schemas.microsoft.com/office/drawing/2014/main" id="{B89BAE3F-09B9-433E-A843-F3D7FECC3E8D}"/>
+                <a16:creationId xmlns:a16="http://schemas.microsoft.com/office/drawing/2014/main" id="{873FD0BF-0CA7-423B-90FE-CC789BD2B43D}"/>
               </a:ext>
             </a:extLst>
           </p:cNvPr>
@@ -18700,7 +18700,7 @@
           <p:cNvPr id="2" name="">
             <a:extLst xmlns:a="http://schemas.openxmlformats.org/drawingml/2006/main">
               <a:ext uri="{FF2B5EF4-FFF2-40B4-BE49-F238E27FC236}">
-                <a16:creationId xmlns:a16="http://schemas.microsoft.com/office/drawing/2014/main" id="{B1244145-C254-48BD-AE28-1AB84221AA20}"/>
+                <a16:creationId xmlns:a16="http://schemas.microsoft.com/office/drawing/2014/main" id="{B0D7BB0A-C643-4153-AE1B-3B7D1A754B3A}"/>
               </a:ext>
             </a:extLst>
           </p:cNvPr>
@@ -18729,7 +18729,7 @@
           <p:cNvPr id="3" name="§2.3.2 Producentensurplus en totaal surplus">
             <a:extLst xmlns:a="http://schemas.openxmlformats.org/drawingml/2006/main">
               <a:ext uri="{FF2B5EF4-FFF2-40B4-BE49-F238E27FC236}">
-                <a16:creationId xmlns:a16="http://schemas.microsoft.com/office/drawing/2014/main" id="{1D13075F-AD1E-4AF8-A1FC-D2C63759BB2F}"/>
+                <a16:creationId xmlns:a16="http://schemas.microsoft.com/office/drawing/2014/main" id="{2D6780F4-CE0F-4F22-8867-A50723F3184B}"/>
               </a:ext>
             </a:extLst>
           </p:cNvPr>
@@ -18786,7 +18786,7 @@
           <p:cNvPr id="4" name="12">
             <a:extLst xmlns:a="http://schemas.openxmlformats.org/drawingml/2006/main">
               <a:ext uri="{FF2B5EF4-FFF2-40B4-BE49-F238E27FC236}">
-                <a16:creationId xmlns:a16="http://schemas.microsoft.com/office/drawing/2014/main" id="{C49AA460-147E-4BC8-93CB-05F88F292064}"/>
+                <a16:creationId xmlns:a16="http://schemas.microsoft.com/office/drawing/2014/main" id="{6F7FF209-B74C-42A8-954A-CE52AAB04857}"/>
               </a:ext>
             </a:extLst>
           </p:cNvPr>
@@ -18843,7 +18843,7 @@
           <p:cNvPr id="5" name="Uitlegvoorbeeld — niet uit het boek · Fietsbellen">
             <a:extLst xmlns:a="http://schemas.openxmlformats.org/drawingml/2006/main">
               <a:ext uri="{FF2B5EF4-FFF2-40B4-BE49-F238E27FC236}">
-                <a16:creationId xmlns:a16="http://schemas.microsoft.com/office/drawing/2014/main" id="{3B37D3F3-6EAB-4D9E-8DCC-9F74531ED1FB}"/>
+                <a16:creationId xmlns:a16="http://schemas.microsoft.com/office/drawing/2014/main" id="{E24B70B4-A5D8-43CB-B3D2-261592B7A8B6}"/>
               </a:ext>
             </a:extLst>
           </p:cNvPr>
@@ -19316,7 +19316,7 @@
           <p:cNvPr id="7" name="Vóór Qe: extra handel vergroot TS.">
             <a:extLst xmlns:a="http://schemas.openxmlformats.org/drawingml/2006/main">
               <a:ext uri="{FF2B5EF4-FFF2-40B4-BE49-F238E27FC236}">
-                <a16:creationId xmlns:a16="http://schemas.microsoft.com/office/drawing/2014/main" id="{8052CA6E-FAB7-4CB6-84D6-3C8F5C3EC335}"/>
+                <a16:creationId xmlns:a16="http://schemas.microsoft.com/office/drawing/2014/main" id="{A49438C8-F278-4213-832D-F4578239AAF1}"/>
               </a:ext>
             </a:extLst>
           </p:cNvPr>
@@ -19373,7 +19373,7 @@
           <p:cNvPr id="8" name="Na Qe: extra handel verkleint TS.">
             <a:extLst xmlns:a="http://schemas.openxmlformats.org/drawingml/2006/main">
               <a:ext uri="{FF2B5EF4-FFF2-40B4-BE49-F238E27FC236}">
-                <a16:creationId xmlns:a16="http://schemas.microsoft.com/office/drawing/2014/main" id="{65E17E2B-BFFD-4C49-96D5-17331869A917}"/>
+                <a16:creationId xmlns:a16="http://schemas.microsoft.com/office/drawing/2014/main" id="{CAD1835D-2F47-4E4D-94E6-DB66B3FEC000}"/>
               </a:ext>
             </a:extLst>
           </p:cNvPr>
@@ -19428,7 +19428,7 @@
     </p:spTree>
     <p:extLst>
       <p:ext uri="{BB962C8B-B14F-4D97-AF65-F5344CB8AC3E}">
-        <p14:creationId xmlns:p14="http://schemas.microsoft.com/office/powerpoint/2010/main" val="1945388247"/>
+        <p14:creationId xmlns:p14="http://schemas.microsoft.com/office/powerpoint/2010/main" val="791425388"/>
       </p:ext>
     </p:extLst>
   </p:cSld>
@@ -19459,7 +19459,7 @@
           <p:cNvPr id="13" name="Maximaal totaal surplus">
             <a:extLst xmlns:a="http://schemas.openxmlformats.org/drawingml/2006/main">
               <a:ext uri="{FF2B5EF4-FFF2-40B4-BE49-F238E27FC236}">
-                <a16:creationId xmlns:a16="http://schemas.microsoft.com/office/drawing/2014/main" id="{75BF0F80-CDB5-4A5E-9708-8F1E3229F7EC}"/>
+                <a16:creationId xmlns:a16="http://schemas.microsoft.com/office/drawing/2014/main" id="{B8023371-9673-4CF0-A6AA-C839BA38AC45}"/>
               </a:ext>
             </a:extLst>
           </p:cNvPr>
@@ -19516,7 +19516,7 @@
           <p:cNvPr id="2" name="">
             <a:extLst xmlns:a="http://schemas.openxmlformats.org/drawingml/2006/main">
               <a:ext uri="{FF2B5EF4-FFF2-40B4-BE49-F238E27FC236}">
-                <a16:creationId xmlns:a16="http://schemas.microsoft.com/office/drawing/2014/main" id="{974C97FE-023A-4DA8-862C-DA2A831797D2}"/>
+                <a16:creationId xmlns:a16="http://schemas.microsoft.com/office/drawing/2014/main" id="{3EE71FDD-D0E4-4C6A-8815-E3813025E4F6}"/>
               </a:ext>
             </a:extLst>
           </p:cNvPr>
@@ -19545,7 +19545,7 @@
           <p:cNvPr id="3" name="§2.3.2 Producentensurplus en totaal surplus">
             <a:extLst xmlns:a="http://schemas.openxmlformats.org/drawingml/2006/main">
               <a:ext uri="{FF2B5EF4-FFF2-40B4-BE49-F238E27FC236}">
-                <a16:creationId xmlns:a16="http://schemas.microsoft.com/office/drawing/2014/main" id="{8666B580-8FF8-4FF8-A425-FD2A298176CC}"/>
+                <a16:creationId xmlns:a16="http://schemas.microsoft.com/office/drawing/2014/main" id="{3D575829-06F5-4005-90C8-97C29870C9FE}"/>
               </a:ext>
             </a:extLst>
           </p:cNvPr>
@@ -19602,7 +19602,7 @@
           <p:cNvPr id="4" name="13">
             <a:extLst xmlns:a="http://schemas.openxmlformats.org/drawingml/2006/main">
               <a:ext uri="{FF2B5EF4-FFF2-40B4-BE49-F238E27FC236}">
-                <a16:creationId xmlns:a16="http://schemas.microsoft.com/office/drawing/2014/main" id="{E10C806E-0679-403F-B0C1-23F053EAA761}"/>
+                <a16:creationId xmlns:a16="http://schemas.microsoft.com/office/drawing/2014/main" id="{E3922D10-FBC7-4C9A-97C3-95CB9A5D3D64}"/>
               </a:ext>
             </a:extLst>
           </p:cNvPr>
@@ -19659,7 +19659,7 @@
           <p:cNvPr id="5" name="Uitlegvoorbeeld — niet uit het boek · Fietsbellen">
             <a:extLst xmlns:a="http://schemas.openxmlformats.org/drawingml/2006/main">
               <a:ext uri="{FF2B5EF4-FFF2-40B4-BE49-F238E27FC236}">
-                <a16:creationId xmlns:a16="http://schemas.microsoft.com/office/drawing/2014/main" id="{D7F8AAB8-58C5-4D37-855E-5C8438A86CCD}"/>
+                <a16:creationId xmlns:a16="http://schemas.microsoft.com/office/drawing/2014/main" id="{435E1FE7-2343-457D-A848-3C999FB4DA3D}"/>
               </a:ext>
             </a:extLst>
           </p:cNvPr>
@@ -19716,7 +19716,7 @@
           <p:cNvPr id="6" name="Tot Q = 32">
             <a:extLst xmlns:a="http://schemas.openxmlformats.org/drawingml/2006/main">
               <a:ext uri="{FF2B5EF4-FFF2-40B4-BE49-F238E27FC236}">
-                <a16:creationId xmlns:a16="http://schemas.microsoft.com/office/drawing/2014/main" id="{050E2169-1E8C-4895-BCB3-5D66D15CA5FB}"/>
+                <a16:creationId xmlns:a16="http://schemas.microsoft.com/office/drawing/2014/main" id="{05CE1B67-2137-47D0-B29A-25242B16E467}"/>
               </a:ext>
             </a:extLst>
           </p:cNvPr>
@@ -19773,7 +19773,7 @@
           <p:cNvPr id="7" name="Betalingsbereidheid is minstens zo hoog als MK.">
             <a:extLst xmlns:a="http://schemas.openxmlformats.org/drawingml/2006/main">
               <a:ext uri="{FF2B5EF4-FFF2-40B4-BE49-F238E27FC236}">
-                <a16:creationId xmlns:a16="http://schemas.microsoft.com/office/drawing/2014/main" id="{FB8C115D-19A8-41EF-BF30-669B9F3331AF}"/>
+                <a16:creationId xmlns:a16="http://schemas.microsoft.com/office/drawing/2014/main" id="{D2FBFEE8-1CE8-47F7-94A7-8AFFAF66F4C5}"/>
               </a:ext>
             </a:extLst>
           </p:cNvPr>
@@ -19830,7 +19830,7 @@
           <p:cNvPr id="8" name="Voorbij Q = 32">
             <a:extLst xmlns:a="http://schemas.openxmlformats.org/drawingml/2006/main">
               <a:ext uri="{FF2B5EF4-FFF2-40B4-BE49-F238E27FC236}">
-                <a16:creationId xmlns:a16="http://schemas.microsoft.com/office/drawing/2014/main" id="{CE53FA55-958C-4F58-9352-0632686A1E1F}"/>
+                <a16:creationId xmlns:a16="http://schemas.microsoft.com/office/drawing/2014/main" id="{00C3F760-2C4A-49B6-BF9A-F3EA1EECE079}"/>
               </a:ext>
             </a:extLst>
           </p:cNvPr>
@@ -19887,7 +19887,7 @@
           <p:cNvPr id="9" name="Extra eenheden kosten meer dan ze de kopers waard zijn.">
             <a:extLst xmlns:a="http://schemas.openxmlformats.org/drawingml/2006/main">
               <a:ext uri="{FF2B5EF4-FFF2-40B4-BE49-F238E27FC236}">
-                <a16:creationId xmlns:a16="http://schemas.microsoft.com/office/drawing/2014/main" id="{EF38FAF3-A3EA-4C53-8592-BFAB0E3BA947}"/>
+                <a16:creationId xmlns:a16="http://schemas.microsoft.com/office/drawing/2014/main" id="{7FF6DC5E-25B9-4D2C-84D1-A699E6BD30B7}"/>
               </a:ext>
             </a:extLst>
           </p:cNvPr>
@@ -19944,7 +19944,7 @@
           <p:cNvPr id="10" name="Bij Q = 32">
             <a:extLst xmlns:a="http://schemas.openxmlformats.org/drawingml/2006/main">
               <a:ext uri="{FF2B5EF4-FFF2-40B4-BE49-F238E27FC236}">
-                <a16:creationId xmlns:a16="http://schemas.microsoft.com/office/drawing/2014/main" id="{2EBFFEE4-69B2-4051-9BB1-08038AD38A1D}"/>
+                <a16:creationId xmlns:a16="http://schemas.microsoft.com/office/drawing/2014/main" id="{66438B85-C541-4A7E-B3C0-594D5B8DEDA3}"/>
               </a:ext>
             </a:extLst>
           </p:cNvPr>
@@ -20001,7 +20001,7 @@
           <p:cNvPr id="11" name="TS is maximaal binnen dit marktmodel.">
             <a:extLst xmlns:a="http://schemas.openxmlformats.org/drawingml/2006/main">
               <a:ext uri="{FF2B5EF4-FFF2-40B4-BE49-F238E27FC236}">
-                <a16:creationId xmlns:a16="http://schemas.microsoft.com/office/drawing/2014/main" id="{2C4685DE-3527-4EB1-960E-17F8C294C65E}"/>
+                <a16:creationId xmlns:a16="http://schemas.microsoft.com/office/drawing/2014/main" id="{FF96D9F8-BD90-4CA8-89DD-C25F06818CC2}"/>
               </a:ext>
             </a:extLst>
           </p:cNvPr>
@@ -20058,7 +20058,7 @@
           <p:cNvPr id="12" name="€ 256 voor kopers en € 128 voor verkopers: geen oordeel over eerlijkhe">
             <a:extLst xmlns:a="http://schemas.openxmlformats.org/drawingml/2006/main">
               <a:ext uri="{FF2B5EF4-FFF2-40B4-BE49-F238E27FC236}">
-                <a16:creationId xmlns:a16="http://schemas.microsoft.com/office/drawing/2014/main" id="{671F85BA-20C0-45E8-A47F-360986E67AD4}"/>
+                <a16:creationId xmlns:a16="http://schemas.microsoft.com/office/drawing/2014/main" id="{A8D2C5E0-6C5D-437E-801B-571A15A29981}"/>
               </a:ext>
             </a:extLst>
           </p:cNvPr>
@@ -20113,7 +20113,7 @@
     </p:spTree>
     <p:extLst>
       <p:ext uri="{BB962C8B-B14F-4D97-AF65-F5344CB8AC3E}">
-        <p14:creationId xmlns:p14="http://schemas.microsoft.com/office/powerpoint/2010/main" val="1278427078"/>
+        <p14:creationId xmlns:p14="http://schemas.microsoft.com/office/powerpoint/2010/main" val="1777664302"/>
       </p:ext>
     </p:extLst>
   </p:cSld>
@@ -20144,7 +20144,7 @@
           <p:cNvPr id="9" name="Korte controle">
             <a:extLst xmlns:a="http://schemas.openxmlformats.org/drawingml/2006/main">
               <a:ext uri="{FF2B5EF4-FFF2-40B4-BE49-F238E27FC236}">
-                <a16:creationId xmlns:a16="http://schemas.microsoft.com/office/drawing/2014/main" id="{DAE82171-4E78-4852-9796-C0BCDEA601A8}"/>
+                <a16:creationId xmlns:a16="http://schemas.microsoft.com/office/drawing/2014/main" id="{986E6980-A130-421B-86B6-DA57632EEE53}"/>
               </a:ext>
             </a:extLst>
           </p:cNvPr>
@@ -20201,7 +20201,7 @@
           <p:cNvPr id="2" name="">
             <a:extLst xmlns:a="http://schemas.openxmlformats.org/drawingml/2006/main">
               <a:ext uri="{FF2B5EF4-FFF2-40B4-BE49-F238E27FC236}">
-                <a16:creationId xmlns:a16="http://schemas.microsoft.com/office/drawing/2014/main" id="{7C5F7B6D-B250-42CE-BAAD-E41385133DF4}"/>
+                <a16:creationId xmlns:a16="http://schemas.microsoft.com/office/drawing/2014/main" id="{B5FF8275-30C1-4B88-911E-5B27D793369B}"/>
               </a:ext>
             </a:extLst>
           </p:cNvPr>
@@ -20230,7 +20230,7 @@
           <p:cNvPr id="3" name="§2.3.2 Producentensurplus en totaal surplus">
             <a:extLst xmlns:a="http://schemas.openxmlformats.org/drawingml/2006/main">
               <a:ext uri="{FF2B5EF4-FFF2-40B4-BE49-F238E27FC236}">
-                <a16:creationId xmlns:a16="http://schemas.microsoft.com/office/drawing/2014/main" id="{2E4A9850-0BED-42E1-997A-B3A5231F3CF6}"/>
+                <a16:creationId xmlns:a16="http://schemas.microsoft.com/office/drawing/2014/main" id="{41A0291F-0DC3-4C97-867D-0EDA7701A982}"/>
               </a:ext>
             </a:extLst>
           </p:cNvPr>
@@ -20287,7 +20287,7 @@
           <p:cNvPr id="4" name="14">
             <a:extLst xmlns:a="http://schemas.openxmlformats.org/drawingml/2006/main">
               <a:ext uri="{FF2B5EF4-FFF2-40B4-BE49-F238E27FC236}">
-                <a16:creationId xmlns:a16="http://schemas.microsoft.com/office/drawing/2014/main" id="{3273E957-7855-405B-B029-094E999DDB3F}"/>
+                <a16:creationId xmlns:a16="http://schemas.microsoft.com/office/drawing/2014/main" id="{EF81E1D4-8743-4EDB-87FB-7EB23B593B6D}"/>
               </a:ext>
             </a:extLst>
           </p:cNvPr>
@@ -20344,7 +20344,7 @@
           <p:cNvPr id="5" name="Uitlegvoorbeeld — niet uit het boek · Fietsbellen">
             <a:extLst xmlns:a="http://schemas.openxmlformats.org/drawingml/2006/main">
               <a:ext uri="{FF2B5EF4-FFF2-40B4-BE49-F238E27FC236}">
-                <a16:creationId xmlns:a16="http://schemas.microsoft.com/office/drawing/2014/main" id="{9995E00C-BEC2-4FE9-AC6E-D12FECA8D6FA}"/>
+                <a16:creationId xmlns:a16="http://schemas.microsoft.com/office/drawing/2014/main" id="{8DD800F5-1E38-40A7-B3E3-65AEE956BB01}"/>
               </a:ext>
             </a:extLst>
           </p:cNvPr>
@@ -20401,7 +20401,7 @@
           <p:cNvPr id="6" name="Bij Q = 40: betalingsbereidheid € 8 en MK € 14.">
             <a:extLst xmlns:a="http://schemas.openxmlformats.org/drawingml/2006/main">
               <a:ext uri="{FF2B5EF4-FFF2-40B4-BE49-F238E27FC236}">
-                <a16:creationId xmlns:a16="http://schemas.microsoft.com/office/drawing/2014/main" id="{74035926-06B5-47B9-B39F-E38D9842922E}"/>
+                <a16:creationId xmlns:a16="http://schemas.microsoft.com/office/drawing/2014/main" id="{38A1B7BA-ED54-4CBE-B425-AE66B16C6F51}"/>
               </a:ext>
             </a:extLst>
           </p:cNvPr>
@@ -20458,7 +20458,7 @@
           <p:cNvPr id="7" name="“Meer fietsbellen verkopen maakt TS altijd groter.”">
             <a:extLst xmlns:a="http://schemas.openxmlformats.org/drawingml/2006/main">
               <a:ext uri="{FF2B5EF4-FFF2-40B4-BE49-F238E27FC236}">
-                <a16:creationId xmlns:a16="http://schemas.microsoft.com/office/drawing/2014/main" id="{E3623FD6-52CB-4D13-87C6-C6DBD70D92D8}"/>
+                <a16:creationId xmlns:a16="http://schemas.microsoft.com/office/drawing/2014/main" id="{AFCC3F45-ABF6-4778-A712-38CA4D38EFD9}"/>
               </a:ext>
             </a:extLst>
           </p:cNvPr>
@@ -20515,7 +20515,7 @@
           <p:cNvPr id="8" name="Klopt de uitspraak?&#10;Gebruik de betalingsbereidheid en MK in je uitleg.">
             <a:extLst xmlns:a="http://schemas.openxmlformats.org/drawingml/2006/main">
               <a:ext uri="{FF2B5EF4-FFF2-40B4-BE49-F238E27FC236}">
-                <a16:creationId xmlns:a16="http://schemas.microsoft.com/office/drawing/2014/main" id="{349D4B91-2C4E-43DE-B592-973365E41544}"/>
+                <a16:creationId xmlns:a16="http://schemas.microsoft.com/office/drawing/2014/main" id="{92818BC9-6AF7-4568-B715-822FACC61E5D}"/>
               </a:ext>
             </a:extLst>
           </p:cNvPr>
@@ -20593,7 +20593,7 @@
     </p:spTree>
     <p:extLst>
       <p:ext uri="{BB962C8B-B14F-4D97-AF65-F5344CB8AC3E}">
-        <p14:creationId xmlns:p14="http://schemas.microsoft.com/office/powerpoint/2010/main" val="994766344"/>
+        <p14:creationId xmlns:p14="http://schemas.microsoft.com/office/powerpoint/2010/main" val="1831341143"/>
       </p:ext>
     </p:extLst>
   </p:cSld>
@@ -20624,7 +20624,7 @@
           <p:cNvPr id="9" name="Korte controle · Bespreking">
             <a:extLst xmlns:a="http://schemas.openxmlformats.org/drawingml/2006/main">
               <a:ext uri="{FF2B5EF4-FFF2-40B4-BE49-F238E27FC236}">
-                <a16:creationId xmlns:a16="http://schemas.microsoft.com/office/drawing/2014/main" id="{EBF99A09-BE00-4911-9F6C-62965E897F1D}"/>
+                <a16:creationId xmlns:a16="http://schemas.microsoft.com/office/drawing/2014/main" id="{02D6AA39-F132-44E6-8256-296FFAE4E5D4}"/>
               </a:ext>
             </a:extLst>
           </p:cNvPr>
@@ -20681,7 +20681,7 @@
           <p:cNvPr id="2" name="">
             <a:extLst xmlns:a="http://schemas.openxmlformats.org/drawingml/2006/main">
               <a:ext uri="{FF2B5EF4-FFF2-40B4-BE49-F238E27FC236}">
-                <a16:creationId xmlns:a16="http://schemas.microsoft.com/office/drawing/2014/main" id="{D47CA92F-EA36-4DB4-A787-EF14D3100B08}"/>
+                <a16:creationId xmlns:a16="http://schemas.microsoft.com/office/drawing/2014/main" id="{2B60B35D-517C-47AF-9A70-51E7EF200C45}"/>
               </a:ext>
             </a:extLst>
           </p:cNvPr>
@@ -20710,7 +20710,7 @@
           <p:cNvPr id="3" name="§2.3.2 Producentensurplus en totaal surplus">
             <a:extLst xmlns:a="http://schemas.openxmlformats.org/drawingml/2006/main">
               <a:ext uri="{FF2B5EF4-FFF2-40B4-BE49-F238E27FC236}">
-                <a16:creationId xmlns:a16="http://schemas.microsoft.com/office/drawing/2014/main" id="{6F22C6D5-76BB-4BAE-BD23-558B2075AD92}"/>
+                <a16:creationId xmlns:a16="http://schemas.microsoft.com/office/drawing/2014/main" id="{E5FAF60A-9318-40A3-82E2-55E4A2C2894E}"/>
               </a:ext>
             </a:extLst>
           </p:cNvPr>
@@ -20767,7 +20767,7 @@
           <p:cNvPr id="4" name="15">
             <a:extLst xmlns:a="http://schemas.openxmlformats.org/drawingml/2006/main">
               <a:ext uri="{FF2B5EF4-FFF2-40B4-BE49-F238E27FC236}">
-                <a16:creationId xmlns:a16="http://schemas.microsoft.com/office/drawing/2014/main" id="{933BE4DB-8947-47F9-A259-592D3354A895}"/>
+                <a16:creationId xmlns:a16="http://schemas.microsoft.com/office/drawing/2014/main" id="{B1E5F030-9C07-40B3-9FEF-8AF07E10D2B5}"/>
               </a:ext>
             </a:extLst>
           </p:cNvPr>
@@ -20824,7 +20824,7 @@
           <p:cNvPr id="5" name="Uitlegvoorbeeld — niet uit het boek · Fietsbellen">
             <a:extLst xmlns:a="http://schemas.openxmlformats.org/drawingml/2006/main">
               <a:ext uri="{FF2B5EF4-FFF2-40B4-BE49-F238E27FC236}">
-                <a16:creationId xmlns:a16="http://schemas.microsoft.com/office/drawing/2014/main" id="{5CD129E5-3E6B-4026-8D8A-FD318ED40A59}"/>
+                <a16:creationId xmlns:a16="http://schemas.microsoft.com/office/drawing/2014/main" id="{C52935EF-6B43-47F8-AC1D-B81E22CCB904}"/>
               </a:ext>
             </a:extLst>
           </p:cNvPr>
@@ -20881,7 +20881,7 @@
           <p:cNvPr id="6" name="Bij Q = 40: betalingsbereidheid € 8 en MK € 14.">
             <a:extLst xmlns:a="http://schemas.openxmlformats.org/drawingml/2006/main">
               <a:ext uri="{FF2B5EF4-FFF2-40B4-BE49-F238E27FC236}">
-                <a16:creationId xmlns:a16="http://schemas.microsoft.com/office/drawing/2014/main" id="{E04FF899-B3B3-4B33-A223-FA5DF77BFE8C}"/>
+                <a16:creationId xmlns:a16="http://schemas.microsoft.com/office/drawing/2014/main" id="{F5BE056D-95DE-430E-B867-713E5BF83834}"/>
               </a:ext>
             </a:extLst>
           </p:cNvPr>
@@ -20938,7 +20938,7 @@
           <p:cNvPr id="7" name="“Meer fietsbellen verkopen maakt TS altijd groter.”">
             <a:extLst xmlns:a="http://schemas.openxmlformats.org/drawingml/2006/main">
               <a:ext uri="{FF2B5EF4-FFF2-40B4-BE49-F238E27FC236}">
-                <a16:creationId xmlns:a16="http://schemas.microsoft.com/office/drawing/2014/main" id="{7BCD3397-3A94-4E56-9BF6-3F1DF24A7301}"/>
+                <a16:creationId xmlns:a16="http://schemas.microsoft.com/office/drawing/2014/main" id="{B73D2622-B222-46DF-9CAD-3360F8B7AE4E}"/>
               </a:ext>
             </a:extLst>
           </p:cNvPr>
@@ -20995,7 +20995,7 @@
           <p:cNvPr id="8" name="8 − 14 = − € 6 bij de marginale vergelijking.&#10;De extra eenheid verlaag">
             <a:extLst xmlns:a="http://schemas.openxmlformats.org/drawingml/2006/main">
               <a:ext uri="{FF2B5EF4-FFF2-40B4-BE49-F238E27FC236}">
-                <a16:creationId xmlns:a16="http://schemas.microsoft.com/office/drawing/2014/main" id="{34FD3BD7-6C08-4640-83C1-469624F8BEBB}"/>
+                <a16:creationId xmlns:a16="http://schemas.microsoft.com/office/drawing/2014/main" id="{26545C84-CFF8-4E3D-9783-1D0DC281359E}"/>
               </a:ext>
             </a:extLst>
           </p:cNvPr>
@@ -21073,7 +21073,7 @@
     </p:spTree>
     <p:extLst>
       <p:ext uri="{BB962C8B-B14F-4D97-AF65-F5344CB8AC3E}">
-        <p14:creationId xmlns:p14="http://schemas.microsoft.com/office/powerpoint/2010/main" val="652799906"/>
+        <p14:creationId xmlns:p14="http://schemas.microsoft.com/office/powerpoint/2010/main" val="306814253"/>
       </p:ext>
     </p:extLst>
   </p:cSld>
@@ -21104,7 +21104,7 @@
           <p:cNvPr id="29" name="Deze les: §2.3.2 Producentensurplus en totaal surplus">
             <a:extLst xmlns:a="http://schemas.openxmlformats.org/drawingml/2006/main">
               <a:ext uri="{FF2B5EF4-FFF2-40B4-BE49-F238E27FC236}">
-                <a16:creationId xmlns:a16="http://schemas.microsoft.com/office/drawing/2014/main" id="{3480045C-2617-444D-A820-B7B978D590BC}"/>
+                <a16:creationId xmlns:a16="http://schemas.microsoft.com/office/drawing/2014/main" id="{E930A56C-3B80-40F1-8FFD-1960B7D25F8B}"/>
               </a:ext>
             </a:extLst>
           </p:cNvPr>
@@ -21161,7 +21161,7 @@
           <p:cNvPr id="2" name="">
             <a:extLst xmlns:a="http://schemas.openxmlformats.org/drawingml/2006/main">
               <a:ext uri="{FF2B5EF4-FFF2-40B4-BE49-F238E27FC236}">
-                <a16:creationId xmlns:a16="http://schemas.microsoft.com/office/drawing/2014/main" id="{B7D6BAE6-CD42-4AA8-9EA7-A62EF1B08758}"/>
+                <a16:creationId xmlns:a16="http://schemas.microsoft.com/office/drawing/2014/main" id="{46B83379-8907-4B17-99A9-6E54D630EF38}"/>
               </a:ext>
             </a:extLst>
           </p:cNvPr>
@@ -21190,7 +21190,7 @@
           <p:cNvPr id="3" name="§2.3.2 Producentensurplus en totaal surplus">
             <a:extLst xmlns:a="http://schemas.openxmlformats.org/drawingml/2006/main">
               <a:ext uri="{FF2B5EF4-FFF2-40B4-BE49-F238E27FC236}">
-                <a16:creationId xmlns:a16="http://schemas.microsoft.com/office/drawing/2014/main" id="{ABBFEFFD-4098-4E5B-8BC9-C1C9EB2D094B}"/>
+                <a16:creationId xmlns:a16="http://schemas.microsoft.com/office/drawing/2014/main" id="{CDAE4797-A80F-4132-B3F9-E42271DEC72C}"/>
               </a:ext>
             </a:extLst>
           </p:cNvPr>
@@ -21247,7 +21247,7 @@
           <p:cNvPr id="4" name="16">
             <a:extLst xmlns:a="http://schemas.openxmlformats.org/drawingml/2006/main">
               <a:ext uri="{FF2B5EF4-FFF2-40B4-BE49-F238E27FC236}">
-                <a16:creationId xmlns:a16="http://schemas.microsoft.com/office/drawing/2014/main" id="{4706342C-5C08-4F54-A7AA-89FBF4995110}"/>
+                <a16:creationId xmlns:a16="http://schemas.microsoft.com/office/drawing/2014/main" id="{97972C6A-8C9B-4F82-BE0B-0369E5AA075A}"/>
               </a:ext>
             </a:extLst>
           </p:cNvPr>
@@ -21304,7 +21304,7 @@
           <p:cNvPr id="5" name="phase">
             <a:extLst xmlns:a="http://schemas.openxmlformats.org/drawingml/2006/main">
               <a:ext uri="{FF2B5EF4-FFF2-40B4-BE49-F238E27FC236}">
-                <a16:creationId xmlns:a16="http://schemas.microsoft.com/office/drawing/2014/main" id="{7D9C2E63-8A09-475E-A991-33908F1F9EE5}"/>
+                <a16:creationId xmlns:a16="http://schemas.microsoft.com/office/drawing/2014/main" id="{7D4F8BF8-4521-445A-A115-E1DB3A2047C1}"/>
               </a:ext>
             </a:extLst>
           </p:cNvPr>
@@ -21361,7 +21361,7 @@
           <p:cNvPr id="6" name="Lesroute">
             <a:extLst xmlns:a="http://schemas.openxmlformats.org/drawingml/2006/main">
               <a:ext uri="{FF2B5EF4-FFF2-40B4-BE49-F238E27FC236}">
-                <a16:creationId xmlns:a16="http://schemas.microsoft.com/office/drawing/2014/main" id="{3EC38BA8-5642-4943-94DE-07A70CD5F41B}"/>
+                <a16:creationId xmlns:a16="http://schemas.microsoft.com/office/drawing/2014/main" id="{9A9C6C01-4F9B-4EB9-B7E0-78F73D296E4E}"/>
               </a:ext>
             </a:extLst>
           </p:cNvPr>
@@ -21418,7 +21418,7 @@
           <p:cNvPr id="7" name="route-number-1">
             <a:extLst xmlns:a="http://schemas.openxmlformats.org/drawingml/2006/main">
               <a:ext uri="{FF2B5EF4-FFF2-40B4-BE49-F238E27FC236}">
-                <a16:creationId xmlns:a16="http://schemas.microsoft.com/office/drawing/2014/main" id="{385884D3-69CD-4E7C-84FA-DC56712B613B}"/>
+                <a16:creationId xmlns:a16="http://schemas.microsoft.com/office/drawing/2014/main" id="{C1305504-C966-44DE-B9F7-1916AEBB442B}"/>
               </a:ext>
             </a:extLst>
           </p:cNvPr>
@@ -21475,7 +21475,7 @@
           <p:cNvPr id="8" name="route-1">
             <a:extLst xmlns:a="http://schemas.openxmlformats.org/drawingml/2006/main">
               <a:ext uri="{FF2B5EF4-FFF2-40B4-BE49-F238E27FC236}">
-                <a16:creationId xmlns:a16="http://schemas.microsoft.com/office/drawing/2014/main" id="{102305E8-1598-4C71-B002-BDFA515F920C}"/>
+                <a16:creationId xmlns:a16="http://schemas.microsoft.com/office/drawing/2014/main" id="{C096DB16-DC15-4F71-A8C4-8A1EBCF4826E}"/>
               </a:ext>
             </a:extLst>
           </p:cNvPr>
@@ -21532,7 +21532,7 @@
           <p:cNvPr id="9" name="route-number-2">
             <a:extLst xmlns:a="http://schemas.openxmlformats.org/drawingml/2006/main">
               <a:ext uri="{FF2B5EF4-FFF2-40B4-BE49-F238E27FC236}">
-                <a16:creationId xmlns:a16="http://schemas.microsoft.com/office/drawing/2014/main" id="{E6B2D45D-1590-4E67-98CD-674D33F001A7}"/>
+                <a16:creationId xmlns:a16="http://schemas.microsoft.com/office/drawing/2014/main" id="{56153B9B-EFB9-4742-B201-9D9C216357F0}"/>
               </a:ext>
             </a:extLst>
           </p:cNvPr>
@@ -21589,7 +21589,7 @@
           <p:cNvPr id="10" name="route-2">
             <a:extLst xmlns:a="http://schemas.openxmlformats.org/drawingml/2006/main">
               <a:ext uri="{FF2B5EF4-FFF2-40B4-BE49-F238E27FC236}">
-                <a16:creationId xmlns:a16="http://schemas.microsoft.com/office/drawing/2014/main" id="{01C177EC-4D44-408D-B98C-FA138ACE3C6E}"/>
+                <a16:creationId xmlns:a16="http://schemas.microsoft.com/office/drawing/2014/main" id="{AD0457B5-8D66-4EB5-BF4B-AE00D6C5D71B}"/>
               </a:ext>
             </a:extLst>
           </p:cNvPr>
@@ -21646,7 +21646,7 @@
           <p:cNvPr id="11" name="route-number-3">
             <a:extLst xmlns:a="http://schemas.openxmlformats.org/drawingml/2006/main">
               <a:ext uri="{FF2B5EF4-FFF2-40B4-BE49-F238E27FC236}">
-                <a16:creationId xmlns:a16="http://schemas.microsoft.com/office/drawing/2014/main" id="{DA30F2E7-FFCE-4CE9-8596-C0686BF68D04}"/>
+                <a16:creationId xmlns:a16="http://schemas.microsoft.com/office/drawing/2014/main" id="{D5EA4B01-BDC7-4F49-A83C-B6AE0148257B}"/>
               </a:ext>
             </a:extLst>
           </p:cNvPr>
@@ -21703,7 +21703,7 @@
           <p:cNvPr id="12" name="route-3">
             <a:extLst xmlns:a="http://schemas.openxmlformats.org/drawingml/2006/main">
               <a:ext uri="{FF2B5EF4-FFF2-40B4-BE49-F238E27FC236}">
-                <a16:creationId xmlns:a16="http://schemas.microsoft.com/office/drawing/2014/main" id="{E5E1DE77-7DB8-4FFF-AE0F-0A9EA8583047}"/>
+                <a16:creationId xmlns:a16="http://schemas.microsoft.com/office/drawing/2014/main" id="{A805CCD3-20AB-40DB-9EA3-24E3D9915C99}"/>
               </a:ext>
             </a:extLst>
           </p:cNvPr>
@@ -21760,7 +21760,7 @@
           <p:cNvPr id="13" name="route-number-4">
             <a:extLst xmlns:a="http://schemas.openxmlformats.org/drawingml/2006/main">
               <a:ext uri="{FF2B5EF4-FFF2-40B4-BE49-F238E27FC236}">
-                <a16:creationId xmlns:a16="http://schemas.microsoft.com/office/drawing/2014/main" id="{D2D7A91F-8492-4C4F-8F47-D711A1B58555}"/>
+                <a16:creationId xmlns:a16="http://schemas.microsoft.com/office/drawing/2014/main" id="{D43B45FF-ECAF-4142-AB2D-7A22205DFD57}"/>
               </a:ext>
             </a:extLst>
           </p:cNvPr>
@@ -21817,7 +21817,7 @@
           <p:cNvPr id="14" name="route-4">
             <a:extLst xmlns:a="http://schemas.openxmlformats.org/drawingml/2006/main">
               <a:ext uri="{FF2B5EF4-FFF2-40B4-BE49-F238E27FC236}">
-                <a16:creationId xmlns:a16="http://schemas.microsoft.com/office/drawing/2014/main" id="{296AE66E-05C0-44EB-ADCD-E4117F9D6B93}"/>
+                <a16:creationId xmlns:a16="http://schemas.microsoft.com/office/drawing/2014/main" id="{0591007E-56C0-47CA-AFB4-5B066D030DA8}"/>
               </a:ext>
             </a:extLst>
           </p:cNvPr>
@@ -21874,7 +21874,7 @@
           <p:cNvPr id="15" name="route-number-5">
             <a:extLst xmlns:a="http://schemas.openxmlformats.org/drawingml/2006/main">
               <a:ext uri="{FF2B5EF4-FFF2-40B4-BE49-F238E27FC236}">
-                <a16:creationId xmlns:a16="http://schemas.microsoft.com/office/drawing/2014/main" id="{B167C91D-3D8A-459B-8CF6-04A7A4C63DF0}"/>
+                <a16:creationId xmlns:a16="http://schemas.microsoft.com/office/drawing/2014/main" id="{304214EC-AB21-4612-9710-4B73A115AFAD}"/>
               </a:ext>
             </a:extLst>
           </p:cNvPr>
@@ -21931,7 +21931,7 @@
           <p:cNvPr id="16" name="route-5">
             <a:extLst xmlns:a="http://schemas.openxmlformats.org/drawingml/2006/main">
               <a:ext uri="{FF2B5EF4-FFF2-40B4-BE49-F238E27FC236}">
-                <a16:creationId xmlns:a16="http://schemas.microsoft.com/office/drawing/2014/main" id="{C9CA032F-4783-49D8-9C80-70EF86738C72}"/>
+                <a16:creationId xmlns:a16="http://schemas.microsoft.com/office/drawing/2014/main" id="{E182FFE9-6E66-4B47-AFB0-0EB68858A928}"/>
               </a:ext>
             </a:extLst>
           </p:cNvPr>
@@ -21988,7 +21988,7 @@
           <p:cNvPr id="17" name="route-number-6">
             <a:extLst xmlns:a="http://schemas.openxmlformats.org/drawingml/2006/main">
               <a:ext uri="{FF2B5EF4-FFF2-40B4-BE49-F238E27FC236}">
-                <a16:creationId xmlns:a16="http://schemas.microsoft.com/office/drawing/2014/main" id="{9A07D319-92B9-4208-828B-253FDD0B20DA}"/>
+                <a16:creationId xmlns:a16="http://schemas.microsoft.com/office/drawing/2014/main" id="{6A1C9F40-84CF-4DA9-9EEA-E3C989102DA3}"/>
               </a:ext>
             </a:extLst>
           </p:cNvPr>
@@ -22045,7 +22045,7 @@
           <p:cNvPr id="18" name="route-6">
             <a:extLst xmlns:a="http://schemas.openxmlformats.org/drawingml/2006/main">
               <a:ext uri="{FF2B5EF4-FFF2-40B4-BE49-F238E27FC236}">
-                <a16:creationId xmlns:a16="http://schemas.microsoft.com/office/drawing/2014/main" id="{F2FC61C3-06FA-4EA6-9FA7-EDA6F377CA53}"/>
+                <a16:creationId xmlns:a16="http://schemas.microsoft.com/office/drawing/2014/main" id="{343409E1-3AE0-485F-A1C7-F9535A448625}"/>
               </a:ext>
             </a:extLst>
           </p:cNvPr>
@@ -22102,7 +22102,7 @@
           <p:cNvPr id="19" name="route-number-7">
             <a:extLst xmlns:a="http://schemas.openxmlformats.org/drawingml/2006/main">
               <a:ext uri="{FF2B5EF4-FFF2-40B4-BE49-F238E27FC236}">
-                <a16:creationId xmlns:a16="http://schemas.microsoft.com/office/drawing/2014/main" id="{70F09921-FB39-4B56-9395-FC47518A4CD3}"/>
+                <a16:creationId xmlns:a16="http://schemas.microsoft.com/office/drawing/2014/main" id="{82C571D8-5227-4E5E-BB6E-543581FA6663}"/>
               </a:ext>
             </a:extLst>
           </p:cNvPr>
@@ -22159,7 +22159,7 @@
           <p:cNvPr id="20" name="route-7">
             <a:extLst xmlns:a="http://schemas.openxmlformats.org/drawingml/2006/main">
               <a:ext uri="{FF2B5EF4-FFF2-40B4-BE49-F238E27FC236}">
-                <a16:creationId xmlns:a16="http://schemas.microsoft.com/office/drawing/2014/main" id="{53D255AC-8CE5-4826-954F-A9A85F5A386C}"/>
+                <a16:creationId xmlns:a16="http://schemas.microsoft.com/office/drawing/2014/main" id="{F2C1D84B-4FF5-4781-9481-A01D44B721E5}"/>
               </a:ext>
             </a:extLst>
           </p:cNvPr>
@@ -22216,7 +22216,7 @@
           <p:cNvPr id="21" name="Lesdoelen">
             <a:extLst xmlns:a="http://schemas.openxmlformats.org/drawingml/2006/main">
               <a:ext uri="{FF2B5EF4-FFF2-40B4-BE49-F238E27FC236}">
-                <a16:creationId xmlns:a16="http://schemas.microsoft.com/office/drawing/2014/main" id="{5DF4F9A6-C677-4BD3-A63F-78FEA05B51FB}"/>
+                <a16:creationId xmlns:a16="http://schemas.microsoft.com/office/drawing/2014/main" id="{2ACE7863-F49A-433D-96E5-3A87ABAFFBF5}"/>
               </a:ext>
             </a:extLst>
           </p:cNvPr>
@@ -22273,7 +22273,7 @@
           <p:cNvPr id="22" name="overview-goals">
             <a:extLst xmlns:a="http://schemas.openxmlformats.org/drawingml/2006/main">
               <a:ext uri="{FF2B5EF4-FFF2-40B4-BE49-F238E27FC236}">
-                <a16:creationId xmlns:a16="http://schemas.microsoft.com/office/drawing/2014/main" id="{BE46003E-831F-49A2-B955-7EE85C8A80D2}"/>
+                <a16:creationId xmlns:a16="http://schemas.microsoft.com/office/drawing/2014/main" id="{21E4ECB5-275C-405C-9081-279B275F5B3C}"/>
               </a:ext>
             </a:extLst>
           </p:cNvPr>
@@ -22376,7 +22376,7 @@
           <p:cNvPr id="23" name="">
             <a:extLst xmlns:a="http://schemas.openxmlformats.org/drawingml/2006/main">
               <a:ext uri="{FF2B5EF4-FFF2-40B4-BE49-F238E27FC236}">
-                <a16:creationId xmlns:a16="http://schemas.microsoft.com/office/drawing/2014/main" id="{23C6FA00-D0B9-4FC2-A43A-5D3092F2B770}"/>
+                <a16:creationId xmlns:a16="http://schemas.microsoft.com/office/drawing/2014/main" id="{D8EA6A3C-8308-4C6B-A5FF-89C2F4973E2E}"/>
               </a:ext>
             </a:extLst>
           </p:cNvPr>
@@ -22405,7 +22405,7 @@
           <p:cNvPr id="24" name="Startopdracht">
             <a:extLst xmlns:a="http://schemas.openxmlformats.org/drawingml/2006/main">
               <a:ext uri="{FF2B5EF4-FFF2-40B4-BE49-F238E27FC236}">
-                <a16:creationId xmlns:a16="http://schemas.microsoft.com/office/drawing/2014/main" id="{57E22B05-135C-40BB-AA81-EF47B2D13094}"/>
+                <a16:creationId xmlns:a16="http://schemas.microsoft.com/office/drawing/2014/main" id="{A77763B4-D390-4E1C-97A0-DA711F5E6D9B}"/>
               </a:ext>
             </a:extLst>
           </p:cNvPr>
@@ -22462,7 +22462,7 @@
           <p:cNvPr id="25" name="overview-start">
             <a:extLst xmlns:a="http://schemas.openxmlformats.org/drawingml/2006/main">
               <a:ext uri="{FF2B5EF4-FFF2-40B4-BE49-F238E27FC236}">
-                <a16:creationId xmlns:a16="http://schemas.microsoft.com/office/drawing/2014/main" id="{CE8AC2F6-1760-4A3C-81EF-5B6CA0428094}"/>
+                <a16:creationId xmlns:a16="http://schemas.microsoft.com/office/drawing/2014/main" id="{F34059DB-4CD8-4C85-8D93-ACA7FAFECD60}"/>
               </a:ext>
             </a:extLst>
           </p:cNvPr>
@@ -22509,7 +22509,7 @@
                 <a:ea typeface="Arial"/>
                 <a:cs typeface="Arial"/>
               </a:rPr>
-              <a:t>Pagina 84 · Opgaven 1 en 2</a:t>
+              <a:t>Pagina 85 · Opgaven 1 en 2</a:t>
             </a:r>
           </a:p>
           <a:p xmlns:a="http://schemas.openxmlformats.org/drawingml/2006/main">
@@ -22532,7 +22532,7 @@
                 <a:ea typeface="Arial"/>
                 <a:cs typeface="Arial"/>
               </a:rPr>
-              <a:t>1: hulp p. 82; 2: verkennen p. 80</a:t>
+              <a:t>1: hulp p. 83; 2: verkennen p. 81</a:t>
             </a:r>
           </a:p>
         </p:txBody>
@@ -22542,7 +22542,7 @@
           <p:cNvPr id="26" name="">
             <a:extLst xmlns:a="http://schemas.openxmlformats.org/drawingml/2006/main">
               <a:ext uri="{FF2B5EF4-FFF2-40B4-BE49-F238E27FC236}">
-                <a16:creationId xmlns:a16="http://schemas.microsoft.com/office/drawing/2014/main" id="{9C6AE0F7-F4DF-4501-852F-8F633AAA304C}"/>
+                <a16:creationId xmlns:a16="http://schemas.microsoft.com/office/drawing/2014/main" id="{C867A1B5-FB26-482F-A197-F94A778AD086}"/>
               </a:ext>
             </a:extLst>
           </p:cNvPr>
@@ -22571,7 +22571,7 @@
           <p:cNvPr id="27" name="Huiswerk">
             <a:extLst xmlns:a="http://schemas.openxmlformats.org/drawingml/2006/main">
               <a:ext uri="{FF2B5EF4-FFF2-40B4-BE49-F238E27FC236}">
-                <a16:creationId xmlns:a16="http://schemas.microsoft.com/office/drawing/2014/main" id="{E8EED272-9BE3-415E-B27F-8430353013B2}"/>
+                <a16:creationId xmlns:a16="http://schemas.microsoft.com/office/drawing/2014/main" id="{E91F6B07-A31A-47CD-B379-F5F458CEE341}"/>
               </a:ext>
             </a:extLst>
           </p:cNvPr>
@@ -22628,7 +22628,7 @@
           <p:cNvPr id="28" name="overview-homework">
             <a:extLst xmlns:a="http://schemas.openxmlformats.org/drawingml/2006/main">
               <a:ext uri="{FF2B5EF4-FFF2-40B4-BE49-F238E27FC236}">
-                <a16:creationId xmlns:a16="http://schemas.microsoft.com/office/drawing/2014/main" id="{87A81DDB-0862-45C2-B07C-CDFFBCB7082B}"/>
+                <a16:creationId xmlns:a16="http://schemas.microsoft.com/office/drawing/2014/main" id="{6210E6CE-F429-4F61-BB15-0379C80BECA9}"/>
               </a:ext>
             </a:extLst>
           </p:cNvPr>
@@ -22775,7 +22775,7 @@
     </p:spTree>
     <p:extLst>
       <p:ext uri="{BB962C8B-B14F-4D97-AF65-F5344CB8AC3E}">
-        <p14:creationId xmlns:p14="http://schemas.microsoft.com/office/powerpoint/2010/main" val="21641639"/>
+        <p14:creationId xmlns:p14="http://schemas.microsoft.com/office/powerpoint/2010/main" val="762489947"/>
       </p:ext>
     </p:extLst>
   </p:cSld>
@@ -22806,7 +22806,7 @@
           <p:cNvPr id="9" name="Opgave 8 · Concertkaartjes">
             <a:extLst xmlns:a="http://schemas.openxmlformats.org/drawingml/2006/main">
               <a:ext uri="{FF2B5EF4-FFF2-40B4-BE49-F238E27FC236}">
-                <a16:creationId xmlns:a16="http://schemas.microsoft.com/office/drawing/2014/main" id="{CDDC4990-3EB4-4CB3-9B4E-D0E2ED678CA8}"/>
+                <a16:creationId xmlns:a16="http://schemas.microsoft.com/office/drawing/2014/main" id="{ED1A30FB-174F-4D3A-AEA0-1CFB185E9E73}"/>
               </a:ext>
             </a:extLst>
           </p:cNvPr>
@@ -22863,7 +22863,7 @@
           <p:cNvPr id="2" name="">
             <a:extLst xmlns:a="http://schemas.openxmlformats.org/drawingml/2006/main">
               <a:ext uri="{FF2B5EF4-FFF2-40B4-BE49-F238E27FC236}">
-                <a16:creationId xmlns:a16="http://schemas.microsoft.com/office/drawing/2014/main" id="{3F4F7BE7-E1A4-4A86-8B83-DB3639B2A974}"/>
+                <a16:creationId xmlns:a16="http://schemas.microsoft.com/office/drawing/2014/main" id="{802C9CFD-1C77-414E-968C-13BE22812141}"/>
               </a:ext>
             </a:extLst>
           </p:cNvPr>
@@ -22889,10 +22889,10 @@
       </p:sp>
       <p:sp>
         <p:nvSpPr>
-          <p:cNvPr id="3" name="§2.3.2 · Doelopgave 8 · Boekpagina 88–89">
+          <p:cNvPr id="3" name="§2.3.2 · Doelopgave 8 · Boekpagina 89–90">
             <a:extLst xmlns:a="http://schemas.openxmlformats.org/drawingml/2006/main">
               <a:ext uri="{FF2B5EF4-FFF2-40B4-BE49-F238E27FC236}">
-                <a16:creationId xmlns:a16="http://schemas.microsoft.com/office/drawing/2014/main" id="{F1E4D91E-0856-4095-BA8C-1A3AD53719C5}"/>
+                <a16:creationId xmlns:a16="http://schemas.microsoft.com/office/drawing/2014/main" id="{62AEC65C-2922-4947-876A-434785BC1222}"/>
               </a:ext>
             </a:extLst>
           </p:cNvPr>
@@ -22939,7 +22939,7 @@
                 <a:ea typeface="Arial"/>
                 <a:cs typeface="Arial"/>
               </a:rPr>
-              <a:t>§2.3.2 · Doelopgave 8 · Boekpagina 88–89</a:t>
+              <a:t>§2.3.2 · Doelopgave 8 · Boekpagina 89–90</a:t>
             </a:r>
           </a:p>
         </p:txBody>
@@ -22949,7 +22949,7 @@
           <p:cNvPr id="4" name="17">
             <a:extLst xmlns:a="http://schemas.openxmlformats.org/drawingml/2006/main">
               <a:ext uri="{FF2B5EF4-FFF2-40B4-BE49-F238E27FC236}">
-                <a16:creationId xmlns:a16="http://schemas.microsoft.com/office/drawing/2014/main" id="{72501E49-CA38-4EE6-971C-CAAB36268CEC}"/>
+                <a16:creationId xmlns:a16="http://schemas.microsoft.com/office/drawing/2014/main" id="{B6A5CD66-8ECB-4CE7-91C9-00EB8E887729}"/>
               </a:ext>
             </a:extLst>
           </p:cNvPr>
@@ -23006,7 +23006,7 @@
           <p:cNvPr id="5" name="Vraag P = 50 − 0,5Q      Aanbod P = 5 + 0,25Q">
             <a:extLst xmlns:a="http://schemas.openxmlformats.org/drawingml/2006/main">
               <a:ext uri="{FF2B5EF4-FFF2-40B4-BE49-F238E27FC236}">
-                <a16:creationId xmlns:a16="http://schemas.microsoft.com/office/drawing/2014/main" id="{CAD89B0F-319F-411C-9771-189401068AB1}"/>
+                <a16:creationId xmlns:a16="http://schemas.microsoft.com/office/drawing/2014/main" id="{0271E61A-8EB6-4D1E-BD5E-C0A8D638C864}"/>
               </a:ext>
             </a:extLst>
           </p:cNvPr>
@@ -23070,7 +23070,7 @@
         </p:xfrm>
         <a:graphic xmlns:a="http://schemas.openxmlformats.org/drawingml/2006/main">
           <a:graphicData uri="http://schemas.openxmlformats.org/drawingml/2006/chart">
-            <c:chart xmlns:r="http://schemas.openxmlformats.org/officeDocument/2006/relationships" xmlns:c="http://schemas.openxmlformats.org/drawingml/2006/chart" r:id="R3198a59f0008469d"/>
+            <c:chart xmlns:r="http://schemas.openxmlformats.org/officeDocument/2006/relationships" xmlns:c="http://schemas.openxmlformats.org/drawingml/2006/chart" r:id="R0d54d51679394597"/>
           </a:graphicData>
         </a:graphic>
       </p:graphicFrame>
@@ -23079,7 +23079,7 @@
           <p:cNvPr id="7" name="P: euro per kaartje&#10;Q: kaartjes">
             <a:extLst xmlns:a="http://schemas.openxmlformats.org/drawingml/2006/main">
               <a:ext uri="{FF2B5EF4-FFF2-40B4-BE49-F238E27FC236}">
-                <a16:creationId xmlns:a16="http://schemas.microsoft.com/office/drawing/2014/main" id="{9C05864B-66F3-4202-8F6C-78790B0578B2}"/>
+                <a16:creationId xmlns:a16="http://schemas.microsoft.com/office/drawing/2014/main" id="{BB4ECFCD-FCF8-4967-83BD-E2B5292B8E23}"/>
               </a:ext>
             </a:extLst>
           </p:cNvPr>
@@ -23159,7 +23159,7 @@
           <p:cNvPr id="8" name="Binnen 0 ≤ Q ≤ 100&#10;geeft de inverse&#10;aanbodlijn de MK van&#10;elke opeenvol">
             <a:extLst xmlns:a="http://schemas.openxmlformats.org/drawingml/2006/main">
               <a:ext uri="{FF2B5EF4-FFF2-40B4-BE49-F238E27FC236}">
-                <a16:creationId xmlns:a16="http://schemas.microsoft.com/office/drawing/2014/main" id="{4D5C25EB-8E87-4EF4-8F39-5BA2D6F1B877}"/>
+                <a16:creationId xmlns:a16="http://schemas.microsoft.com/office/drawing/2014/main" id="{43B539A7-02AE-4BE2-B03B-75462BC6CD7D}"/>
               </a:ext>
             </a:extLst>
           </p:cNvPr>
@@ -23352,7 +23352,7 @@
     </p:spTree>
     <p:extLst>
       <p:ext uri="{BB962C8B-B14F-4D97-AF65-F5344CB8AC3E}">
-        <p14:creationId xmlns:p14="http://schemas.microsoft.com/office/powerpoint/2010/main" val="1811167178"/>
+        <p14:creationId xmlns:p14="http://schemas.microsoft.com/office/powerpoint/2010/main" val="1409257530"/>
       </p:ext>
     </p:extLst>
   </p:cSld>
@@ -23383,7 +23383,7 @@
           <p:cNvPr id="8" name="Opgave 8 · Bron: marginale vergelijking">
             <a:extLst xmlns:a="http://schemas.openxmlformats.org/drawingml/2006/main">
               <a:ext uri="{FF2B5EF4-FFF2-40B4-BE49-F238E27FC236}">
-                <a16:creationId xmlns:a16="http://schemas.microsoft.com/office/drawing/2014/main" id="{F4D22667-733C-4DF5-857B-91B3DE550B79}"/>
+                <a16:creationId xmlns:a16="http://schemas.microsoft.com/office/drawing/2014/main" id="{E5752E67-32F0-4205-AECC-4D407DED93D9}"/>
               </a:ext>
             </a:extLst>
           </p:cNvPr>
@@ -23440,7 +23440,7 @@
           <p:cNvPr id="2" name="">
             <a:extLst xmlns:a="http://schemas.openxmlformats.org/drawingml/2006/main">
               <a:ext uri="{FF2B5EF4-FFF2-40B4-BE49-F238E27FC236}">
-                <a16:creationId xmlns:a16="http://schemas.microsoft.com/office/drawing/2014/main" id="{551393A6-5803-4CD7-9E33-0752F06DA6C3}"/>
+                <a16:creationId xmlns:a16="http://schemas.microsoft.com/office/drawing/2014/main" id="{49DD3717-94D4-4D68-9A67-F4B218719C64}"/>
               </a:ext>
             </a:extLst>
           </p:cNvPr>
@@ -23466,10 +23466,10 @@
       </p:sp>
       <p:sp>
         <p:nvSpPr>
-          <p:cNvPr id="3" name="§2.3.2 · Doelopgave 8 · Boekpagina 88–89">
+          <p:cNvPr id="3" name="§2.3.2 · Doelopgave 8 · Boekpagina 89–90">
             <a:extLst xmlns:a="http://schemas.openxmlformats.org/drawingml/2006/main">
               <a:ext uri="{FF2B5EF4-FFF2-40B4-BE49-F238E27FC236}">
-                <a16:creationId xmlns:a16="http://schemas.microsoft.com/office/drawing/2014/main" id="{6E5F8EA0-FC39-4FA5-B4D1-58CE1E24A0E5}"/>
+                <a16:creationId xmlns:a16="http://schemas.microsoft.com/office/drawing/2014/main" id="{8A878CB2-1DB7-4799-8BAA-80796EA55B10}"/>
               </a:ext>
             </a:extLst>
           </p:cNvPr>
@@ -23516,7 +23516,7 @@
                 <a:ea typeface="Arial"/>
                 <a:cs typeface="Arial"/>
               </a:rPr>
-              <a:t>§2.3.2 · Doelopgave 8 · Boekpagina 88–89</a:t>
+              <a:t>§2.3.2 · Doelopgave 8 · Boekpagina 89–90</a:t>
             </a:r>
           </a:p>
         </p:txBody>
@@ -23526,7 +23526,7 @@
           <p:cNvPr id="4" name="18">
             <a:extLst xmlns:a="http://schemas.openxmlformats.org/drawingml/2006/main">
               <a:ext uri="{FF2B5EF4-FFF2-40B4-BE49-F238E27FC236}">
-                <a16:creationId xmlns:a16="http://schemas.microsoft.com/office/drawing/2014/main" id="{14311BF0-E529-4F65-95DB-07020AB18071}"/>
+                <a16:creationId xmlns:a16="http://schemas.microsoft.com/office/drawing/2014/main" id="{993AB69F-DDC7-4E23-A524-F5A1B7CCC5FA}"/>
               </a:ext>
             </a:extLst>
           </p:cNvPr>
@@ -23828,7 +23828,7 @@
           <p:cNvPr id="6" name="De waarden zijn berekend met de gegeven vraag- en aanbodfunctie.">
             <a:extLst xmlns:a="http://schemas.openxmlformats.org/drawingml/2006/main">
               <a:ext uri="{FF2B5EF4-FFF2-40B4-BE49-F238E27FC236}">
-                <a16:creationId xmlns:a16="http://schemas.microsoft.com/office/drawing/2014/main" id="{B40ECA4A-085A-4C38-B39D-261C1E5B7176}"/>
+                <a16:creationId xmlns:a16="http://schemas.microsoft.com/office/drawing/2014/main" id="{C7771258-F6F6-411A-BAB2-C909297F9A8C}"/>
               </a:ext>
             </a:extLst>
           </p:cNvPr>
@@ -23885,7 +23885,7 @@
           <p:cNvPr id="7" name="De inverse aanbodlijn geeft P bij Q.&#10;In deze opgave lees je die P ook ">
             <a:extLst xmlns:a="http://schemas.openxmlformats.org/drawingml/2006/main">
               <a:ext uri="{FF2B5EF4-FFF2-40B4-BE49-F238E27FC236}">
-                <a16:creationId xmlns:a16="http://schemas.microsoft.com/office/drawing/2014/main" id="{1CB07E30-C7B6-4EA3-92F5-0CEA6B4C170C}"/>
+                <a16:creationId xmlns:a16="http://schemas.microsoft.com/office/drawing/2014/main" id="{D571670C-0689-4A57-9C3D-28DA4EAC5C38}"/>
               </a:ext>
             </a:extLst>
           </p:cNvPr>
@@ -23963,7 +23963,7 @@
     </p:spTree>
     <p:extLst>
       <p:ext uri="{BB962C8B-B14F-4D97-AF65-F5344CB8AC3E}">
-        <p14:creationId xmlns:p14="http://schemas.microsoft.com/office/powerpoint/2010/main" val="1516574305"/>
+        <p14:creationId xmlns:p14="http://schemas.microsoft.com/office/powerpoint/2010/main" val="904976022"/>
       </p:ext>
     </p:extLst>
   </p:cSld>
@@ -23994,7 +23994,7 @@
           <p:cNvPr id="11" name="Opgave 8 · Vragen a–c">
             <a:extLst xmlns:a="http://schemas.openxmlformats.org/drawingml/2006/main">
               <a:ext uri="{FF2B5EF4-FFF2-40B4-BE49-F238E27FC236}">
-                <a16:creationId xmlns:a16="http://schemas.microsoft.com/office/drawing/2014/main" id="{1F474080-8054-4CB2-A6C9-C9D864B8C547}"/>
+                <a16:creationId xmlns:a16="http://schemas.microsoft.com/office/drawing/2014/main" id="{9155C25C-062A-4F0C-8F40-586DCDF167AE}"/>
               </a:ext>
             </a:extLst>
           </p:cNvPr>
@@ -24051,7 +24051,7 @@
           <p:cNvPr id="2" name="">
             <a:extLst xmlns:a="http://schemas.openxmlformats.org/drawingml/2006/main">
               <a:ext uri="{FF2B5EF4-FFF2-40B4-BE49-F238E27FC236}">
-                <a16:creationId xmlns:a16="http://schemas.microsoft.com/office/drawing/2014/main" id="{BA149406-D8FC-4781-B536-EC79072A19D1}"/>
+                <a16:creationId xmlns:a16="http://schemas.microsoft.com/office/drawing/2014/main" id="{4908F741-7B45-48CB-ABD8-D54568C708D0}"/>
               </a:ext>
             </a:extLst>
           </p:cNvPr>
@@ -24077,10 +24077,10 @@
       </p:sp>
       <p:sp>
         <p:nvSpPr>
-          <p:cNvPr id="3" name="§2.3.2 · Doelopgave 8 · Boekpagina 88–89">
+          <p:cNvPr id="3" name="§2.3.2 · Doelopgave 8 · Boekpagina 89–90">
             <a:extLst xmlns:a="http://schemas.openxmlformats.org/drawingml/2006/main">
               <a:ext uri="{FF2B5EF4-FFF2-40B4-BE49-F238E27FC236}">
-                <a16:creationId xmlns:a16="http://schemas.microsoft.com/office/drawing/2014/main" id="{717BEEE4-B65B-41AD-A1B4-26810FDA34F5}"/>
+                <a16:creationId xmlns:a16="http://schemas.microsoft.com/office/drawing/2014/main" id="{FE5CB4B3-CF96-44E4-BE0F-E3FA1BDC2FFA}"/>
               </a:ext>
             </a:extLst>
           </p:cNvPr>
@@ -24127,7 +24127,7 @@
                 <a:ea typeface="Arial"/>
                 <a:cs typeface="Arial"/>
               </a:rPr>
-              <a:t>§2.3.2 · Doelopgave 8 · Boekpagina 88–89</a:t>
+              <a:t>§2.3.2 · Doelopgave 8 · Boekpagina 89–90</a:t>
             </a:r>
           </a:p>
         </p:txBody>
@@ -24137,7 +24137,7 @@
           <p:cNvPr id="4" name="19">
             <a:extLst xmlns:a="http://schemas.openxmlformats.org/drawingml/2006/main">
               <a:ext uri="{FF2B5EF4-FFF2-40B4-BE49-F238E27FC236}">
-                <a16:creationId xmlns:a16="http://schemas.microsoft.com/office/drawing/2014/main" id="{7F06F8C3-DF01-442A-A348-75C8CB29809D}"/>
+                <a16:creationId xmlns:a16="http://schemas.microsoft.com/office/drawing/2014/main" id="{D7997D92-2E20-4D70-B62F-B385569957B3}"/>
               </a:ext>
             </a:extLst>
           </p:cNvPr>
@@ -24194,7 +24194,7 @@
           <p:cNvPr id="5" name="a)">
             <a:extLst xmlns:a="http://schemas.openxmlformats.org/drawingml/2006/main">
               <a:ext uri="{FF2B5EF4-FFF2-40B4-BE49-F238E27FC236}">
-                <a16:creationId xmlns:a16="http://schemas.microsoft.com/office/drawing/2014/main" id="{DF9F6029-92B7-40A9-A312-9529FFF4F7BD}"/>
+                <a16:creationId xmlns:a16="http://schemas.microsoft.com/office/drawing/2014/main" id="{4B74A9DD-FDD7-4940-8711-ABFD18EE1424}"/>
               </a:ext>
             </a:extLst>
           </p:cNvPr>
@@ -24251,7 +24251,7 @@
           <p:cNvPr id="6" name="Bereken de evenwichtsprijs en -hoeveelheid.">
             <a:extLst xmlns:a="http://schemas.openxmlformats.org/drawingml/2006/main">
               <a:ext uri="{FF2B5EF4-FFF2-40B4-BE49-F238E27FC236}">
-                <a16:creationId xmlns:a16="http://schemas.microsoft.com/office/drawing/2014/main" id="{775CB197-41FE-47BA-9948-FCF1259BBFB6}"/>
+                <a16:creationId xmlns:a16="http://schemas.microsoft.com/office/drawing/2014/main" id="{F8E6E8AB-FA5A-4F06-A201-906A9C475E9A}"/>
               </a:ext>
             </a:extLst>
           </p:cNvPr>
@@ -24308,7 +24308,7 @@
           <p:cNvPr id="7" name="b)">
             <a:extLst xmlns:a="http://schemas.openxmlformats.org/drawingml/2006/main">
               <a:ext uri="{FF2B5EF4-FFF2-40B4-BE49-F238E27FC236}">
-                <a16:creationId xmlns:a16="http://schemas.microsoft.com/office/drawing/2014/main" id="{F8A1EE2C-5D6A-4A20-935A-4451293512A6}"/>
+                <a16:creationId xmlns:a16="http://schemas.microsoft.com/office/drawing/2014/main" id="{8A94C00D-8604-4B74-8AB1-336B5C268015}"/>
               </a:ext>
             </a:extLst>
           </p:cNvPr>
@@ -24365,7 +24365,7 @@
           <p:cNvPr id="8" name="Markeer het evenwicht in de basisgrafiek en arceer en benoem CS en PS.">
             <a:extLst xmlns:a="http://schemas.openxmlformats.org/drawingml/2006/main">
               <a:ext uri="{FF2B5EF4-FFF2-40B4-BE49-F238E27FC236}">
-                <a16:creationId xmlns:a16="http://schemas.microsoft.com/office/drawing/2014/main" id="{57828695-F95B-41C0-8E22-7C0406DCB1DE}"/>
+                <a16:creationId xmlns:a16="http://schemas.microsoft.com/office/drawing/2014/main" id="{9FCD34C0-87CE-4B7E-BE66-44D9F094917B}"/>
               </a:ext>
             </a:extLst>
           </p:cNvPr>
@@ -24422,7 +24422,7 @@
           <p:cNvPr id="9" name="c)">
             <a:extLst xmlns:a="http://schemas.openxmlformats.org/drawingml/2006/main">
               <a:ext uri="{FF2B5EF4-FFF2-40B4-BE49-F238E27FC236}">
-                <a16:creationId xmlns:a16="http://schemas.microsoft.com/office/drawing/2014/main" id="{3BB8F3B8-DB61-486A-9518-E145FC7AB58D}"/>
+                <a16:creationId xmlns:a16="http://schemas.microsoft.com/office/drawing/2014/main" id="{02CFDBAA-543A-45EA-8EB5-8D3300F28A8B}"/>
               </a:ext>
             </a:extLst>
           </p:cNvPr>
@@ -24479,7 +24479,7 @@
           <p:cNvPr id="10" name="Bereken CS, PS en TS met basis, hoogte en eenheid.">
             <a:extLst xmlns:a="http://schemas.openxmlformats.org/drawingml/2006/main">
               <a:ext uri="{FF2B5EF4-FFF2-40B4-BE49-F238E27FC236}">
-                <a16:creationId xmlns:a16="http://schemas.microsoft.com/office/drawing/2014/main" id="{6777705C-B93D-4AB0-91B9-3F481C35CE70}"/>
+                <a16:creationId xmlns:a16="http://schemas.microsoft.com/office/drawing/2014/main" id="{62A194B2-AF8C-4EAC-B35D-735083933E36}"/>
               </a:ext>
             </a:extLst>
           </p:cNvPr>
@@ -24534,7 +24534,7 @@
     </p:spTree>
     <p:extLst>
       <p:ext uri="{BB962C8B-B14F-4D97-AF65-F5344CB8AC3E}">
-        <p14:creationId xmlns:p14="http://schemas.microsoft.com/office/powerpoint/2010/main" val="200235380"/>
+        <p14:creationId xmlns:p14="http://schemas.microsoft.com/office/powerpoint/2010/main" val="1502315390"/>
       </p:ext>
     </p:extLst>
   </p:cSld>
@@ -24565,7 +24565,7 @@
           <p:cNvPr id="13" name="Wat kun je na deze les?">
             <a:extLst xmlns:a="http://schemas.openxmlformats.org/drawingml/2006/main">
               <a:ext uri="{FF2B5EF4-FFF2-40B4-BE49-F238E27FC236}">
-                <a16:creationId xmlns:a16="http://schemas.microsoft.com/office/drawing/2014/main" id="{9F81B17A-39F9-4966-80BC-3C92A13337B4}"/>
+                <a16:creationId xmlns:a16="http://schemas.microsoft.com/office/drawing/2014/main" id="{A006A510-5823-4DDC-97CD-4D7496A77030}"/>
               </a:ext>
             </a:extLst>
           </p:cNvPr>
@@ -24622,7 +24622,7 @@
           <p:cNvPr id="2" name="">
             <a:extLst xmlns:a="http://schemas.openxmlformats.org/drawingml/2006/main">
               <a:ext uri="{FF2B5EF4-FFF2-40B4-BE49-F238E27FC236}">
-                <a16:creationId xmlns:a16="http://schemas.microsoft.com/office/drawing/2014/main" id="{E68A89A4-5811-4C4D-8388-8A35FD11272E}"/>
+                <a16:creationId xmlns:a16="http://schemas.microsoft.com/office/drawing/2014/main" id="{BA179A17-43B8-4217-ABF1-328836E0E9ED}"/>
               </a:ext>
             </a:extLst>
           </p:cNvPr>
@@ -24651,7 +24651,7 @@
           <p:cNvPr id="3" name="§2.3.2 Producentensurplus en totaal surplus">
             <a:extLst xmlns:a="http://schemas.openxmlformats.org/drawingml/2006/main">
               <a:ext uri="{FF2B5EF4-FFF2-40B4-BE49-F238E27FC236}">
-                <a16:creationId xmlns:a16="http://schemas.microsoft.com/office/drawing/2014/main" id="{E0F60594-5A99-4053-AED3-CDF7DB555164}"/>
+                <a16:creationId xmlns:a16="http://schemas.microsoft.com/office/drawing/2014/main" id="{A25BE8B8-2E33-4BE8-8636-8CA2BA211A1D}"/>
               </a:ext>
             </a:extLst>
           </p:cNvPr>
@@ -24708,7 +24708,7 @@
           <p:cNvPr id="4" name="2">
             <a:extLst xmlns:a="http://schemas.openxmlformats.org/drawingml/2006/main">
               <a:ext uri="{FF2B5EF4-FFF2-40B4-BE49-F238E27FC236}">
-                <a16:creationId xmlns:a16="http://schemas.microsoft.com/office/drawing/2014/main" id="{2D4EB953-AC57-448D-A2DA-D117FF399BF4}"/>
+                <a16:creationId xmlns:a16="http://schemas.microsoft.com/office/drawing/2014/main" id="{6CBA7419-7330-41B3-858E-2B1615F620FD}"/>
               </a:ext>
             </a:extLst>
           </p:cNvPr>
@@ -24765,7 +24765,7 @@
           <p:cNvPr id="5" name="Evenwicht">
             <a:extLst xmlns:a="http://schemas.openxmlformats.org/drawingml/2006/main">
               <a:ext uri="{FF2B5EF4-FFF2-40B4-BE49-F238E27FC236}">
-                <a16:creationId xmlns:a16="http://schemas.microsoft.com/office/drawing/2014/main" id="{0984D31E-C4FB-49BE-BC21-358283A2D8D4}"/>
+                <a16:creationId xmlns:a16="http://schemas.microsoft.com/office/drawing/2014/main" id="{7E1C06C1-7D02-48DB-8B1C-4109405D4D48}"/>
               </a:ext>
             </a:extLst>
           </p:cNvPr>
@@ -24822,7 +24822,7 @@
           <p:cNvPr id="6" name="Vraag en aanbod gelijkstellen en E markeren.">
             <a:extLst xmlns:a="http://schemas.openxmlformats.org/drawingml/2006/main">
               <a:ext uri="{FF2B5EF4-FFF2-40B4-BE49-F238E27FC236}">
-                <a16:creationId xmlns:a16="http://schemas.microsoft.com/office/drawing/2014/main" id="{F42DB96B-8462-4D48-A235-E31F77393E68}"/>
+                <a16:creationId xmlns:a16="http://schemas.microsoft.com/office/drawing/2014/main" id="{1336D6BB-DA05-4346-8FAB-70EDF1BC1C52}"/>
               </a:ext>
             </a:extLst>
           </p:cNvPr>
@@ -24879,7 +24879,7 @@
           <p:cNvPr id="7" name="Surplus">
             <a:extLst xmlns:a="http://schemas.openxmlformats.org/drawingml/2006/main">
               <a:ext uri="{FF2B5EF4-FFF2-40B4-BE49-F238E27FC236}">
-                <a16:creationId xmlns:a16="http://schemas.microsoft.com/office/drawing/2014/main" id="{BC4B3AC4-611F-4FE5-92C5-813DA1BDC7D0}"/>
+                <a16:creationId xmlns:a16="http://schemas.microsoft.com/office/drawing/2014/main" id="{D0C981DF-E8A8-4393-87D7-F8C5D1F01215}"/>
               </a:ext>
             </a:extLst>
           </p:cNvPr>
@@ -24936,7 +24936,7 @@
           <p:cNvPr id="8" name="CS, PS en TS berekenen met basis, hoogte en eenheid.">
             <a:extLst xmlns:a="http://schemas.openxmlformats.org/drawingml/2006/main">
               <a:ext uri="{FF2B5EF4-FFF2-40B4-BE49-F238E27FC236}">
-                <a16:creationId xmlns:a16="http://schemas.microsoft.com/office/drawing/2014/main" id="{E97C372E-A2C5-4B3C-AF67-B57424820D79}"/>
+                <a16:creationId xmlns:a16="http://schemas.microsoft.com/office/drawing/2014/main" id="{B70BEEAE-A228-400C-96A4-81EA4932A2B3}"/>
               </a:ext>
             </a:extLst>
           </p:cNvPr>
@@ -24993,7 +24993,7 @@
           <p:cNvPr id="9" name="Extra handel">
             <a:extLst xmlns:a="http://schemas.openxmlformats.org/drawingml/2006/main">
               <a:ext uri="{FF2B5EF4-FFF2-40B4-BE49-F238E27FC236}">
-                <a16:creationId xmlns:a16="http://schemas.microsoft.com/office/drawing/2014/main" id="{6ECDCCD5-B101-4D63-9302-AA446CFE82B6}"/>
+                <a16:creationId xmlns:a16="http://schemas.microsoft.com/office/drawing/2014/main" id="{72949951-2C88-470B-8854-D7D0A3C6FD7D}"/>
               </a:ext>
             </a:extLst>
           </p:cNvPr>
@@ -25050,7 +25050,7 @@
           <p:cNvPr id="10" name="Betalingsbereidheid met MK vergelijken.">
             <a:extLst xmlns:a="http://schemas.openxmlformats.org/drawingml/2006/main">
               <a:ext uri="{FF2B5EF4-FFF2-40B4-BE49-F238E27FC236}">
-                <a16:creationId xmlns:a16="http://schemas.microsoft.com/office/drawing/2014/main" id="{C0EEF508-E0D9-484C-B16D-CC729A0A0B08}"/>
+                <a16:creationId xmlns:a16="http://schemas.microsoft.com/office/drawing/2014/main" id="{B6FA6DE1-0016-4A34-90DC-B8BB798D8BEE}"/>
               </a:ext>
             </a:extLst>
           </p:cNvPr>
@@ -25107,7 +25107,7 @@
           <p:cNvPr id="11" name="Betekenis">
             <a:extLst xmlns:a="http://schemas.openxmlformats.org/drawingml/2006/main">
               <a:ext uri="{FF2B5EF4-FFF2-40B4-BE49-F238E27FC236}">
-                <a16:creationId xmlns:a16="http://schemas.microsoft.com/office/drawing/2014/main" id="{F2E4644D-7E48-4CB8-8E7B-5508A11CE2C6}"/>
+                <a16:creationId xmlns:a16="http://schemas.microsoft.com/office/drawing/2014/main" id="{5236AA52-B532-4676-ACAA-B8EE997E0332}"/>
               </a:ext>
             </a:extLst>
           </p:cNvPr>
@@ -25164,7 +25164,7 @@
           <p:cNvPr id="12" name="Maximaal TS onderscheiden van een eerlijke verdeling.">
             <a:extLst xmlns:a="http://schemas.openxmlformats.org/drawingml/2006/main">
               <a:ext uri="{FF2B5EF4-FFF2-40B4-BE49-F238E27FC236}">
-                <a16:creationId xmlns:a16="http://schemas.microsoft.com/office/drawing/2014/main" id="{26099D8E-A3AF-459F-AA7C-1C941B73D4B2}"/>
+                <a16:creationId xmlns:a16="http://schemas.microsoft.com/office/drawing/2014/main" id="{C46DE8D0-7E17-42BC-AD74-E1D67F74EA59}"/>
               </a:ext>
             </a:extLst>
           </p:cNvPr>
@@ -25219,7 +25219,7 @@
     </p:spTree>
     <p:extLst>
       <p:ext uri="{BB962C8B-B14F-4D97-AF65-F5344CB8AC3E}">
-        <p14:creationId xmlns:p14="http://schemas.microsoft.com/office/powerpoint/2010/main" val="723785034"/>
+        <p14:creationId xmlns:p14="http://schemas.microsoft.com/office/powerpoint/2010/main" val="1473022585"/>
       </p:ext>
     </p:extLst>
   </p:cSld>
@@ -25250,7 +25250,7 @@
           <p:cNvPr id="9" name="Opgave 8 · Vragen d–e">
             <a:extLst xmlns:a="http://schemas.openxmlformats.org/drawingml/2006/main">
               <a:ext uri="{FF2B5EF4-FFF2-40B4-BE49-F238E27FC236}">
-                <a16:creationId xmlns:a16="http://schemas.microsoft.com/office/drawing/2014/main" id="{C1931C57-BE1B-4487-A7FD-975C828B08A5}"/>
+                <a16:creationId xmlns:a16="http://schemas.microsoft.com/office/drawing/2014/main" id="{CD0CF66C-87CA-4C5F-80C9-5424B503459A}"/>
               </a:ext>
             </a:extLst>
           </p:cNvPr>
@@ -25307,7 +25307,7 @@
           <p:cNvPr id="2" name="">
             <a:extLst xmlns:a="http://schemas.openxmlformats.org/drawingml/2006/main">
               <a:ext uri="{FF2B5EF4-FFF2-40B4-BE49-F238E27FC236}">
-                <a16:creationId xmlns:a16="http://schemas.microsoft.com/office/drawing/2014/main" id="{52899FFD-6532-4BD7-B8EE-EF9DA047E76C}"/>
+                <a16:creationId xmlns:a16="http://schemas.microsoft.com/office/drawing/2014/main" id="{64D77834-92B6-4585-B9F5-C0BB1D8CA10B}"/>
               </a:ext>
             </a:extLst>
           </p:cNvPr>
@@ -25333,10 +25333,10 @@
       </p:sp>
       <p:sp>
         <p:nvSpPr>
-          <p:cNvPr id="3" name="§2.3.2 · Doelopgave 8 · Boekpagina 88–89">
+          <p:cNvPr id="3" name="§2.3.2 · Doelopgave 8 · Boekpagina 89–90">
             <a:extLst xmlns:a="http://schemas.openxmlformats.org/drawingml/2006/main">
               <a:ext uri="{FF2B5EF4-FFF2-40B4-BE49-F238E27FC236}">
-                <a16:creationId xmlns:a16="http://schemas.microsoft.com/office/drawing/2014/main" id="{6C9B4C29-1661-4ECB-9B50-B366FC2CFD3E}"/>
+                <a16:creationId xmlns:a16="http://schemas.microsoft.com/office/drawing/2014/main" id="{2CCD7905-CD02-4EF1-A03A-6EE323AF62CE}"/>
               </a:ext>
             </a:extLst>
           </p:cNvPr>
@@ -25383,7 +25383,7 @@
                 <a:ea typeface="Arial"/>
                 <a:cs typeface="Arial"/>
               </a:rPr>
-              <a:t>§2.3.2 · Doelopgave 8 · Boekpagina 88–89</a:t>
+              <a:t>§2.3.2 · Doelopgave 8 · Boekpagina 89–90</a:t>
             </a:r>
           </a:p>
         </p:txBody>
@@ -25393,7 +25393,7 @@
           <p:cNvPr id="4" name="20">
             <a:extLst xmlns:a="http://schemas.openxmlformats.org/drawingml/2006/main">
               <a:ext uri="{FF2B5EF4-FFF2-40B4-BE49-F238E27FC236}">
-                <a16:creationId xmlns:a16="http://schemas.microsoft.com/office/drawing/2014/main" id="{5FDF9ABD-F676-4B17-93FD-2C9B165D1FA6}"/>
+                <a16:creationId xmlns:a16="http://schemas.microsoft.com/office/drawing/2014/main" id="{0B65CE85-B1CD-4004-BC81-DCF36CD367FA}"/>
               </a:ext>
             </a:extLst>
           </p:cNvPr>
@@ -25450,7 +25450,7 @@
           <p:cNvPr id="5" name="d)">
             <a:extLst xmlns:a="http://schemas.openxmlformats.org/drawingml/2006/main">
               <a:ext uri="{FF2B5EF4-FFF2-40B4-BE49-F238E27FC236}">
-                <a16:creationId xmlns:a16="http://schemas.microsoft.com/office/drawing/2014/main" id="{2318232D-7862-4D1D-8320-FE0A76AC213A}"/>
+                <a16:creationId xmlns:a16="http://schemas.microsoft.com/office/drawing/2014/main" id="{EAD8739C-5B47-42E4-8488-AB115460BF41}"/>
               </a:ext>
             </a:extLst>
           </p:cNvPr>
@@ -25507,7 +25507,7 @@
           <p:cNvPr id="6" name="Vergelijk met de tabel bij Q = 50 en Q = 70 de betalingsbereidheid met">
             <a:extLst xmlns:a="http://schemas.openxmlformats.org/drawingml/2006/main">
               <a:ext uri="{FF2B5EF4-FFF2-40B4-BE49-F238E27FC236}">
-                <a16:creationId xmlns:a16="http://schemas.microsoft.com/office/drawing/2014/main" id="{C36AF784-2FEC-4BF6-9393-D4A8781D3164}"/>
+                <a16:creationId xmlns:a16="http://schemas.microsoft.com/office/drawing/2014/main" id="{C6581364-2EBB-4895-904A-9A889262962C}"/>
               </a:ext>
             </a:extLst>
           </p:cNvPr>
@@ -25564,7 +25564,7 @@
           <p:cNvPr id="7" name="e)">
             <a:extLst xmlns:a="http://schemas.openxmlformats.org/drawingml/2006/main">
               <a:ext uri="{FF2B5EF4-FFF2-40B4-BE49-F238E27FC236}">
-                <a16:creationId xmlns:a16="http://schemas.microsoft.com/office/drawing/2014/main" id="{CADBA2FA-A8EE-470D-A5E3-EC7CFC4D2932}"/>
+                <a16:creationId xmlns:a16="http://schemas.microsoft.com/office/drawing/2014/main" id="{637C0054-0A16-4423-B592-F3D8630CAF80}"/>
               </a:ext>
             </a:extLst>
           </p:cNvPr>
@@ -25621,7 +25621,7 @@
           <p:cNvPr id="8" name="Leg uit waarom TS in dit model maximaal is bij Q = 60 en waarom dit ge">
             <a:extLst xmlns:a="http://schemas.openxmlformats.org/drawingml/2006/main">
               <a:ext uri="{FF2B5EF4-FFF2-40B4-BE49-F238E27FC236}">
-                <a16:creationId xmlns:a16="http://schemas.microsoft.com/office/drawing/2014/main" id="{76270EFF-0051-4BB0-82B6-86C13FDEC356}"/>
+                <a16:creationId xmlns:a16="http://schemas.microsoft.com/office/drawing/2014/main" id="{B0935699-814C-48B3-9C79-6FD903D4B27D}"/>
               </a:ext>
             </a:extLst>
           </p:cNvPr>
@@ -25676,7 +25676,7 @@
     </p:spTree>
     <p:extLst>
       <p:ext uri="{BB962C8B-B14F-4D97-AF65-F5344CB8AC3E}">
-        <p14:creationId xmlns:p14="http://schemas.microsoft.com/office/powerpoint/2010/main" val="1536152851"/>
+        <p14:creationId xmlns:p14="http://schemas.microsoft.com/office/powerpoint/2010/main" val="1083555929"/>
       </p:ext>
     </p:extLst>
   </p:cSld>
@@ -25707,7 +25707,7 @@
           <p:cNvPr id="12" name="Opgave 8a · Evenwicht">
             <a:extLst xmlns:a="http://schemas.openxmlformats.org/drawingml/2006/main">
               <a:ext uri="{FF2B5EF4-FFF2-40B4-BE49-F238E27FC236}">
-                <a16:creationId xmlns:a16="http://schemas.microsoft.com/office/drawing/2014/main" id="{244689DC-A56E-43E6-A044-D132798EF2A7}"/>
+                <a16:creationId xmlns:a16="http://schemas.microsoft.com/office/drawing/2014/main" id="{3CA6F5E1-F267-4497-B33F-2F7EF685C1BB}"/>
               </a:ext>
             </a:extLst>
           </p:cNvPr>
@@ -25764,7 +25764,7 @@
           <p:cNvPr id="2" name="">
             <a:extLst xmlns:a="http://schemas.openxmlformats.org/drawingml/2006/main">
               <a:ext uri="{FF2B5EF4-FFF2-40B4-BE49-F238E27FC236}">
-                <a16:creationId xmlns:a16="http://schemas.microsoft.com/office/drawing/2014/main" id="{FDFA1D79-1EAB-4615-8FFE-881A561DE798}"/>
+                <a16:creationId xmlns:a16="http://schemas.microsoft.com/office/drawing/2014/main" id="{EE5DE58D-72AE-40F0-9B65-85845FC09D86}"/>
               </a:ext>
             </a:extLst>
           </p:cNvPr>
@@ -25790,10 +25790,10 @@
       </p:sp>
       <p:sp>
         <p:nvSpPr>
-          <p:cNvPr id="3" name="§2.3.2 · Doelopgave 8 · Boekpagina 88–89">
+          <p:cNvPr id="3" name="§2.3.2 · Doelopgave 8 · Boekpagina 89–90">
             <a:extLst xmlns:a="http://schemas.openxmlformats.org/drawingml/2006/main">
               <a:ext uri="{FF2B5EF4-FFF2-40B4-BE49-F238E27FC236}">
-                <a16:creationId xmlns:a16="http://schemas.microsoft.com/office/drawing/2014/main" id="{19EAFE40-23EF-47A3-97F8-800C170A4719}"/>
+                <a16:creationId xmlns:a16="http://schemas.microsoft.com/office/drawing/2014/main" id="{15BF4257-8F60-459D-A6EA-6D942F6ED3DD}"/>
               </a:ext>
             </a:extLst>
           </p:cNvPr>
@@ -25840,7 +25840,7 @@
                 <a:ea typeface="Arial"/>
                 <a:cs typeface="Arial"/>
               </a:rPr>
-              <a:t>§2.3.2 · Doelopgave 8 · Boekpagina 88–89</a:t>
+              <a:t>§2.3.2 · Doelopgave 8 · Boekpagina 89–90</a:t>
             </a:r>
           </a:p>
         </p:txBody>
@@ -25850,7 +25850,7 @@
           <p:cNvPr id="4" name="21">
             <a:extLst xmlns:a="http://schemas.openxmlformats.org/drawingml/2006/main">
               <a:ext uri="{FF2B5EF4-FFF2-40B4-BE49-F238E27FC236}">
-                <a16:creationId xmlns:a16="http://schemas.microsoft.com/office/drawing/2014/main" id="{00F91190-17D4-4480-A3B4-52BC933FFFA9}"/>
+                <a16:creationId xmlns:a16="http://schemas.microsoft.com/office/drawing/2014/main" id="{056DBBC5-6D7F-4461-B1CA-E352ADC78A38}"/>
               </a:ext>
             </a:extLst>
           </p:cNvPr>
@@ -25907,7 +25907,7 @@
           <p:cNvPr id="5" name="Gelijkstellen">
             <a:extLst xmlns:a="http://schemas.openxmlformats.org/drawingml/2006/main">
               <a:ext uri="{FF2B5EF4-FFF2-40B4-BE49-F238E27FC236}">
-                <a16:creationId xmlns:a16="http://schemas.microsoft.com/office/drawing/2014/main" id="{62803B1F-6A97-4C16-8792-DB34B4203D96}"/>
+                <a16:creationId xmlns:a16="http://schemas.microsoft.com/office/drawing/2014/main" id="{38900D1B-99FF-4629-8F94-19BCA71D473D}"/>
               </a:ext>
             </a:extLst>
           </p:cNvPr>
@@ -25964,7 +25964,7 @@
           <p:cNvPr id="6" name="50 − 0,5Q = 5 + 0,25Q">
             <a:extLst xmlns:a="http://schemas.openxmlformats.org/drawingml/2006/main">
               <a:ext uri="{FF2B5EF4-FFF2-40B4-BE49-F238E27FC236}">
-                <a16:creationId xmlns:a16="http://schemas.microsoft.com/office/drawing/2014/main" id="{DA057AE5-86E9-4C8F-9538-28D83C47A724}"/>
+                <a16:creationId xmlns:a16="http://schemas.microsoft.com/office/drawing/2014/main" id="{CCD64E85-B7CA-4B06-96E7-F0CED59229C9}"/>
               </a:ext>
             </a:extLst>
           </p:cNvPr>
@@ -26021,7 +26021,7 @@
           <p:cNvPr id="7" name="Hoeveelheid">
             <a:extLst xmlns:a="http://schemas.openxmlformats.org/drawingml/2006/main">
               <a:ext uri="{FF2B5EF4-FFF2-40B4-BE49-F238E27FC236}">
-                <a16:creationId xmlns:a16="http://schemas.microsoft.com/office/drawing/2014/main" id="{C49F2FCF-5DFD-4C38-AE20-0B185B1C7F4C}"/>
+                <a16:creationId xmlns:a16="http://schemas.microsoft.com/office/drawing/2014/main" id="{B974D8B7-9E93-4AC1-82C6-492BFFD12C8E}"/>
               </a:ext>
             </a:extLst>
           </p:cNvPr>
@@ -26078,7 +26078,7 @@
           <p:cNvPr id="8" name="45 = 0,75Q&#10;Qe = 60 kaartjes">
             <a:extLst xmlns:a="http://schemas.openxmlformats.org/drawingml/2006/main">
               <a:ext uri="{FF2B5EF4-FFF2-40B4-BE49-F238E27FC236}">
-                <a16:creationId xmlns:a16="http://schemas.microsoft.com/office/drawing/2014/main" id="{AE699100-FD04-4BE5-998F-D8E5AEC2E44B}"/>
+                <a16:creationId xmlns:a16="http://schemas.microsoft.com/office/drawing/2014/main" id="{0FA0A32A-D691-4CCF-B9BE-A461A64BC85C}"/>
               </a:ext>
             </a:extLst>
           </p:cNvPr>
@@ -26158,7 +26158,7 @@
           <p:cNvPr id="9" name="Prijs">
             <a:extLst xmlns:a="http://schemas.openxmlformats.org/drawingml/2006/main">
               <a:ext uri="{FF2B5EF4-FFF2-40B4-BE49-F238E27FC236}">
-                <a16:creationId xmlns:a16="http://schemas.microsoft.com/office/drawing/2014/main" id="{439DEA6F-E177-4127-9897-929DF3F9E578}"/>
+                <a16:creationId xmlns:a16="http://schemas.microsoft.com/office/drawing/2014/main" id="{DD277085-1276-4A6A-B775-04095E1156A6}"/>
               </a:ext>
             </a:extLst>
           </p:cNvPr>
@@ -26215,7 +26215,7 @@
           <p:cNvPr id="10" name="Pe = 50 − 0,5 × 60&#10;Pe = € 20 per kaartje">
             <a:extLst xmlns:a="http://schemas.openxmlformats.org/drawingml/2006/main">
               <a:ext uri="{FF2B5EF4-FFF2-40B4-BE49-F238E27FC236}">
-                <a16:creationId xmlns:a16="http://schemas.microsoft.com/office/drawing/2014/main" id="{D40B346A-5265-421F-B723-592EE3F4C851}"/>
+                <a16:creationId xmlns:a16="http://schemas.microsoft.com/office/drawing/2014/main" id="{B376D518-1248-4263-8503-058EF9D10B6A}"/>
               </a:ext>
             </a:extLst>
           </p:cNvPr>
@@ -26295,7 +26295,7 @@
           <p:cNvPr id="11" name="Controle: 5 + 0,25 × 60 = € 20 per kaartje">
             <a:extLst xmlns:a="http://schemas.openxmlformats.org/drawingml/2006/main">
               <a:ext uri="{FF2B5EF4-FFF2-40B4-BE49-F238E27FC236}">
-                <a16:creationId xmlns:a16="http://schemas.microsoft.com/office/drawing/2014/main" id="{CECE1831-C2BB-4885-97FA-ECF934417F4E}"/>
+                <a16:creationId xmlns:a16="http://schemas.microsoft.com/office/drawing/2014/main" id="{D4059612-43A5-49A7-BEC0-1E72E7CF9585}"/>
               </a:ext>
             </a:extLst>
           </p:cNvPr>
@@ -26350,7 +26350,7 @@
     </p:spTree>
     <p:extLst>
       <p:ext uri="{BB962C8B-B14F-4D97-AF65-F5344CB8AC3E}">
-        <p14:creationId xmlns:p14="http://schemas.microsoft.com/office/powerpoint/2010/main" val="159776179"/>
+        <p14:creationId xmlns:p14="http://schemas.microsoft.com/office/powerpoint/2010/main" val="1539271812"/>
       </p:ext>
     </p:extLst>
   </p:cSld>
@@ -26381,7 +26381,7 @@
           <p:cNvPr id="10" name="Opgave 8b · Evenwicht en surplusgebieden">
             <a:extLst xmlns:a="http://schemas.openxmlformats.org/drawingml/2006/main">
               <a:ext uri="{FF2B5EF4-FFF2-40B4-BE49-F238E27FC236}">
-                <a16:creationId xmlns:a16="http://schemas.microsoft.com/office/drawing/2014/main" id="{0B9B5EFA-10DD-403B-8A8F-3B2896B20987}"/>
+                <a16:creationId xmlns:a16="http://schemas.microsoft.com/office/drawing/2014/main" id="{42995B78-41B1-46F1-A740-EC65C5A32511}"/>
               </a:ext>
             </a:extLst>
           </p:cNvPr>
@@ -26438,7 +26438,7 @@
           <p:cNvPr id="2" name="">
             <a:extLst xmlns:a="http://schemas.openxmlformats.org/drawingml/2006/main">
               <a:ext uri="{FF2B5EF4-FFF2-40B4-BE49-F238E27FC236}">
-                <a16:creationId xmlns:a16="http://schemas.microsoft.com/office/drawing/2014/main" id="{5F5C8295-944D-4578-95B0-0AAB4B27D199}"/>
+                <a16:creationId xmlns:a16="http://schemas.microsoft.com/office/drawing/2014/main" id="{76DE6BDA-2CB9-4CF6-B69F-EE0B3E2803EA}"/>
               </a:ext>
             </a:extLst>
           </p:cNvPr>
@@ -26464,10 +26464,10 @@
       </p:sp>
       <p:sp>
         <p:nvSpPr>
-          <p:cNvPr id="3" name="§2.3.2 · Doelopgave 8 · Boekpagina 88–89">
+          <p:cNvPr id="3" name="§2.3.2 · Doelopgave 8 · Boekpagina 89–90">
             <a:extLst xmlns:a="http://schemas.openxmlformats.org/drawingml/2006/main">
               <a:ext uri="{FF2B5EF4-FFF2-40B4-BE49-F238E27FC236}">
-                <a16:creationId xmlns:a16="http://schemas.microsoft.com/office/drawing/2014/main" id="{56B51699-873D-4E52-B4BB-6A0A43FC1904}"/>
+                <a16:creationId xmlns:a16="http://schemas.microsoft.com/office/drawing/2014/main" id="{DD406430-7DD0-41E1-B4D5-D4E2B27B59EE}"/>
               </a:ext>
             </a:extLst>
           </p:cNvPr>
@@ -26514,7 +26514,7 @@
                 <a:ea typeface="Arial"/>
                 <a:cs typeface="Arial"/>
               </a:rPr>
-              <a:t>§2.3.2 · Doelopgave 8 · Boekpagina 88–89</a:t>
+              <a:t>§2.3.2 · Doelopgave 8 · Boekpagina 89–90</a:t>
             </a:r>
           </a:p>
         </p:txBody>
@@ -26524,7 +26524,7 @@
           <p:cNvPr id="4" name="22">
             <a:extLst xmlns:a="http://schemas.openxmlformats.org/drawingml/2006/main">
               <a:ext uri="{FF2B5EF4-FFF2-40B4-BE49-F238E27FC236}">
-                <a16:creationId xmlns:a16="http://schemas.microsoft.com/office/drawing/2014/main" id="{F1DB23D1-B790-4C11-90A1-D47DAE6869E5}"/>
+                <a16:creationId xmlns:a16="http://schemas.microsoft.com/office/drawing/2014/main" id="{2B53D14B-F59F-4A55-B050-9F1D2945C429}"/>
               </a:ext>
             </a:extLst>
           </p:cNvPr>
@@ -26588,7 +26588,7 @@
         </p:xfrm>
         <a:graphic xmlns:a="http://schemas.openxmlformats.org/drawingml/2006/main">
           <a:graphicData uri="http://schemas.openxmlformats.org/drawingml/2006/chart">
-            <c:chart xmlns:r="http://schemas.openxmlformats.org/officeDocument/2006/relationships" xmlns:c="http://schemas.openxmlformats.org/drawingml/2006/chart" r:id="R2414f7554d774a44"/>
+            <c:chart xmlns:r="http://schemas.openxmlformats.org/officeDocument/2006/relationships" xmlns:c="http://schemas.openxmlformats.org/drawingml/2006/chart" r:id="Rb40f4f5284264f29"/>
           </a:graphicData>
         </a:graphic>
       </p:graphicFrame>
@@ -26597,7 +26597,7 @@
           <p:cNvPr id="6" name="E = (60; 20)">
             <a:extLst xmlns:a="http://schemas.openxmlformats.org/drawingml/2006/main">
               <a:ext uri="{FF2B5EF4-FFF2-40B4-BE49-F238E27FC236}">
-                <a16:creationId xmlns:a16="http://schemas.microsoft.com/office/drawing/2014/main" id="{8DCD0A74-427D-453A-B732-48F655E63509}"/>
+                <a16:creationId xmlns:a16="http://schemas.microsoft.com/office/drawing/2014/main" id="{D90E2853-A346-4530-BFD5-FEC719D36486}"/>
               </a:ext>
             </a:extLst>
           </p:cNvPr>
@@ -26654,7 +26654,7 @@
           <p:cNvPr id="7" name="CS&#10;Boven P = 20&#10;en onder V">
             <a:extLst xmlns:a="http://schemas.openxmlformats.org/drawingml/2006/main">
               <a:ext uri="{FF2B5EF4-FFF2-40B4-BE49-F238E27FC236}">
-                <a16:creationId xmlns:a16="http://schemas.microsoft.com/office/drawing/2014/main" id="{879BBCB2-7316-4EA4-9AFD-3FB27E1719D1}"/>
+                <a16:creationId xmlns:a16="http://schemas.microsoft.com/office/drawing/2014/main" id="{B842337F-DFE1-440F-BAF4-E41A0421FDDA}"/>
               </a:ext>
             </a:extLst>
           </p:cNvPr>
@@ -26757,7 +26757,7 @@
           <p:cNvPr id="8" name="PS&#10;Onder P = 20&#10;en boven A = MK">
             <a:extLst xmlns:a="http://schemas.openxmlformats.org/drawingml/2006/main">
               <a:ext uri="{FF2B5EF4-FFF2-40B4-BE49-F238E27FC236}">
-                <a16:creationId xmlns:a16="http://schemas.microsoft.com/office/drawing/2014/main" id="{3339D2E3-EDB8-456D-B7C5-6C9474DF3651}"/>
+                <a16:creationId xmlns:a16="http://schemas.microsoft.com/office/drawing/2014/main" id="{B3689B41-ED3C-485D-8520-92901440D9AC}"/>
               </a:ext>
             </a:extLst>
           </p:cNvPr>
@@ -26860,7 +26860,7 @@
           <p:cNvPr id="9" name="Beide tot Q = 60.">
             <a:extLst xmlns:a="http://schemas.openxmlformats.org/drawingml/2006/main">
               <a:ext uri="{FF2B5EF4-FFF2-40B4-BE49-F238E27FC236}">
-                <a16:creationId xmlns:a16="http://schemas.microsoft.com/office/drawing/2014/main" id="{01E1A8DE-C143-43C7-818E-49B031EBF883}"/>
+                <a16:creationId xmlns:a16="http://schemas.microsoft.com/office/drawing/2014/main" id="{92AF6749-B353-4B11-879A-202075AEB776}"/>
               </a:ext>
             </a:extLst>
           </p:cNvPr>
@@ -26915,7 +26915,7 @@
     </p:spTree>
     <p:extLst>
       <p:ext uri="{BB962C8B-B14F-4D97-AF65-F5344CB8AC3E}">
-        <p14:creationId xmlns:p14="http://schemas.microsoft.com/office/powerpoint/2010/main" val="1424702733"/>
+        <p14:creationId xmlns:p14="http://schemas.microsoft.com/office/powerpoint/2010/main" val="1263811488"/>
       </p:ext>
     </p:extLst>
   </p:cSld>
@@ -26946,7 +26946,7 @@
           <p:cNvPr id="12" name="Opgave 8c · Consumentensurplus">
             <a:extLst xmlns:a="http://schemas.openxmlformats.org/drawingml/2006/main">
               <a:ext uri="{FF2B5EF4-FFF2-40B4-BE49-F238E27FC236}">
-                <a16:creationId xmlns:a16="http://schemas.microsoft.com/office/drawing/2014/main" id="{7FE005C6-5949-4A12-AC7F-91071A14B30A}"/>
+                <a16:creationId xmlns:a16="http://schemas.microsoft.com/office/drawing/2014/main" id="{6B1C207C-D05B-47CC-B67F-C6168147598E}"/>
               </a:ext>
             </a:extLst>
           </p:cNvPr>
@@ -27003,7 +27003,7 @@
           <p:cNvPr id="2" name="">
             <a:extLst xmlns:a="http://schemas.openxmlformats.org/drawingml/2006/main">
               <a:ext uri="{FF2B5EF4-FFF2-40B4-BE49-F238E27FC236}">
-                <a16:creationId xmlns:a16="http://schemas.microsoft.com/office/drawing/2014/main" id="{4181EE2E-E842-4550-AAC0-0A181254F994}"/>
+                <a16:creationId xmlns:a16="http://schemas.microsoft.com/office/drawing/2014/main" id="{BB2110A8-5191-4535-86EC-CDE23F7A0B3A}"/>
               </a:ext>
             </a:extLst>
           </p:cNvPr>
@@ -27029,10 +27029,10 @@
       </p:sp>
       <p:sp>
         <p:nvSpPr>
-          <p:cNvPr id="3" name="§2.3.2 · Doelopgave 8 · Boekpagina 88–89">
+          <p:cNvPr id="3" name="§2.3.2 · Doelopgave 8 · Boekpagina 89–90">
             <a:extLst xmlns:a="http://schemas.openxmlformats.org/drawingml/2006/main">
               <a:ext uri="{FF2B5EF4-FFF2-40B4-BE49-F238E27FC236}">
-                <a16:creationId xmlns:a16="http://schemas.microsoft.com/office/drawing/2014/main" id="{2B61B31E-8BB4-42B6-BE1E-A03F2FEC174D}"/>
+                <a16:creationId xmlns:a16="http://schemas.microsoft.com/office/drawing/2014/main" id="{AC109F04-E0A7-4C07-822D-F1067BC5AEE1}"/>
               </a:ext>
             </a:extLst>
           </p:cNvPr>
@@ -27079,7 +27079,7 @@
                 <a:ea typeface="Arial"/>
                 <a:cs typeface="Arial"/>
               </a:rPr>
-              <a:t>§2.3.2 · Doelopgave 8 · Boekpagina 88–89</a:t>
+              <a:t>§2.3.2 · Doelopgave 8 · Boekpagina 89–90</a:t>
             </a:r>
           </a:p>
         </p:txBody>
@@ -27089,7 +27089,7 @@
           <p:cNvPr id="4" name="23">
             <a:extLst xmlns:a="http://schemas.openxmlformats.org/drawingml/2006/main">
               <a:ext uri="{FF2B5EF4-FFF2-40B4-BE49-F238E27FC236}">
-                <a16:creationId xmlns:a16="http://schemas.microsoft.com/office/drawing/2014/main" id="{FA457DED-F3D7-42FA-B963-C5AE2F66F963}"/>
+                <a16:creationId xmlns:a16="http://schemas.microsoft.com/office/drawing/2014/main" id="{C5C7F850-424B-42DA-B36A-DB2B94215337}"/>
               </a:ext>
             </a:extLst>
           </p:cNvPr>
@@ -27146,7 +27146,7 @@
           <p:cNvPr id="5" name="Basis">
             <a:extLst xmlns:a="http://schemas.openxmlformats.org/drawingml/2006/main">
               <a:ext uri="{FF2B5EF4-FFF2-40B4-BE49-F238E27FC236}">
-                <a16:creationId xmlns:a16="http://schemas.microsoft.com/office/drawing/2014/main" id="{CD406AD4-D0C6-421D-9C09-18023447A92F}"/>
+                <a16:creationId xmlns:a16="http://schemas.microsoft.com/office/drawing/2014/main" id="{BCD5E4C3-63A2-48E5-94F6-9A59A0629F96}"/>
               </a:ext>
             </a:extLst>
           </p:cNvPr>
@@ -27203,7 +27203,7 @@
           <p:cNvPr id="6" name="60 kaartjes">
             <a:extLst xmlns:a="http://schemas.openxmlformats.org/drawingml/2006/main">
               <a:ext uri="{FF2B5EF4-FFF2-40B4-BE49-F238E27FC236}">
-                <a16:creationId xmlns:a16="http://schemas.microsoft.com/office/drawing/2014/main" id="{F3238D4A-F3AB-4906-8F74-CF14E7654371}"/>
+                <a16:creationId xmlns:a16="http://schemas.microsoft.com/office/drawing/2014/main" id="{84386890-35F4-4CD3-978B-5B0B794B65E2}"/>
               </a:ext>
             </a:extLst>
           </p:cNvPr>
@@ -27260,7 +27260,7 @@
           <p:cNvPr id="7" name="Hoogte">
             <a:extLst xmlns:a="http://schemas.openxmlformats.org/drawingml/2006/main">
               <a:ext uri="{FF2B5EF4-FFF2-40B4-BE49-F238E27FC236}">
-                <a16:creationId xmlns:a16="http://schemas.microsoft.com/office/drawing/2014/main" id="{3507D38C-E60E-4165-AC19-57AEE1CF23F8}"/>
+                <a16:creationId xmlns:a16="http://schemas.microsoft.com/office/drawing/2014/main" id="{5AC73706-5AC9-4D08-8467-1AE94DABF576}"/>
               </a:ext>
             </a:extLst>
           </p:cNvPr>
@@ -27317,7 +27317,7 @@
           <p:cNvPr id="8" name="50 − 20 = € 30 per kaartje">
             <a:extLst xmlns:a="http://schemas.openxmlformats.org/drawingml/2006/main">
               <a:ext uri="{FF2B5EF4-FFF2-40B4-BE49-F238E27FC236}">
-                <a16:creationId xmlns:a16="http://schemas.microsoft.com/office/drawing/2014/main" id="{FF6F2A48-0A53-47C8-8252-CDD0984921AB}"/>
+                <a16:creationId xmlns:a16="http://schemas.microsoft.com/office/drawing/2014/main" id="{68035435-ED67-47D5-A396-01825A6CE945}"/>
               </a:ext>
             </a:extLst>
           </p:cNvPr>
@@ -27374,7 +27374,7 @@
           <p:cNvPr id="9" name="Berekening">
             <a:extLst xmlns:a="http://schemas.openxmlformats.org/drawingml/2006/main">
               <a:ext uri="{FF2B5EF4-FFF2-40B4-BE49-F238E27FC236}">
-                <a16:creationId xmlns:a16="http://schemas.microsoft.com/office/drawing/2014/main" id="{933685E2-0C24-452D-9FFD-C850D1B77927}"/>
+                <a16:creationId xmlns:a16="http://schemas.microsoft.com/office/drawing/2014/main" id="{2773B3C4-7EBA-4188-A454-CFC7749CE176}"/>
               </a:ext>
             </a:extLst>
           </p:cNvPr>
@@ -27431,7 +27431,7 @@
           <p:cNvPr id="10" name="CS = ½ × 60 × 30 = € 900">
             <a:extLst xmlns:a="http://schemas.openxmlformats.org/drawingml/2006/main">
               <a:ext uri="{FF2B5EF4-FFF2-40B4-BE49-F238E27FC236}">
-                <a16:creationId xmlns:a16="http://schemas.microsoft.com/office/drawing/2014/main" id="{6768EF8D-286C-4486-B896-54FF35A2CDEF}"/>
+                <a16:creationId xmlns:a16="http://schemas.microsoft.com/office/drawing/2014/main" id="{1891703C-0E48-43B2-BA68-5C9EA42F7DB0}"/>
               </a:ext>
             </a:extLst>
           </p:cNvPr>
@@ -27488,7 +27488,7 @@
           <p:cNvPr id="11" name="Kopers hebben samen € 900 meer over dan ze betalen.">
             <a:extLst xmlns:a="http://schemas.openxmlformats.org/drawingml/2006/main">
               <a:ext uri="{FF2B5EF4-FFF2-40B4-BE49-F238E27FC236}">
-                <a16:creationId xmlns:a16="http://schemas.microsoft.com/office/drawing/2014/main" id="{0B1B5CF3-8F3A-43DE-801B-175CB1F227A2}"/>
+                <a16:creationId xmlns:a16="http://schemas.microsoft.com/office/drawing/2014/main" id="{CE15C56E-0F2E-4D99-BEF2-9DF78868FBFD}"/>
               </a:ext>
             </a:extLst>
           </p:cNvPr>
@@ -27543,7 +27543,7 @@
     </p:spTree>
     <p:extLst>
       <p:ext uri="{BB962C8B-B14F-4D97-AF65-F5344CB8AC3E}">
-        <p14:creationId xmlns:p14="http://schemas.microsoft.com/office/powerpoint/2010/main" val="658918388"/>
+        <p14:creationId xmlns:p14="http://schemas.microsoft.com/office/powerpoint/2010/main" val="848916804"/>
       </p:ext>
     </p:extLst>
   </p:cSld>
@@ -27574,7 +27574,7 @@
           <p:cNvPr id="13" name="Opgave 8c · Producentensurplus en totaal">
             <a:extLst xmlns:a="http://schemas.openxmlformats.org/drawingml/2006/main">
               <a:ext uri="{FF2B5EF4-FFF2-40B4-BE49-F238E27FC236}">
-                <a16:creationId xmlns:a16="http://schemas.microsoft.com/office/drawing/2014/main" id="{0508EE7D-EF6B-4B84-B2F6-60782D07B15F}"/>
+                <a16:creationId xmlns:a16="http://schemas.microsoft.com/office/drawing/2014/main" id="{142D173B-7EF7-42C7-8C9F-4C4866A69B0F}"/>
               </a:ext>
             </a:extLst>
           </p:cNvPr>
@@ -27631,7 +27631,7 @@
           <p:cNvPr id="2" name="">
             <a:extLst xmlns:a="http://schemas.openxmlformats.org/drawingml/2006/main">
               <a:ext uri="{FF2B5EF4-FFF2-40B4-BE49-F238E27FC236}">
-                <a16:creationId xmlns:a16="http://schemas.microsoft.com/office/drawing/2014/main" id="{9C89340E-1373-4EC6-A591-DAA270848302}"/>
+                <a16:creationId xmlns:a16="http://schemas.microsoft.com/office/drawing/2014/main" id="{B59BFABD-9CB6-42B6-8EB2-A580BBE1218C}"/>
               </a:ext>
             </a:extLst>
           </p:cNvPr>
@@ -27657,10 +27657,10 @@
       </p:sp>
       <p:sp>
         <p:nvSpPr>
-          <p:cNvPr id="3" name="§2.3.2 · Doelopgave 8 · Boekpagina 88–89">
+          <p:cNvPr id="3" name="§2.3.2 · Doelopgave 8 · Boekpagina 89–90">
             <a:extLst xmlns:a="http://schemas.openxmlformats.org/drawingml/2006/main">
               <a:ext uri="{FF2B5EF4-FFF2-40B4-BE49-F238E27FC236}">
-                <a16:creationId xmlns:a16="http://schemas.microsoft.com/office/drawing/2014/main" id="{E57A0EA9-8991-488E-B529-577168807DE4}"/>
+                <a16:creationId xmlns:a16="http://schemas.microsoft.com/office/drawing/2014/main" id="{E5554E13-88A3-4413-862E-FED40DF625B8}"/>
               </a:ext>
             </a:extLst>
           </p:cNvPr>
@@ -27707,7 +27707,7 @@
                 <a:ea typeface="Arial"/>
                 <a:cs typeface="Arial"/>
               </a:rPr>
-              <a:t>§2.3.2 · Doelopgave 8 · Boekpagina 88–89</a:t>
+              <a:t>§2.3.2 · Doelopgave 8 · Boekpagina 89–90</a:t>
             </a:r>
           </a:p>
         </p:txBody>
@@ -27717,7 +27717,7 @@
           <p:cNvPr id="4" name="24">
             <a:extLst xmlns:a="http://schemas.openxmlformats.org/drawingml/2006/main">
               <a:ext uri="{FF2B5EF4-FFF2-40B4-BE49-F238E27FC236}">
-                <a16:creationId xmlns:a16="http://schemas.microsoft.com/office/drawing/2014/main" id="{F5F80CA5-6FF8-4FC0-81B9-9C56BB94FB9A}"/>
+                <a16:creationId xmlns:a16="http://schemas.microsoft.com/office/drawing/2014/main" id="{E11A7C61-BF53-4EA7-B24D-28F70AE034E6}"/>
               </a:ext>
             </a:extLst>
           </p:cNvPr>
@@ -27774,7 +27774,7 @@
           <p:cNvPr id="5" name="Basis">
             <a:extLst xmlns:a="http://schemas.openxmlformats.org/drawingml/2006/main">
               <a:ext uri="{FF2B5EF4-FFF2-40B4-BE49-F238E27FC236}">
-                <a16:creationId xmlns:a16="http://schemas.microsoft.com/office/drawing/2014/main" id="{FF0549AF-F2B8-4F31-A2B5-33BE3D1FCA5E}"/>
+                <a16:creationId xmlns:a16="http://schemas.microsoft.com/office/drawing/2014/main" id="{0C37BC7B-602F-4BA2-A5D8-AE5D6AA234A2}"/>
               </a:ext>
             </a:extLst>
           </p:cNvPr>
@@ -27831,7 +27831,7 @@
           <p:cNvPr id="6" name="60 kaartjes">
             <a:extLst xmlns:a="http://schemas.openxmlformats.org/drawingml/2006/main">
               <a:ext uri="{FF2B5EF4-FFF2-40B4-BE49-F238E27FC236}">
-                <a16:creationId xmlns:a16="http://schemas.microsoft.com/office/drawing/2014/main" id="{8DEFC358-CA9A-4B16-9C8B-12882E8FFE0F}"/>
+                <a16:creationId xmlns:a16="http://schemas.microsoft.com/office/drawing/2014/main" id="{3B44161D-601C-4450-9FFE-9919CB0A08FD}"/>
               </a:ext>
             </a:extLst>
           </p:cNvPr>
@@ -27888,7 +27888,7 @@
           <p:cNvPr id="7" name="Hoogte PS">
             <a:extLst xmlns:a="http://schemas.openxmlformats.org/drawingml/2006/main">
               <a:ext uri="{FF2B5EF4-FFF2-40B4-BE49-F238E27FC236}">
-                <a16:creationId xmlns:a16="http://schemas.microsoft.com/office/drawing/2014/main" id="{D03C1867-06F1-4ABA-AAB5-6A10B6B34B84}"/>
+                <a16:creationId xmlns:a16="http://schemas.microsoft.com/office/drawing/2014/main" id="{2E88456C-A788-4984-BB87-15FDF9402E4B}"/>
               </a:ext>
             </a:extLst>
           </p:cNvPr>
@@ -27945,7 +27945,7 @@
           <p:cNvPr id="8" name="20 − 5 = € 15 per kaartje">
             <a:extLst xmlns:a="http://schemas.openxmlformats.org/drawingml/2006/main">
               <a:ext uri="{FF2B5EF4-FFF2-40B4-BE49-F238E27FC236}">
-                <a16:creationId xmlns:a16="http://schemas.microsoft.com/office/drawing/2014/main" id="{16AA36F8-8097-4DCF-8E53-BD9618659ED7}"/>
+                <a16:creationId xmlns:a16="http://schemas.microsoft.com/office/drawing/2014/main" id="{68BA822D-9B32-4B64-8B55-9AE59D2C9201}"/>
               </a:ext>
             </a:extLst>
           </p:cNvPr>
@@ -28002,7 +28002,7 @@
           <p:cNvPr id="9" name="Producentensurplus">
             <a:extLst xmlns:a="http://schemas.openxmlformats.org/drawingml/2006/main">
               <a:ext uri="{FF2B5EF4-FFF2-40B4-BE49-F238E27FC236}">
-                <a16:creationId xmlns:a16="http://schemas.microsoft.com/office/drawing/2014/main" id="{B9A8AF30-9CF2-4AE5-A459-33B15DA72FFF}"/>
+                <a16:creationId xmlns:a16="http://schemas.microsoft.com/office/drawing/2014/main" id="{103CFFF4-0154-4D35-9E08-83D295CAA5C7}"/>
               </a:ext>
             </a:extLst>
           </p:cNvPr>
@@ -28059,7 +28059,7 @@
           <p:cNvPr id="10" name="PS = ½ × 60 × 15 = € 450">
             <a:extLst xmlns:a="http://schemas.openxmlformats.org/drawingml/2006/main">
               <a:ext uri="{FF2B5EF4-FFF2-40B4-BE49-F238E27FC236}">
-                <a16:creationId xmlns:a16="http://schemas.microsoft.com/office/drawing/2014/main" id="{2EC0B27A-9679-4C7A-98DB-12768A5CBFAE}"/>
+                <a16:creationId xmlns:a16="http://schemas.microsoft.com/office/drawing/2014/main" id="{79C3E9D0-6056-4A31-8707-3AA8771DD426}"/>
               </a:ext>
             </a:extLst>
           </p:cNvPr>
@@ -28116,7 +28116,7 @@
           <p:cNvPr id="11" name="TS = CS + PS = 900 + 450 = € 1.350">
             <a:extLst xmlns:a="http://schemas.openxmlformats.org/drawingml/2006/main">
               <a:ext uri="{FF2B5EF4-FFF2-40B4-BE49-F238E27FC236}">
-                <a16:creationId xmlns:a16="http://schemas.microsoft.com/office/drawing/2014/main" id="{D7648A91-AD65-4018-96F2-1FF409A21B86}"/>
+                <a16:creationId xmlns:a16="http://schemas.microsoft.com/office/drawing/2014/main" id="{34A14A00-DBE2-44B3-A5EC-38958C13F123}"/>
               </a:ext>
             </a:extLst>
           </p:cNvPr>
@@ -28173,7 +28173,7 @@
           <p:cNvPr id="12" name="Controle: ½ × 60 × (50 − 5) = € 1.350">
             <a:extLst xmlns:a="http://schemas.openxmlformats.org/drawingml/2006/main">
               <a:ext uri="{FF2B5EF4-FFF2-40B4-BE49-F238E27FC236}">
-                <a16:creationId xmlns:a16="http://schemas.microsoft.com/office/drawing/2014/main" id="{FDE38831-0A60-403A-9CDD-0DE2C2E60470}"/>
+                <a16:creationId xmlns:a16="http://schemas.microsoft.com/office/drawing/2014/main" id="{5F0AE013-1D3D-43B1-90E5-059FA38D3B2D}"/>
               </a:ext>
             </a:extLst>
           </p:cNvPr>
@@ -28228,7 +28228,7 @@
     </p:spTree>
     <p:extLst>
       <p:ext uri="{BB962C8B-B14F-4D97-AF65-F5344CB8AC3E}">
-        <p14:creationId xmlns:p14="http://schemas.microsoft.com/office/powerpoint/2010/main" val="562534052"/>
+        <p14:creationId xmlns:p14="http://schemas.microsoft.com/office/powerpoint/2010/main" val="1459162973"/>
       </p:ext>
     </p:extLst>
   </p:cSld>
@@ -28259,7 +28259,7 @@
           <p:cNvPr id="8" name="Opgave 8d · Wat doet extra handel met TS?">
             <a:extLst xmlns:a="http://schemas.openxmlformats.org/drawingml/2006/main">
               <a:ext uri="{FF2B5EF4-FFF2-40B4-BE49-F238E27FC236}">
-                <a16:creationId xmlns:a16="http://schemas.microsoft.com/office/drawing/2014/main" id="{C97EC38E-AA7F-4C69-B56E-76784769CEB3}"/>
+                <a16:creationId xmlns:a16="http://schemas.microsoft.com/office/drawing/2014/main" id="{2BAB1A58-6C8D-4AA2-911C-759A9650216D}"/>
               </a:ext>
             </a:extLst>
           </p:cNvPr>
@@ -28316,7 +28316,7 @@
           <p:cNvPr id="2" name="">
             <a:extLst xmlns:a="http://schemas.openxmlformats.org/drawingml/2006/main">
               <a:ext uri="{FF2B5EF4-FFF2-40B4-BE49-F238E27FC236}">
-                <a16:creationId xmlns:a16="http://schemas.microsoft.com/office/drawing/2014/main" id="{D16E641B-7386-41FB-9BDC-C94E96AD3BE4}"/>
+                <a16:creationId xmlns:a16="http://schemas.microsoft.com/office/drawing/2014/main" id="{7A839451-3973-4F82-8C3C-700C84AE1682}"/>
               </a:ext>
             </a:extLst>
           </p:cNvPr>
@@ -28342,10 +28342,10 @@
       </p:sp>
       <p:sp>
         <p:nvSpPr>
-          <p:cNvPr id="3" name="§2.3.2 · Doelopgave 8 · Boekpagina 88–89">
+          <p:cNvPr id="3" name="§2.3.2 · Doelopgave 8 · Boekpagina 89–90">
             <a:extLst xmlns:a="http://schemas.openxmlformats.org/drawingml/2006/main">
               <a:ext uri="{FF2B5EF4-FFF2-40B4-BE49-F238E27FC236}">
-                <a16:creationId xmlns:a16="http://schemas.microsoft.com/office/drawing/2014/main" id="{41F7D058-BCDC-45F3-8CB5-26BBD3562E6B}"/>
+                <a16:creationId xmlns:a16="http://schemas.microsoft.com/office/drawing/2014/main" id="{5845DD4D-74A4-4B33-8DDC-AAA816F21AE8}"/>
               </a:ext>
             </a:extLst>
           </p:cNvPr>
@@ -28392,7 +28392,7 @@
                 <a:ea typeface="Arial"/>
                 <a:cs typeface="Arial"/>
               </a:rPr>
-              <a:t>§2.3.2 · Doelopgave 8 · Boekpagina 88–89</a:t>
+              <a:t>§2.3.2 · Doelopgave 8 · Boekpagina 89–90</a:t>
             </a:r>
           </a:p>
         </p:txBody>
@@ -28402,7 +28402,7 @@
           <p:cNvPr id="4" name="25">
             <a:extLst xmlns:a="http://schemas.openxmlformats.org/drawingml/2006/main">
               <a:ext uri="{FF2B5EF4-FFF2-40B4-BE49-F238E27FC236}">
-                <a16:creationId xmlns:a16="http://schemas.microsoft.com/office/drawing/2014/main" id="{6B914693-9AFF-4BD2-8E62-B7F8DE4CBCA4}"/>
+                <a16:creationId xmlns:a16="http://schemas.microsoft.com/office/drawing/2014/main" id="{4DE39E16-4BEB-477C-85EA-E16D2A6F4C8E}"/>
               </a:ext>
             </a:extLst>
           </p:cNvPr>
@@ -28777,7 +28777,7 @@
           <p:cNvPr id="6" name="Bij 50 is de eenheid méér waard dan zij kost.">
             <a:extLst xmlns:a="http://schemas.openxmlformats.org/drawingml/2006/main">
               <a:ext uri="{FF2B5EF4-FFF2-40B4-BE49-F238E27FC236}">
-                <a16:creationId xmlns:a16="http://schemas.microsoft.com/office/drawing/2014/main" id="{1FF9F717-1E59-4F56-8B7F-4204FE21339D}"/>
+                <a16:creationId xmlns:a16="http://schemas.microsoft.com/office/drawing/2014/main" id="{573FF7D2-1C7F-4429-97F0-E8C9E7312108}"/>
               </a:ext>
             </a:extLst>
           </p:cNvPr>
@@ -28834,7 +28834,7 @@
           <p:cNvPr id="7" name="Bij 70 kost de eenheid méér dan zij waard is.">
             <a:extLst xmlns:a="http://schemas.openxmlformats.org/drawingml/2006/main">
               <a:ext uri="{FF2B5EF4-FFF2-40B4-BE49-F238E27FC236}">
-                <a16:creationId xmlns:a16="http://schemas.microsoft.com/office/drawing/2014/main" id="{57D0F9D2-0CD5-4EAD-B869-24DF9DA84E35}"/>
+                <a16:creationId xmlns:a16="http://schemas.microsoft.com/office/drawing/2014/main" id="{A5CCD9C3-26C2-4AAA-824D-83035A4A368B}"/>
               </a:ext>
             </a:extLst>
           </p:cNvPr>
@@ -28889,7 +28889,7 @@
     </p:spTree>
     <p:extLst>
       <p:ext uri="{BB962C8B-B14F-4D97-AF65-F5344CB8AC3E}">
-        <p14:creationId xmlns:p14="http://schemas.microsoft.com/office/powerpoint/2010/main" val="1423171235"/>
+        <p14:creationId xmlns:p14="http://schemas.microsoft.com/office/powerpoint/2010/main" val="1203000647"/>
       </p:ext>
     </p:extLst>
   </p:cSld>
@@ -28920,7 +28920,7 @@
           <p:cNvPr id="12" name="Opgave 8e · Maximaal TS en verdeling">
             <a:extLst xmlns:a="http://schemas.openxmlformats.org/drawingml/2006/main">
               <a:ext uri="{FF2B5EF4-FFF2-40B4-BE49-F238E27FC236}">
-                <a16:creationId xmlns:a16="http://schemas.microsoft.com/office/drawing/2014/main" id="{07FBFB54-4449-407E-AA9C-73D8B6084E37}"/>
+                <a16:creationId xmlns:a16="http://schemas.microsoft.com/office/drawing/2014/main" id="{2AD8F2E9-E436-4AFF-A838-61E41544936E}"/>
               </a:ext>
             </a:extLst>
           </p:cNvPr>
@@ -28977,7 +28977,7 @@
           <p:cNvPr id="2" name="">
             <a:extLst xmlns:a="http://schemas.openxmlformats.org/drawingml/2006/main">
               <a:ext uri="{FF2B5EF4-FFF2-40B4-BE49-F238E27FC236}">
-                <a16:creationId xmlns:a16="http://schemas.microsoft.com/office/drawing/2014/main" id="{82DF463F-35DC-413F-90B5-EB10814FDEC7}"/>
+                <a16:creationId xmlns:a16="http://schemas.microsoft.com/office/drawing/2014/main" id="{AED5300E-AACA-4123-BB54-29B30027EABB}"/>
               </a:ext>
             </a:extLst>
           </p:cNvPr>
@@ -29003,10 +29003,10 @@
       </p:sp>
       <p:sp>
         <p:nvSpPr>
-          <p:cNvPr id="3" name="§2.3.2 · Doelopgave 8 · Boekpagina 88–89">
+          <p:cNvPr id="3" name="§2.3.2 · Doelopgave 8 · Boekpagina 89–90">
             <a:extLst xmlns:a="http://schemas.openxmlformats.org/drawingml/2006/main">
               <a:ext uri="{FF2B5EF4-FFF2-40B4-BE49-F238E27FC236}">
-                <a16:creationId xmlns:a16="http://schemas.microsoft.com/office/drawing/2014/main" id="{365A7B62-B3BD-42A0-AA86-CE47132C3C97}"/>
+                <a16:creationId xmlns:a16="http://schemas.microsoft.com/office/drawing/2014/main" id="{1C06DBFA-5529-40DA-AE46-B1462DA1C613}"/>
               </a:ext>
             </a:extLst>
           </p:cNvPr>
@@ -29053,7 +29053,7 @@
                 <a:ea typeface="Arial"/>
                 <a:cs typeface="Arial"/>
               </a:rPr>
-              <a:t>§2.3.2 · Doelopgave 8 · Boekpagina 88–89</a:t>
+              <a:t>§2.3.2 · Doelopgave 8 · Boekpagina 89–90</a:t>
             </a:r>
           </a:p>
         </p:txBody>
@@ -29063,7 +29063,7 @@
           <p:cNvPr id="4" name="26">
             <a:extLst xmlns:a="http://schemas.openxmlformats.org/drawingml/2006/main">
               <a:ext uri="{FF2B5EF4-FFF2-40B4-BE49-F238E27FC236}">
-                <a16:creationId xmlns:a16="http://schemas.microsoft.com/office/drawing/2014/main" id="{798685DE-DCB3-420C-B5E2-BB8792DE76A1}"/>
+                <a16:creationId xmlns:a16="http://schemas.microsoft.com/office/drawing/2014/main" id="{968BF546-2719-43BE-85ED-B63741981B17}"/>
               </a:ext>
             </a:extLst>
           </p:cNvPr>
@@ -29120,7 +29120,7 @@
           <p:cNvPr id="5" name="Tot Q = 60">
             <a:extLst xmlns:a="http://schemas.openxmlformats.org/drawingml/2006/main">
               <a:ext uri="{FF2B5EF4-FFF2-40B4-BE49-F238E27FC236}">
-                <a16:creationId xmlns:a16="http://schemas.microsoft.com/office/drawing/2014/main" id="{5BD66A9B-E51B-47E6-BC20-077669ECD76E}"/>
+                <a16:creationId xmlns:a16="http://schemas.microsoft.com/office/drawing/2014/main" id="{2539A30E-8CA5-4093-AAAE-C6CDDBD94443}"/>
               </a:ext>
             </a:extLst>
           </p:cNvPr>
@@ -29177,7 +29177,7 @@
           <p:cNvPr id="6" name="Betalingsbereidheid ≥ MK: handel levert gezamenlijk voordeel.">
             <a:extLst xmlns:a="http://schemas.openxmlformats.org/drawingml/2006/main">
               <a:ext uri="{FF2B5EF4-FFF2-40B4-BE49-F238E27FC236}">
-                <a16:creationId xmlns:a16="http://schemas.microsoft.com/office/drawing/2014/main" id="{5A7B2338-04EE-4047-8E75-D930B1BAF05F}"/>
+                <a16:creationId xmlns:a16="http://schemas.microsoft.com/office/drawing/2014/main" id="{CFFF2639-445E-46D5-B92D-477B7269A38A}"/>
               </a:ext>
             </a:extLst>
           </p:cNvPr>
@@ -29234,7 +29234,7 @@
           <p:cNvPr id="7" name="Na Q = 60">
             <a:extLst xmlns:a="http://schemas.openxmlformats.org/drawingml/2006/main">
               <a:ext uri="{FF2B5EF4-FFF2-40B4-BE49-F238E27FC236}">
-                <a16:creationId xmlns:a16="http://schemas.microsoft.com/office/drawing/2014/main" id="{FBE3CA78-E64A-4EA9-A037-4CA4A96A8413}"/>
+                <a16:creationId xmlns:a16="http://schemas.microsoft.com/office/drawing/2014/main" id="{F90ABAD1-A43F-4AC1-8230-C194BA69B556}"/>
               </a:ext>
             </a:extLst>
           </p:cNvPr>
@@ -29291,7 +29291,7 @@
           <p:cNvPr id="8" name="MK &gt; betalingsbereidheid: extra handel verlaagt TS.">
             <a:extLst xmlns:a="http://schemas.openxmlformats.org/drawingml/2006/main">
               <a:ext uri="{FF2B5EF4-FFF2-40B4-BE49-F238E27FC236}">
-                <a16:creationId xmlns:a16="http://schemas.microsoft.com/office/drawing/2014/main" id="{58706069-0C1A-4E34-8FAC-35E270EDE65D}"/>
+                <a16:creationId xmlns:a16="http://schemas.microsoft.com/office/drawing/2014/main" id="{6D0A7C92-665D-4AE3-8B45-BAA9D69E06DE}"/>
               </a:ext>
             </a:extLst>
           </p:cNvPr>
@@ -29348,7 +29348,7 @@
           <p:cNvPr id="9" name="Conclusie">
             <a:extLst xmlns:a="http://schemas.openxmlformats.org/drawingml/2006/main">
               <a:ext uri="{FF2B5EF4-FFF2-40B4-BE49-F238E27FC236}">
-                <a16:creationId xmlns:a16="http://schemas.microsoft.com/office/drawing/2014/main" id="{5D9FFD09-DABC-4B9C-B6D9-BFB53C6EA037}"/>
+                <a16:creationId xmlns:a16="http://schemas.microsoft.com/office/drawing/2014/main" id="{7F7E0B3A-FCE1-4706-A982-8C62886AE8A1}"/>
               </a:ext>
             </a:extLst>
           </p:cNvPr>
@@ -29405,7 +29405,7 @@
           <p:cNvPr id="10" name="TS is maximaal bij Q = 60, binnen dit model.">
             <a:extLst xmlns:a="http://schemas.openxmlformats.org/drawingml/2006/main">
               <a:ext uri="{FF2B5EF4-FFF2-40B4-BE49-F238E27FC236}">
-                <a16:creationId xmlns:a16="http://schemas.microsoft.com/office/drawing/2014/main" id="{6BF785B7-18E8-4692-83A5-5C909E527D38}"/>
+                <a16:creationId xmlns:a16="http://schemas.microsoft.com/office/drawing/2014/main" id="{83CE88B9-01B3-4DEF-B68B-E59053FE9198}"/>
               </a:ext>
             </a:extLst>
           </p:cNvPr>
@@ -29462,7 +29462,7 @@
           <p:cNvPr id="11" name="De functies bevatten geen norm voor een eerlijke verdeling.">
             <a:extLst xmlns:a="http://schemas.openxmlformats.org/drawingml/2006/main">
               <a:ext uri="{FF2B5EF4-FFF2-40B4-BE49-F238E27FC236}">
-                <a16:creationId xmlns:a16="http://schemas.microsoft.com/office/drawing/2014/main" id="{6E383265-C31F-487E-933C-BDD3496EF61D}"/>
+                <a16:creationId xmlns:a16="http://schemas.microsoft.com/office/drawing/2014/main" id="{731AF64E-306E-4A5D-B1D4-C065F887BDDA}"/>
               </a:ext>
             </a:extLst>
           </p:cNvPr>
@@ -29517,7 +29517,7 @@
     </p:spTree>
     <p:extLst>
       <p:ext uri="{BB962C8B-B14F-4D97-AF65-F5344CB8AC3E}">
-        <p14:creationId xmlns:p14="http://schemas.microsoft.com/office/powerpoint/2010/main" val="539246506"/>
+        <p14:creationId xmlns:p14="http://schemas.microsoft.com/office/powerpoint/2010/main" val="1452135310"/>
       </p:ext>
     </p:extLst>
   </p:cSld>
@@ -29548,7 +29548,7 @@
           <p:cNvPr id="29" name="Deze les: §2.3.2 Producentensurplus en totaal surplus">
             <a:extLst xmlns:a="http://schemas.openxmlformats.org/drawingml/2006/main">
               <a:ext uri="{FF2B5EF4-FFF2-40B4-BE49-F238E27FC236}">
-                <a16:creationId xmlns:a16="http://schemas.microsoft.com/office/drawing/2014/main" id="{DA47D971-DD85-45D6-A107-EB5E062F68D1}"/>
+                <a16:creationId xmlns:a16="http://schemas.microsoft.com/office/drawing/2014/main" id="{59B40878-836F-482F-91F5-D083DDCA68BE}"/>
               </a:ext>
             </a:extLst>
           </p:cNvPr>
@@ -29605,7 +29605,7 @@
           <p:cNvPr id="2" name="">
             <a:extLst xmlns:a="http://schemas.openxmlformats.org/drawingml/2006/main">
               <a:ext uri="{FF2B5EF4-FFF2-40B4-BE49-F238E27FC236}">
-                <a16:creationId xmlns:a16="http://schemas.microsoft.com/office/drawing/2014/main" id="{2067C71F-3829-403C-B67A-7E38720A6010}"/>
+                <a16:creationId xmlns:a16="http://schemas.microsoft.com/office/drawing/2014/main" id="{8EBE4CBF-686A-4F91-8222-7E3320801FC3}"/>
               </a:ext>
             </a:extLst>
           </p:cNvPr>
@@ -29634,7 +29634,7 @@
           <p:cNvPr id="3" name="§2.3.2 Producentensurplus en totaal surplus">
             <a:extLst xmlns:a="http://schemas.openxmlformats.org/drawingml/2006/main">
               <a:ext uri="{FF2B5EF4-FFF2-40B4-BE49-F238E27FC236}">
-                <a16:creationId xmlns:a16="http://schemas.microsoft.com/office/drawing/2014/main" id="{CB78CE50-3796-4D39-A669-CF94BB4CCDDB}"/>
+                <a16:creationId xmlns:a16="http://schemas.microsoft.com/office/drawing/2014/main" id="{BB7AF7B9-DFBF-42D7-8BBD-06AFF26C7B30}"/>
               </a:ext>
             </a:extLst>
           </p:cNvPr>
@@ -29691,7 +29691,7 @@
           <p:cNvPr id="4" name="27">
             <a:extLst xmlns:a="http://schemas.openxmlformats.org/drawingml/2006/main">
               <a:ext uri="{FF2B5EF4-FFF2-40B4-BE49-F238E27FC236}">
-                <a16:creationId xmlns:a16="http://schemas.microsoft.com/office/drawing/2014/main" id="{1FC1C6BA-377D-4C6B-B2CC-F476F1E423D3}"/>
+                <a16:creationId xmlns:a16="http://schemas.microsoft.com/office/drawing/2014/main" id="{811B9064-42F9-4967-B29E-F62667A3AED4}"/>
               </a:ext>
             </a:extLst>
           </p:cNvPr>
@@ -29748,7 +29748,7 @@
           <p:cNvPr id="5" name="phase">
             <a:extLst xmlns:a="http://schemas.openxmlformats.org/drawingml/2006/main">
               <a:ext uri="{FF2B5EF4-FFF2-40B4-BE49-F238E27FC236}">
-                <a16:creationId xmlns:a16="http://schemas.microsoft.com/office/drawing/2014/main" id="{492F0A34-077E-4B2A-8D14-AAC243B2985F}"/>
+                <a16:creationId xmlns:a16="http://schemas.microsoft.com/office/drawing/2014/main" id="{A45E1CAD-2CED-41F2-9F15-85D8B984F949}"/>
               </a:ext>
             </a:extLst>
           </p:cNvPr>
@@ -29805,7 +29805,7 @@
           <p:cNvPr id="6" name="Lesroute">
             <a:extLst xmlns:a="http://schemas.openxmlformats.org/drawingml/2006/main">
               <a:ext uri="{FF2B5EF4-FFF2-40B4-BE49-F238E27FC236}">
-                <a16:creationId xmlns:a16="http://schemas.microsoft.com/office/drawing/2014/main" id="{5496A7EE-AFDF-44B5-9D55-FB310FD2C59A}"/>
+                <a16:creationId xmlns:a16="http://schemas.microsoft.com/office/drawing/2014/main" id="{A946FF02-F3A3-4A88-9CCF-5FFE2440BAF2}"/>
               </a:ext>
             </a:extLst>
           </p:cNvPr>
@@ -29862,7 +29862,7 @@
           <p:cNvPr id="7" name="route-number-1">
             <a:extLst xmlns:a="http://schemas.openxmlformats.org/drawingml/2006/main">
               <a:ext uri="{FF2B5EF4-FFF2-40B4-BE49-F238E27FC236}">
-                <a16:creationId xmlns:a16="http://schemas.microsoft.com/office/drawing/2014/main" id="{84976575-8AC7-4380-8989-594AAFEDF7A7}"/>
+                <a16:creationId xmlns:a16="http://schemas.microsoft.com/office/drawing/2014/main" id="{20C16C4E-2FDB-4D8C-8001-84C70CA45B38}"/>
               </a:ext>
             </a:extLst>
           </p:cNvPr>
@@ -29919,7 +29919,7 @@
           <p:cNvPr id="8" name="route-1">
             <a:extLst xmlns:a="http://schemas.openxmlformats.org/drawingml/2006/main">
               <a:ext uri="{FF2B5EF4-FFF2-40B4-BE49-F238E27FC236}">
-                <a16:creationId xmlns:a16="http://schemas.microsoft.com/office/drawing/2014/main" id="{9E75D9A3-7195-4E42-AC8B-B29E6A8E944D}"/>
+                <a16:creationId xmlns:a16="http://schemas.microsoft.com/office/drawing/2014/main" id="{3E303548-A3FF-4042-A714-B139760B5B4C}"/>
               </a:ext>
             </a:extLst>
           </p:cNvPr>
@@ -29976,7 +29976,7 @@
           <p:cNvPr id="9" name="route-number-2">
             <a:extLst xmlns:a="http://schemas.openxmlformats.org/drawingml/2006/main">
               <a:ext uri="{FF2B5EF4-FFF2-40B4-BE49-F238E27FC236}">
-                <a16:creationId xmlns:a16="http://schemas.microsoft.com/office/drawing/2014/main" id="{A43BEDD7-6ECC-4AA2-A770-EDC8D5374524}"/>
+                <a16:creationId xmlns:a16="http://schemas.microsoft.com/office/drawing/2014/main" id="{A33D2D24-B34F-4E6D-BFC2-2E9D226EEBB9}"/>
               </a:ext>
             </a:extLst>
           </p:cNvPr>
@@ -30033,7 +30033,7 @@
           <p:cNvPr id="10" name="route-2">
             <a:extLst xmlns:a="http://schemas.openxmlformats.org/drawingml/2006/main">
               <a:ext uri="{FF2B5EF4-FFF2-40B4-BE49-F238E27FC236}">
-                <a16:creationId xmlns:a16="http://schemas.microsoft.com/office/drawing/2014/main" id="{F3E103BA-61F3-4320-91C1-6DE8C2A201C6}"/>
+                <a16:creationId xmlns:a16="http://schemas.microsoft.com/office/drawing/2014/main" id="{52AF05DC-CFD6-42B1-8CC9-3CCE0181BB72}"/>
               </a:ext>
             </a:extLst>
           </p:cNvPr>
@@ -30090,7 +30090,7 @@
           <p:cNvPr id="11" name="route-number-3">
             <a:extLst xmlns:a="http://schemas.openxmlformats.org/drawingml/2006/main">
               <a:ext uri="{FF2B5EF4-FFF2-40B4-BE49-F238E27FC236}">
-                <a16:creationId xmlns:a16="http://schemas.microsoft.com/office/drawing/2014/main" id="{C1F6ADEF-1512-4E21-91C8-BC5B1F74F41A}"/>
+                <a16:creationId xmlns:a16="http://schemas.microsoft.com/office/drawing/2014/main" id="{AEECE0D5-7D3F-457A-908D-03468FC1BFFB}"/>
               </a:ext>
             </a:extLst>
           </p:cNvPr>
@@ -30147,7 +30147,7 @@
           <p:cNvPr id="12" name="route-3">
             <a:extLst xmlns:a="http://schemas.openxmlformats.org/drawingml/2006/main">
               <a:ext uri="{FF2B5EF4-FFF2-40B4-BE49-F238E27FC236}">
-                <a16:creationId xmlns:a16="http://schemas.microsoft.com/office/drawing/2014/main" id="{1866AFB3-765B-49B5-AA98-FDFDAC990A51}"/>
+                <a16:creationId xmlns:a16="http://schemas.microsoft.com/office/drawing/2014/main" id="{1BFF09A5-9D18-4882-A801-CDF6529E7760}"/>
               </a:ext>
             </a:extLst>
           </p:cNvPr>
@@ -30204,7 +30204,7 @@
           <p:cNvPr id="13" name="route-number-4">
             <a:extLst xmlns:a="http://schemas.openxmlformats.org/drawingml/2006/main">
               <a:ext uri="{FF2B5EF4-FFF2-40B4-BE49-F238E27FC236}">
-                <a16:creationId xmlns:a16="http://schemas.microsoft.com/office/drawing/2014/main" id="{D66130F7-8FE6-4E07-80CE-300A3BA5B5F8}"/>
+                <a16:creationId xmlns:a16="http://schemas.microsoft.com/office/drawing/2014/main" id="{B23DE91C-9BFE-4972-9888-774BAD1BD0BE}"/>
               </a:ext>
             </a:extLst>
           </p:cNvPr>
@@ -30261,7 +30261,7 @@
           <p:cNvPr id="14" name="route-4">
             <a:extLst xmlns:a="http://schemas.openxmlformats.org/drawingml/2006/main">
               <a:ext uri="{FF2B5EF4-FFF2-40B4-BE49-F238E27FC236}">
-                <a16:creationId xmlns:a16="http://schemas.microsoft.com/office/drawing/2014/main" id="{427077ED-5746-475B-B164-6A7B5438CDE2}"/>
+                <a16:creationId xmlns:a16="http://schemas.microsoft.com/office/drawing/2014/main" id="{306886FF-3ED6-4705-BE96-811F8A07B152}"/>
               </a:ext>
             </a:extLst>
           </p:cNvPr>
@@ -30318,7 +30318,7 @@
           <p:cNvPr id="15" name="route-number-5">
             <a:extLst xmlns:a="http://schemas.openxmlformats.org/drawingml/2006/main">
               <a:ext uri="{FF2B5EF4-FFF2-40B4-BE49-F238E27FC236}">
-                <a16:creationId xmlns:a16="http://schemas.microsoft.com/office/drawing/2014/main" id="{A5BD9BBC-69CF-4DD6-89EF-C9A411492F4C}"/>
+                <a16:creationId xmlns:a16="http://schemas.microsoft.com/office/drawing/2014/main" id="{64E9EC6B-EA97-40A1-BAF8-F86086D16C5E}"/>
               </a:ext>
             </a:extLst>
           </p:cNvPr>
@@ -30375,7 +30375,7 @@
           <p:cNvPr id="16" name="route-5">
             <a:extLst xmlns:a="http://schemas.openxmlformats.org/drawingml/2006/main">
               <a:ext uri="{FF2B5EF4-FFF2-40B4-BE49-F238E27FC236}">
-                <a16:creationId xmlns:a16="http://schemas.microsoft.com/office/drawing/2014/main" id="{6A063B85-1767-4E3E-AC4A-1836C8952998}"/>
+                <a16:creationId xmlns:a16="http://schemas.microsoft.com/office/drawing/2014/main" id="{E4190C6D-4FBE-4D4F-91EE-C350034E5069}"/>
               </a:ext>
             </a:extLst>
           </p:cNvPr>
@@ -30432,7 +30432,7 @@
           <p:cNvPr id="17" name="route-number-6">
             <a:extLst xmlns:a="http://schemas.openxmlformats.org/drawingml/2006/main">
               <a:ext uri="{FF2B5EF4-FFF2-40B4-BE49-F238E27FC236}">
-                <a16:creationId xmlns:a16="http://schemas.microsoft.com/office/drawing/2014/main" id="{1405BFC2-98D3-4BFA-8F70-6BB2F8AACB5C}"/>
+                <a16:creationId xmlns:a16="http://schemas.microsoft.com/office/drawing/2014/main" id="{CFB17127-F058-48D2-8749-18EE83DB8359}"/>
               </a:ext>
             </a:extLst>
           </p:cNvPr>
@@ -30489,7 +30489,7 @@
           <p:cNvPr id="18" name="route-6">
             <a:extLst xmlns:a="http://schemas.openxmlformats.org/drawingml/2006/main">
               <a:ext uri="{FF2B5EF4-FFF2-40B4-BE49-F238E27FC236}">
-                <a16:creationId xmlns:a16="http://schemas.microsoft.com/office/drawing/2014/main" id="{65959638-B6F2-449F-BF6D-7126CD5E6EB4}"/>
+                <a16:creationId xmlns:a16="http://schemas.microsoft.com/office/drawing/2014/main" id="{937612E4-F664-477E-AE7B-9B3EE1C737B0}"/>
               </a:ext>
             </a:extLst>
           </p:cNvPr>
@@ -30546,7 +30546,7 @@
           <p:cNvPr id="19" name="route-number-7">
             <a:extLst xmlns:a="http://schemas.openxmlformats.org/drawingml/2006/main">
               <a:ext uri="{FF2B5EF4-FFF2-40B4-BE49-F238E27FC236}">
-                <a16:creationId xmlns:a16="http://schemas.microsoft.com/office/drawing/2014/main" id="{A109FF05-62B2-4475-8A9E-C29C93DE7B48}"/>
+                <a16:creationId xmlns:a16="http://schemas.microsoft.com/office/drawing/2014/main" id="{8ECB6AEB-AB8F-4113-AB82-62412F142232}"/>
               </a:ext>
             </a:extLst>
           </p:cNvPr>
@@ -30603,7 +30603,7 @@
           <p:cNvPr id="20" name="route-7">
             <a:extLst xmlns:a="http://schemas.openxmlformats.org/drawingml/2006/main">
               <a:ext uri="{FF2B5EF4-FFF2-40B4-BE49-F238E27FC236}">
-                <a16:creationId xmlns:a16="http://schemas.microsoft.com/office/drawing/2014/main" id="{082F7DA4-EB61-4C89-BC2B-DDE9ED23D54D}"/>
+                <a16:creationId xmlns:a16="http://schemas.microsoft.com/office/drawing/2014/main" id="{4524EEEB-06FA-43B9-9152-B3C78F28D83B}"/>
               </a:ext>
             </a:extLst>
           </p:cNvPr>
@@ -30660,7 +30660,7 @@
           <p:cNvPr id="21" name="Lesdoelen">
             <a:extLst xmlns:a="http://schemas.openxmlformats.org/drawingml/2006/main">
               <a:ext uri="{FF2B5EF4-FFF2-40B4-BE49-F238E27FC236}">
-                <a16:creationId xmlns:a16="http://schemas.microsoft.com/office/drawing/2014/main" id="{DADEF63A-D900-4AA3-84FE-39BC1B8E8BBE}"/>
+                <a16:creationId xmlns:a16="http://schemas.microsoft.com/office/drawing/2014/main" id="{61BCF3A7-C06A-46D3-BB71-811E054A844A}"/>
               </a:ext>
             </a:extLst>
           </p:cNvPr>
@@ -30717,7 +30717,7 @@
           <p:cNvPr id="22" name="overview-goals">
             <a:extLst xmlns:a="http://schemas.openxmlformats.org/drawingml/2006/main">
               <a:ext uri="{FF2B5EF4-FFF2-40B4-BE49-F238E27FC236}">
-                <a16:creationId xmlns:a16="http://schemas.microsoft.com/office/drawing/2014/main" id="{F804974E-42E2-43BC-9A87-25CAEBCCB42C}"/>
+                <a16:creationId xmlns:a16="http://schemas.microsoft.com/office/drawing/2014/main" id="{4A0B0F8C-1B56-40C5-B7C9-7DCBE1260596}"/>
               </a:ext>
             </a:extLst>
           </p:cNvPr>
@@ -30820,7 +30820,7 @@
           <p:cNvPr id="23" name="">
             <a:extLst xmlns:a="http://schemas.openxmlformats.org/drawingml/2006/main">
               <a:ext uri="{FF2B5EF4-FFF2-40B4-BE49-F238E27FC236}">
-                <a16:creationId xmlns:a16="http://schemas.microsoft.com/office/drawing/2014/main" id="{A5D74693-EEAD-4DA4-88B6-62770789B8A4}"/>
+                <a16:creationId xmlns:a16="http://schemas.microsoft.com/office/drawing/2014/main" id="{FF8EFD7F-71EA-4800-9D7D-EE9EA8AC9AA4}"/>
               </a:ext>
             </a:extLst>
           </p:cNvPr>
@@ -30849,7 +30849,7 @@
           <p:cNvPr id="24" name="Startopdracht">
             <a:extLst xmlns:a="http://schemas.openxmlformats.org/drawingml/2006/main">
               <a:ext uri="{FF2B5EF4-FFF2-40B4-BE49-F238E27FC236}">
-                <a16:creationId xmlns:a16="http://schemas.microsoft.com/office/drawing/2014/main" id="{FA6DDDA7-20E4-4BAE-9E05-C22414086817}"/>
+                <a16:creationId xmlns:a16="http://schemas.microsoft.com/office/drawing/2014/main" id="{3ECFC9B0-0609-4755-973B-3069B0B2C3D3}"/>
               </a:ext>
             </a:extLst>
           </p:cNvPr>
@@ -30906,7 +30906,7 @@
           <p:cNvPr id="25" name="overview-start">
             <a:extLst xmlns:a="http://schemas.openxmlformats.org/drawingml/2006/main">
               <a:ext uri="{FF2B5EF4-FFF2-40B4-BE49-F238E27FC236}">
-                <a16:creationId xmlns:a16="http://schemas.microsoft.com/office/drawing/2014/main" id="{C71E8C6C-9122-4251-860B-E2D0B407709B}"/>
+                <a16:creationId xmlns:a16="http://schemas.microsoft.com/office/drawing/2014/main" id="{5A72F19F-7597-4CA1-A642-1D4389BF537D}"/>
               </a:ext>
             </a:extLst>
           </p:cNvPr>
@@ -30953,7 +30953,7 @@
                 <a:ea typeface="Arial"/>
                 <a:cs typeface="Arial"/>
               </a:rPr>
-              <a:t>Pagina 84 · Opgaven 1 en 2</a:t>
+              <a:t>Pagina 85 · Opgaven 1 en 2</a:t>
             </a:r>
           </a:p>
           <a:p xmlns:a="http://schemas.openxmlformats.org/drawingml/2006/main">
@@ -30976,7 +30976,7 @@
                 <a:ea typeface="Arial"/>
                 <a:cs typeface="Arial"/>
               </a:rPr>
-              <a:t>1: hulp p. 82; 2: verkennen p. 80</a:t>
+              <a:t>1: hulp p. 83; 2: verkennen p. 81</a:t>
             </a:r>
           </a:p>
         </p:txBody>
@@ -30986,7 +30986,7 @@
           <p:cNvPr id="26" name="">
             <a:extLst xmlns:a="http://schemas.openxmlformats.org/drawingml/2006/main">
               <a:ext uri="{FF2B5EF4-FFF2-40B4-BE49-F238E27FC236}">
-                <a16:creationId xmlns:a16="http://schemas.microsoft.com/office/drawing/2014/main" id="{168BEE4B-F5A9-47A1-99CD-59E1164905F0}"/>
+                <a16:creationId xmlns:a16="http://schemas.microsoft.com/office/drawing/2014/main" id="{80E83ED9-8289-47C8-BAA3-548208F28E53}"/>
               </a:ext>
             </a:extLst>
           </p:cNvPr>
@@ -31015,7 +31015,7 @@
           <p:cNvPr id="27" name="Huiswerk">
             <a:extLst xmlns:a="http://schemas.openxmlformats.org/drawingml/2006/main">
               <a:ext uri="{FF2B5EF4-FFF2-40B4-BE49-F238E27FC236}">
-                <a16:creationId xmlns:a16="http://schemas.microsoft.com/office/drawing/2014/main" id="{C473EE3C-CB72-4972-AC2D-35D6610E4F97}"/>
+                <a16:creationId xmlns:a16="http://schemas.microsoft.com/office/drawing/2014/main" id="{D64F4B57-4227-428A-88A1-BA3A0365BEB6}"/>
               </a:ext>
             </a:extLst>
           </p:cNvPr>
@@ -31072,7 +31072,7 @@
           <p:cNvPr id="28" name="overview-homework">
             <a:extLst xmlns:a="http://schemas.openxmlformats.org/drawingml/2006/main">
               <a:ext uri="{FF2B5EF4-FFF2-40B4-BE49-F238E27FC236}">
-                <a16:creationId xmlns:a16="http://schemas.microsoft.com/office/drawing/2014/main" id="{2CAC9CC3-E478-4873-937D-94C064E11B8E}"/>
+                <a16:creationId xmlns:a16="http://schemas.microsoft.com/office/drawing/2014/main" id="{D4C06F9C-FDB5-45F6-84A1-D314A45063B1}"/>
               </a:ext>
             </a:extLst>
           </p:cNvPr>
@@ -31219,7 +31219,7 @@
     </p:spTree>
     <p:extLst>
       <p:ext uri="{BB962C8B-B14F-4D97-AF65-F5344CB8AC3E}">
-        <p14:creationId xmlns:p14="http://schemas.microsoft.com/office/powerpoint/2010/main" val="1347800648"/>
+        <p14:creationId xmlns:p14="http://schemas.microsoft.com/office/powerpoint/2010/main" val="202841146"/>
       </p:ext>
     </p:extLst>
   </p:cSld>
@@ -31250,7 +31250,7 @@
           <p:cNvPr id="9" name="Het voordeel van één transactie">
             <a:extLst xmlns:a="http://schemas.openxmlformats.org/drawingml/2006/main">
               <a:ext uri="{FF2B5EF4-FFF2-40B4-BE49-F238E27FC236}">
-                <a16:creationId xmlns:a16="http://schemas.microsoft.com/office/drawing/2014/main" id="{D1CDA7E3-27A3-4A81-BB1F-9326A75D3690}"/>
+                <a16:creationId xmlns:a16="http://schemas.microsoft.com/office/drawing/2014/main" id="{E5E63A36-B0C8-472D-B473-218F47CD5608}"/>
               </a:ext>
             </a:extLst>
           </p:cNvPr>
@@ -31307,7 +31307,7 @@
           <p:cNvPr id="2" name="">
             <a:extLst xmlns:a="http://schemas.openxmlformats.org/drawingml/2006/main">
               <a:ext uri="{FF2B5EF4-FFF2-40B4-BE49-F238E27FC236}">
-                <a16:creationId xmlns:a16="http://schemas.microsoft.com/office/drawing/2014/main" id="{00D46EB2-840B-4493-9944-E07D5B5D621F}"/>
+                <a16:creationId xmlns:a16="http://schemas.microsoft.com/office/drawing/2014/main" id="{62951944-65AA-4881-887F-5B804CA42103}"/>
               </a:ext>
             </a:extLst>
           </p:cNvPr>
@@ -31336,7 +31336,7 @@
           <p:cNvPr id="3" name="§2.3.2 Producentensurplus en totaal surplus">
             <a:extLst xmlns:a="http://schemas.openxmlformats.org/drawingml/2006/main">
               <a:ext uri="{FF2B5EF4-FFF2-40B4-BE49-F238E27FC236}">
-                <a16:creationId xmlns:a16="http://schemas.microsoft.com/office/drawing/2014/main" id="{41756D90-3573-477C-9C69-006BEAA0526C}"/>
+                <a16:creationId xmlns:a16="http://schemas.microsoft.com/office/drawing/2014/main" id="{FBD6F63C-D0C5-4CD1-982B-0E5700C2B046}"/>
               </a:ext>
             </a:extLst>
           </p:cNvPr>
@@ -31393,7 +31393,7 @@
           <p:cNvPr id="4" name="3">
             <a:extLst xmlns:a="http://schemas.openxmlformats.org/drawingml/2006/main">
               <a:ext uri="{FF2B5EF4-FFF2-40B4-BE49-F238E27FC236}">
-                <a16:creationId xmlns:a16="http://schemas.microsoft.com/office/drawing/2014/main" id="{52DAC6E6-F787-4080-9E79-52F26333EC63}"/>
+                <a16:creationId xmlns:a16="http://schemas.microsoft.com/office/drawing/2014/main" id="{3B760086-CFB8-4ED2-B714-BE5067872BAE}"/>
               </a:ext>
             </a:extLst>
           </p:cNvPr>
@@ -31450,7 +31450,7 @@
           <p:cNvPr id="5" name="Uitlegvoorbeeld — niet uit het boek · Sleutelhanger">
             <a:extLst xmlns:a="http://schemas.openxmlformats.org/drawingml/2006/main">
               <a:ext uri="{FF2B5EF4-FFF2-40B4-BE49-F238E27FC236}">
-                <a16:creationId xmlns:a16="http://schemas.microsoft.com/office/drawing/2014/main" id="{F368061A-ECF3-4484-B353-35412A164CC5}"/>
+                <a16:creationId xmlns:a16="http://schemas.microsoft.com/office/drawing/2014/main" id="{2BACB5E2-4B1E-40B8-84FE-CB8D5D37D0D8}"/>
               </a:ext>
             </a:extLst>
           </p:cNvPr>
@@ -31507,7 +31507,7 @@
           <p:cNvPr id="6" name="Betalingsbereidheid € 18 · Prijs € 11 · MK € 6">
             <a:extLst xmlns:a="http://schemas.openxmlformats.org/drawingml/2006/main">
               <a:ext uri="{FF2B5EF4-FFF2-40B4-BE49-F238E27FC236}">
-                <a16:creationId xmlns:a16="http://schemas.microsoft.com/office/drawing/2014/main" id="{582FD9F2-6D99-4050-B331-1232D4D22633}"/>
+                <a16:creationId xmlns:a16="http://schemas.microsoft.com/office/drawing/2014/main" id="{EB45B04D-00F7-4177-8035-FC05278B378D}"/>
               </a:ext>
             </a:extLst>
           </p:cNvPr>
@@ -31809,7 +31809,7 @@
           <p:cNvPr id="8" name="Samen: (18 − 11) + (11 − 6) = 18 − 6 = € 12">
             <a:extLst xmlns:a="http://schemas.openxmlformats.org/drawingml/2006/main">
               <a:ext uri="{FF2B5EF4-FFF2-40B4-BE49-F238E27FC236}">
-                <a16:creationId xmlns:a16="http://schemas.microsoft.com/office/drawing/2014/main" id="{586EBD47-563C-41CB-83E4-E793AB5D4FF5}"/>
+                <a16:creationId xmlns:a16="http://schemas.microsoft.com/office/drawing/2014/main" id="{460B4E18-49BE-4DCF-9A25-2028B2F653DB}"/>
               </a:ext>
             </a:extLst>
           </p:cNvPr>
@@ -31864,7 +31864,7 @@
     </p:spTree>
     <p:extLst>
       <p:ext uri="{BB962C8B-B14F-4D97-AF65-F5344CB8AC3E}">
-        <p14:creationId xmlns:p14="http://schemas.microsoft.com/office/powerpoint/2010/main" val="349308068"/>
+        <p14:creationId xmlns:p14="http://schemas.microsoft.com/office/powerpoint/2010/main" val="1073567858"/>
       </p:ext>
     </p:extLst>
   </p:cSld>
@@ -31895,7 +31895,7 @@
           <p:cNvPr id="12" name="Omzet, producentensurplus en winst">
             <a:extLst xmlns:a="http://schemas.openxmlformats.org/drawingml/2006/main">
               <a:ext uri="{FF2B5EF4-FFF2-40B4-BE49-F238E27FC236}">
-                <a16:creationId xmlns:a16="http://schemas.microsoft.com/office/drawing/2014/main" id="{C707F15F-5267-4C4C-B1F4-3E64C4B2C8A4}"/>
+                <a16:creationId xmlns:a16="http://schemas.microsoft.com/office/drawing/2014/main" id="{92DBBF41-A2E2-4CC9-82E9-39784D3FCEE1}"/>
               </a:ext>
             </a:extLst>
           </p:cNvPr>
@@ -31952,7 +31952,7 @@
           <p:cNvPr id="2" name="">
             <a:extLst xmlns:a="http://schemas.openxmlformats.org/drawingml/2006/main">
               <a:ext uri="{FF2B5EF4-FFF2-40B4-BE49-F238E27FC236}">
-                <a16:creationId xmlns:a16="http://schemas.microsoft.com/office/drawing/2014/main" id="{9E68FA81-B486-4F1B-9778-00476AFE098B}"/>
+                <a16:creationId xmlns:a16="http://schemas.microsoft.com/office/drawing/2014/main" id="{D6AC8386-104A-4746-974C-5D74FDE6B4A1}"/>
               </a:ext>
             </a:extLst>
           </p:cNvPr>
@@ -31981,7 +31981,7 @@
           <p:cNvPr id="3" name="§2.3.2 Producentensurplus en totaal surplus">
             <a:extLst xmlns:a="http://schemas.openxmlformats.org/drawingml/2006/main">
               <a:ext uri="{FF2B5EF4-FFF2-40B4-BE49-F238E27FC236}">
-                <a16:creationId xmlns:a16="http://schemas.microsoft.com/office/drawing/2014/main" id="{31247777-A8A7-4BC2-AB56-9634FE6A5F2A}"/>
+                <a16:creationId xmlns:a16="http://schemas.microsoft.com/office/drawing/2014/main" id="{CCB50CA1-0BBA-47E0-8F29-4CD8DBB17751}"/>
               </a:ext>
             </a:extLst>
           </p:cNvPr>
@@ -32038,7 +32038,7 @@
           <p:cNvPr id="4" name="4">
             <a:extLst xmlns:a="http://schemas.openxmlformats.org/drawingml/2006/main">
               <a:ext uri="{FF2B5EF4-FFF2-40B4-BE49-F238E27FC236}">
-                <a16:creationId xmlns:a16="http://schemas.microsoft.com/office/drawing/2014/main" id="{B2C86BE0-9548-4E5B-9E36-B29CBC633EA0}"/>
+                <a16:creationId xmlns:a16="http://schemas.microsoft.com/office/drawing/2014/main" id="{52D98CA8-B962-45F7-B288-89249AC1D8F9}"/>
               </a:ext>
             </a:extLst>
           </p:cNvPr>
@@ -32095,7 +32095,7 @@
           <p:cNvPr id="5" name="Omzet">
             <a:extLst xmlns:a="http://schemas.openxmlformats.org/drawingml/2006/main">
               <a:ext uri="{FF2B5EF4-FFF2-40B4-BE49-F238E27FC236}">
-                <a16:creationId xmlns:a16="http://schemas.microsoft.com/office/drawing/2014/main" id="{D2832CE5-AC53-4495-9B20-C66E39D90327}"/>
+                <a16:creationId xmlns:a16="http://schemas.microsoft.com/office/drawing/2014/main" id="{328B93B0-9A1C-4BE6-90DF-0AA9046A722D}"/>
               </a:ext>
             </a:extLst>
           </p:cNvPr>
@@ -32152,7 +32152,7 @@
           <p:cNvPr id="6" name="Het bedrag dat de verkoop oplevert.">
             <a:extLst xmlns:a="http://schemas.openxmlformats.org/drawingml/2006/main">
               <a:ext uri="{FF2B5EF4-FFF2-40B4-BE49-F238E27FC236}">
-                <a16:creationId xmlns:a16="http://schemas.microsoft.com/office/drawing/2014/main" id="{741800D9-D32B-4142-B12E-7F51939A8681}"/>
+                <a16:creationId xmlns:a16="http://schemas.microsoft.com/office/drawing/2014/main" id="{2FA4B6EF-F3E8-49FF-90A6-69926422718B}"/>
               </a:ext>
             </a:extLst>
           </p:cNvPr>
@@ -32209,7 +32209,7 @@
           <p:cNvPr id="7" name="Producentensurplus">
             <a:extLst xmlns:a="http://schemas.openxmlformats.org/drawingml/2006/main">
               <a:ext uri="{FF2B5EF4-FFF2-40B4-BE49-F238E27FC236}">
-                <a16:creationId xmlns:a16="http://schemas.microsoft.com/office/drawing/2014/main" id="{0EFC6D6C-9A3F-450B-ACFB-5C071E51947C}"/>
+                <a16:creationId xmlns:a16="http://schemas.microsoft.com/office/drawing/2014/main" id="{FE4EA972-7526-47A1-8DC2-02CD44B85B5A}"/>
               </a:ext>
             </a:extLst>
           </p:cNvPr>
@@ -32266,7 +32266,7 @@
           <p:cNvPr id="8" name="Ontvangen prijs min MK, opgeteld over verkochte producten.">
             <a:extLst xmlns:a="http://schemas.openxmlformats.org/drawingml/2006/main">
               <a:ext uri="{FF2B5EF4-FFF2-40B4-BE49-F238E27FC236}">
-                <a16:creationId xmlns:a16="http://schemas.microsoft.com/office/drawing/2014/main" id="{C4661D67-91EB-411B-99B7-3BFF00329D41}"/>
+                <a16:creationId xmlns:a16="http://schemas.microsoft.com/office/drawing/2014/main" id="{F2C60844-D629-4E03-B49A-FA5BC98442E4}"/>
               </a:ext>
             </a:extLst>
           </p:cNvPr>
@@ -32323,7 +32323,7 @@
           <p:cNvPr id="9" name="Winst">
             <a:extLst xmlns:a="http://schemas.openxmlformats.org/drawingml/2006/main">
               <a:ext uri="{FF2B5EF4-FFF2-40B4-BE49-F238E27FC236}">
-                <a16:creationId xmlns:a16="http://schemas.microsoft.com/office/drawing/2014/main" id="{39CCB36B-4DDA-4ACE-B3F3-E1AE5CA03060}"/>
+                <a16:creationId xmlns:a16="http://schemas.microsoft.com/office/drawing/2014/main" id="{51FBAF85-434F-4BB2-80BC-721F51916E54}"/>
               </a:ext>
             </a:extLst>
           </p:cNvPr>
@@ -32380,7 +32380,7 @@
           <p:cNvPr id="10" name="Opbrengst min álle kosten, ook de constante kosten.">
             <a:extLst xmlns:a="http://schemas.openxmlformats.org/drawingml/2006/main">
               <a:ext uri="{FF2B5EF4-FFF2-40B4-BE49-F238E27FC236}">
-                <a16:creationId xmlns:a16="http://schemas.microsoft.com/office/drawing/2014/main" id="{C8C92776-1415-4286-AFA0-C60B13F09A0D}"/>
+                <a16:creationId xmlns:a16="http://schemas.microsoft.com/office/drawing/2014/main" id="{CAF93643-BB05-4731-83C0-0564D2E8419F}"/>
               </a:ext>
             </a:extLst>
           </p:cNvPr>
@@ -32437,7 +32437,7 @@
           <p:cNvPr id="11" name="Voor PS zijn de constante kosten nog niet afgetrokken.">
             <a:extLst xmlns:a="http://schemas.openxmlformats.org/drawingml/2006/main">
               <a:ext uri="{FF2B5EF4-FFF2-40B4-BE49-F238E27FC236}">
-                <a16:creationId xmlns:a16="http://schemas.microsoft.com/office/drawing/2014/main" id="{44342200-80DE-4267-B0A2-42A4EAB9A7A9}"/>
+                <a16:creationId xmlns:a16="http://schemas.microsoft.com/office/drawing/2014/main" id="{0512D32E-76CF-44B8-83CC-1A1D3E13121C}"/>
               </a:ext>
             </a:extLst>
           </p:cNvPr>
@@ -32492,7 +32492,7 @@
     </p:spTree>
     <p:extLst>
       <p:ext uri="{BB962C8B-B14F-4D97-AF65-F5344CB8AC3E}">
-        <p14:creationId xmlns:p14="http://schemas.microsoft.com/office/powerpoint/2010/main" val="541174847"/>
+        <p14:creationId xmlns:p14="http://schemas.microsoft.com/office/powerpoint/2010/main" val="1568730986"/>
       </p:ext>
     </p:extLst>
   </p:cSld>
@@ -32523,7 +32523,7 @@
           <p:cNvPr id="9" name="Een hogere waardering en lagere MK">
             <a:extLst xmlns:a="http://schemas.openxmlformats.org/drawingml/2006/main">
               <a:ext uri="{FF2B5EF4-FFF2-40B4-BE49-F238E27FC236}">
-                <a16:creationId xmlns:a16="http://schemas.microsoft.com/office/drawing/2014/main" id="{D2F11D55-C0D9-491B-A6D6-516BD5E551E4}"/>
+                <a16:creationId xmlns:a16="http://schemas.microsoft.com/office/drawing/2014/main" id="{7A44BB46-CFD3-4812-B260-CF57D75248A0}"/>
               </a:ext>
             </a:extLst>
           </p:cNvPr>
@@ -32580,7 +32580,7 @@
           <p:cNvPr id="2" name="">
             <a:extLst xmlns:a="http://schemas.openxmlformats.org/drawingml/2006/main">
               <a:ext uri="{FF2B5EF4-FFF2-40B4-BE49-F238E27FC236}">
-                <a16:creationId xmlns:a16="http://schemas.microsoft.com/office/drawing/2014/main" id="{262C6E7E-2511-4199-A06B-01D8C13DC3A7}"/>
+                <a16:creationId xmlns:a16="http://schemas.microsoft.com/office/drawing/2014/main" id="{D2575A64-1324-4200-BFE9-437B6DA3B843}"/>
               </a:ext>
             </a:extLst>
           </p:cNvPr>
@@ -32609,7 +32609,7 @@
           <p:cNvPr id="3" name="§2.3.2 Producentensurplus en totaal surplus">
             <a:extLst xmlns:a="http://schemas.openxmlformats.org/drawingml/2006/main">
               <a:ext uri="{FF2B5EF4-FFF2-40B4-BE49-F238E27FC236}">
-                <a16:creationId xmlns:a16="http://schemas.microsoft.com/office/drawing/2014/main" id="{5B4B9019-2CD8-4DD7-B411-15B4CC16861C}"/>
+                <a16:creationId xmlns:a16="http://schemas.microsoft.com/office/drawing/2014/main" id="{BB43EABA-70DF-4B41-B366-C9457353F085}"/>
               </a:ext>
             </a:extLst>
           </p:cNvPr>
@@ -32666,7 +32666,7 @@
           <p:cNvPr id="4" name="5">
             <a:extLst xmlns:a="http://schemas.openxmlformats.org/drawingml/2006/main">
               <a:ext uri="{FF2B5EF4-FFF2-40B4-BE49-F238E27FC236}">
-                <a16:creationId xmlns:a16="http://schemas.microsoft.com/office/drawing/2014/main" id="{3C672F84-0AC1-4678-BDF8-7C06DDA7CBB0}"/>
+                <a16:creationId xmlns:a16="http://schemas.microsoft.com/office/drawing/2014/main" id="{B2D5F7AB-12F7-472C-8396-E035D72C8564}"/>
               </a:ext>
             </a:extLst>
           </p:cNvPr>
@@ -32723,7 +32723,7 @@
           <p:cNvPr id="5" name="Uitlegvoorbeeld — niet uit het boek · Dezelfde sleutelhanger">
             <a:extLst xmlns:a="http://schemas.openxmlformats.org/drawingml/2006/main">
               <a:ext uri="{FF2B5EF4-FFF2-40B4-BE49-F238E27FC236}">
-                <a16:creationId xmlns:a16="http://schemas.microsoft.com/office/drawing/2014/main" id="{F64DB27A-5A0E-4A9F-A3F2-96F0E351A26D}"/>
+                <a16:creationId xmlns:a16="http://schemas.microsoft.com/office/drawing/2014/main" id="{D5851A85-FB8B-443E-82B1-F99220051239}"/>
               </a:ext>
             </a:extLst>
           </p:cNvPr>
@@ -32780,7 +32780,7 @@
           <p:cNvPr id="6" name="Prijs blijft € 11. Dezelfde transactie gaat door.">
             <a:extLst xmlns:a="http://schemas.openxmlformats.org/drawingml/2006/main">
               <a:ext uri="{FF2B5EF4-FFF2-40B4-BE49-F238E27FC236}">
-                <a16:creationId xmlns:a16="http://schemas.microsoft.com/office/drawing/2014/main" id="{C8CCAEE9-8D28-4C1C-9CBF-AC415EEE35E1}"/>
+                <a16:creationId xmlns:a16="http://schemas.microsoft.com/office/drawing/2014/main" id="{A7EF04AD-7CCC-41BA-B155-11359C9B62AF}"/>
               </a:ext>
             </a:extLst>
           </p:cNvPr>
@@ -33351,7 +33351,7 @@
           <p:cNvPr id="8" name="Beide veranderingen vergroten het gezamenlijke voordeel.">
             <a:extLst xmlns:a="http://schemas.openxmlformats.org/drawingml/2006/main">
               <a:ext uri="{FF2B5EF4-FFF2-40B4-BE49-F238E27FC236}">
-                <a16:creationId xmlns:a16="http://schemas.microsoft.com/office/drawing/2014/main" id="{BD761723-7666-45E4-AF80-63973E22F470}"/>
+                <a16:creationId xmlns:a16="http://schemas.microsoft.com/office/drawing/2014/main" id="{4C40C212-4039-4E2D-BDDF-E073DC8209E8}"/>
               </a:ext>
             </a:extLst>
           </p:cNvPr>
@@ -33406,7 +33406,7 @@
     </p:spTree>
     <p:extLst>
       <p:ext uri="{BB962C8B-B14F-4D97-AF65-F5344CB8AC3E}">
-        <p14:creationId xmlns:p14="http://schemas.microsoft.com/office/powerpoint/2010/main" val="394911558"/>
+        <p14:creationId xmlns:p14="http://schemas.microsoft.com/office/powerpoint/2010/main" val="238761688"/>
       </p:ext>
     </p:extLst>
   </p:cSld>
@@ -33437,7 +33437,7 @@
           <p:cNvPr id="9" name="De aanbodlijn als MK-lijn">
             <a:extLst xmlns:a="http://schemas.openxmlformats.org/drawingml/2006/main">
               <a:ext uri="{FF2B5EF4-FFF2-40B4-BE49-F238E27FC236}">
-                <a16:creationId xmlns:a16="http://schemas.microsoft.com/office/drawing/2014/main" id="{CD99638F-DD6D-400A-B6D4-6307E3B313C7}"/>
+                <a16:creationId xmlns:a16="http://schemas.microsoft.com/office/drawing/2014/main" id="{F2ABFD5A-75D1-4627-AADC-0D83AA5853D1}"/>
               </a:ext>
             </a:extLst>
           </p:cNvPr>
@@ -33494,7 +33494,7 @@
           <p:cNvPr id="2" name="">
             <a:extLst xmlns:a="http://schemas.openxmlformats.org/drawingml/2006/main">
               <a:ext uri="{FF2B5EF4-FFF2-40B4-BE49-F238E27FC236}">
-                <a16:creationId xmlns:a16="http://schemas.microsoft.com/office/drawing/2014/main" id="{E670CB48-F57C-4368-8DD9-65FA5E09151D}"/>
+                <a16:creationId xmlns:a16="http://schemas.microsoft.com/office/drawing/2014/main" id="{26EDD09B-D20C-4E6F-9EF1-3D39AD1161AF}"/>
               </a:ext>
             </a:extLst>
           </p:cNvPr>
@@ -33523,7 +33523,7 @@
           <p:cNvPr id="3" name="§2.3.2 Producentensurplus en totaal surplus">
             <a:extLst xmlns:a="http://schemas.openxmlformats.org/drawingml/2006/main">
               <a:ext uri="{FF2B5EF4-FFF2-40B4-BE49-F238E27FC236}">
-                <a16:creationId xmlns:a16="http://schemas.microsoft.com/office/drawing/2014/main" id="{6D36E053-F5C5-4E08-A885-46B72B157AA5}"/>
+                <a16:creationId xmlns:a16="http://schemas.microsoft.com/office/drawing/2014/main" id="{8E1B60B9-5A57-47B9-AACB-42B16A77B23B}"/>
               </a:ext>
             </a:extLst>
           </p:cNvPr>
@@ -33580,7 +33580,7 @@
           <p:cNvPr id="4" name="6">
             <a:extLst xmlns:a="http://schemas.openxmlformats.org/drawingml/2006/main">
               <a:ext uri="{FF2B5EF4-FFF2-40B4-BE49-F238E27FC236}">
-                <a16:creationId xmlns:a16="http://schemas.microsoft.com/office/drawing/2014/main" id="{8893E279-AF2E-4F99-BE39-F05DE30C9E30}"/>
+                <a16:creationId xmlns:a16="http://schemas.microsoft.com/office/drawing/2014/main" id="{54BA857B-C98D-4D35-BA28-E9E5A1BC934C}"/>
               </a:ext>
             </a:extLst>
           </p:cNvPr>
@@ -33637,7 +33637,7 @@
           <p:cNvPr id="5" name="Uitlegvoorbeeld — niet uit het boek · Fietsbellen">
             <a:extLst xmlns:a="http://schemas.openxmlformats.org/drawingml/2006/main">
               <a:ext uri="{FF2B5EF4-FFF2-40B4-BE49-F238E27FC236}">
-                <a16:creationId xmlns:a16="http://schemas.microsoft.com/office/drawing/2014/main" id="{E42E9D92-B525-4349-8B7A-B0D75945CF2D}"/>
+                <a16:creationId xmlns:a16="http://schemas.microsoft.com/office/drawing/2014/main" id="{44EE2F33-0ADE-478B-BBF8-22787634BF8B}"/>
               </a:ext>
             </a:extLst>
           </p:cNvPr>
@@ -33694,7 +33694,7 @@
           <p:cNvPr id="6" name="Aanbod: P = 4 + 0,25Q">
             <a:extLst xmlns:a="http://schemas.openxmlformats.org/drawingml/2006/main">
               <a:ext uri="{FF2B5EF4-FFF2-40B4-BE49-F238E27FC236}">
-                <a16:creationId xmlns:a16="http://schemas.microsoft.com/office/drawing/2014/main" id="{078D5BBC-EB69-427D-838D-F31EBE8CED99}"/>
+                <a16:creationId xmlns:a16="http://schemas.microsoft.com/office/drawing/2014/main" id="{2BA844B9-A344-4BA1-B16C-37ECF4319837}"/>
               </a:ext>
             </a:extLst>
           </p:cNvPr>
@@ -34070,7 +34070,7 @@
           <p:cNvPr id="8" name="In dit model: opeenvolgende eenheden met steeds hogere MK.">
             <a:extLst xmlns:a="http://schemas.openxmlformats.org/drawingml/2006/main">
               <a:ext uri="{FF2B5EF4-FFF2-40B4-BE49-F238E27FC236}">
-                <a16:creationId xmlns:a16="http://schemas.microsoft.com/office/drawing/2014/main" id="{8F277AF2-A704-4BD0-B7F5-F80ED1CF300A}"/>
+                <a16:creationId xmlns:a16="http://schemas.microsoft.com/office/drawing/2014/main" id="{FECECC3F-F7B1-4019-B150-4AD2B87FB06C}"/>
               </a:ext>
             </a:extLst>
           </p:cNvPr>
@@ -34125,7 +34125,7 @@
     </p:spTree>
     <p:extLst>
       <p:ext uri="{BB962C8B-B14F-4D97-AF65-F5344CB8AC3E}">
-        <p14:creationId xmlns:p14="http://schemas.microsoft.com/office/powerpoint/2010/main" val="1193171681"/>
+        <p14:creationId xmlns:p14="http://schemas.microsoft.com/office/powerpoint/2010/main" val="1972999243"/>
       </p:ext>
     </p:extLst>
   </p:cSld>
@@ -34156,7 +34156,7 @@
           <p:cNvPr id="14" name="Het marktevenwicht berekenen">
             <a:extLst xmlns:a="http://schemas.openxmlformats.org/drawingml/2006/main">
               <a:ext uri="{FF2B5EF4-FFF2-40B4-BE49-F238E27FC236}">
-                <a16:creationId xmlns:a16="http://schemas.microsoft.com/office/drawing/2014/main" id="{8DD2DC05-3494-435A-A8A0-35F8501563AF}"/>
+                <a16:creationId xmlns:a16="http://schemas.microsoft.com/office/drawing/2014/main" id="{E378E23E-3138-4A6C-8973-0A4C02ECC31B}"/>
               </a:ext>
             </a:extLst>
           </p:cNvPr>
@@ -34213,7 +34213,7 @@
           <p:cNvPr id="2" name="">
             <a:extLst xmlns:a="http://schemas.openxmlformats.org/drawingml/2006/main">
               <a:ext uri="{FF2B5EF4-FFF2-40B4-BE49-F238E27FC236}">
-                <a16:creationId xmlns:a16="http://schemas.microsoft.com/office/drawing/2014/main" id="{C5C66660-8A69-425F-A081-CA830BF53280}"/>
+                <a16:creationId xmlns:a16="http://schemas.microsoft.com/office/drawing/2014/main" id="{1040EB6B-63DC-41E3-9AA5-5E32CF8A25BA}"/>
               </a:ext>
             </a:extLst>
           </p:cNvPr>
@@ -34242,7 +34242,7 @@
           <p:cNvPr id="3" name="§2.3.2 Producentensurplus en totaal surplus">
             <a:extLst xmlns:a="http://schemas.openxmlformats.org/drawingml/2006/main">
               <a:ext uri="{FF2B5EF4-FFF2-40B4-BE49-F238E27FC236}">
-                <a16:creationId xmlns:a16="http://schemas.microsoft.com/office/drawing/2014/main" id="{C537D373-24E7-4D38-98E4-2277225C0454}"/>
+                <a16:creationId xmlns:a16="http://schemas.microsoft.com/office/drawing/2014/main" id="{E029F737-1C23-462A-A620-15C963B61371}"/>
               </a:ext>
             </a:extLst>
           </p:cNvPr>
@@ -34299,7 +34299,7 @@
           <p:cNvPr id="4" name="7">
             <a:extLst xmlns:a="http://schemas.openxmlformats.org/drawingml/2006/main">
               <a:ext uri="{FF2B5EF4-FFF2-40B4-BE49-F238E27FC236}">
-                <a16:creationId xmlns:a16="http://schemas.microsoft.com/office/drawing/2014/main" id="{8CEC050D-1A8A-47B0-814A-0DF77DE282D5}"/>
+                <a16:creationId xmlns:a16="http://schemas.microsoft.com/office/drawing/2014/main" id="{7A15E7D5-A62B-4A4E-B046-CC5B8FBF241B}"/>
               </a:ext>
             </a:extLst>
           </p:cNvPr>
@@ -34356,7 +34356,7 @@
           <p:cNvPr id="5" name="Uitlegvoorbeeld — niet uit het boek · Fietsbellen">
             <a:extLst xmlns:a="http://schemas.openxmlformats.org/drawingml/2006/main">
               <a:ext uri="{FF2B5EF4-FFF2-40B4-BE49-F238E27FC236}">
-                <a16:creationId xmlns:a16="http://schemas.microsoft.com/office/drawing/2014/main" id="{F47FC3F8-F6DD-4E3E-B24E-62ED0EFE2848}"/>
+                <a16:creationId xmlns:a16="http://schemas.microsoft.com/office/drawing/2014/main" id="{74D0FBDD-5CF1-439C-8324-B3D0D2AD4668}"/>
               </a:ext>
             </a:extLst>
           </p:cNvPr>
@@ -34413,7 +34413,7 @@
           <p:cNvPr id="6" name="Vraag: P = 28 − 0,5Q      Aanbod: P = 4 + 0,25Q">
             <a:extLst xmlns:a="http://schemas.openxmlformats.org/drawingml/2006/main">
               <a:ext uri="{FF2B5EF4-FFF2-40B4-BE49-F238E27FC236}">
-                <a16:creationId xmlns:a16="http://schemas.microsoft.com/office/drawing/2014/main" id="{16A20ACC-1421-4940-92FF-1C24762ABA2D}"/>
+                <a16:creationId xmlns:a16="http://schemas.microsoft.com/office/drawing/2014/main" id="{8F1ED2A6-9937-4DDA-80AD-79E06B31BA6D}"/>
               </a:ext>
             </a:extLst>
           </p:cNvPr>
@@ -34470,7 +34470,7 @@
           <p:cNvPr id="7" name="Dezelfde Q en P">
             <a:extLst xmlns:a="http://schemas.openxmlformats.org/drawingml/2006/main">
               <a:ext uri="{FF2B5EF4-FFF2-40B4-BE49-F238E27FC236}">
-                <a16:creationId xmlns:a16="http://schemas.microsoft.com/office/drawing/2014/main" id="{31F895CE-9D56-4E08-AD95-71D23E0913D0}"/>
+                <a16:creationId xmlns:a16="http://schemas.microsoft.com/office/drawing/2014/main" id="{53293FAF-963E-41B2-8F8D-A054CF08C511}"/>
               </a:ext>
             </a:extLst>
           </p:cNvPr>
@@ -34527,7 +34527,7 @@
           <p:cNvPr id="8" name="28 − 0,5Q = 4 + 0,25Q">
             <a:extLst xmlns:a="http://schemas.openxmlformats.org/drawingml/2006/main">
               <a:ext uri="{FF2B5EF4-FFF2-40B4-BE49-F238E27FC236}">
-                <a16:creationId xmlns:a16="http://schemas.microsoft.com/office/drawing/2014/main" id="{782C0772-95DA-4479-BBC1-891F06B0BA54}"/>
+                <a16:creationId xmlns:a16="http://schemas.microsoft.com/office/drawing/2014/main" id="{3E972AE4-7B80-4A05-8A32-37585B51B140}"/>
               </a:ext>
             </a:extLst>
           </p:cNvPr>
@@ -34584,7 +34584,7 @@
           <p:cNvPr id="9" name="Q bepalen">
             <a:extLst xmlns:a="http://schemas.openxmlformats.org/drawingml/2006/main">
               <a:ext uri="{FF2B5EF4-FFF2-40B4-BE49-F238E27FC236}">
-                <a16:creationId xmlns:a16="http://schemas.microsoft.com/office/drawing/2014/main" id="{186148B8-3E88-494D-8DB0-E6E03359BD2B}"/>
+                <a16:creationId xmlns:a16="http://schemas.microsoft.com/office/drawing/2014/main" id="{5D22522A-8BBB-4AF3-89AD-9938ECD180A8}"/>
               </a:ext>
             </a:extLst>
           </p:cNvPr>
@@ -34641,7 +34641,7 @@
           <p:cNvPr id="10" name="24 = 0,75Q     dus Qe = 32 fietsbellen">
             <a:extLst xmlns:a="http://schemas.openxmlformats.org/drawingml/2006/main">
               <a:ext uri="{FF2B5EF4-FFF2-40B4-BE49-F238E27FC236}">
-                <a16:creationId xmlns:a16="http://schemas.microsoft.com/office/drawing/2014/main" id="{7A7DF1C3-7E0E-4035-A1A9-2084F7623E5D}"/>
+                <a16:creationId xmlns:a16="http://schemas.microsoft.com/office/drawing/2014/main" id="{47D2D34F-7551-4444-B3F4-C9A41AD1099D}"/>
               </a:ext>
             </a:extLst>
           </p:cNvPr>
@@ -34698,7 +34698,7 @@
           <p:cNvPr id="11" name="P invullen">
             <a:extLst xmlns:a="http://schemas.openxmlformats.org/drawingml/2006/main">
               <a:ext uri="{FF2B5EF4-FFF2-40B4-BE49-F238E27FC236}">
-                <a16:creationId xmlns:a16="http://schemas.microsoft.com/office/drawing/2014/main" id="{1E8F14A6-0AE3-4E9D-ACCD-74BCB67302A0}"/>
+                <a16:creationId xmlns:a16="http://schemas.microsoft.com/office/drawing/2014/main" id="{C309BE3B-9128-4708-BC44-AB0351E0065A}"/>
               </a:ext>
             </a:extLst>
           </p:cNvPr>
@@ -34755,7 +34755,7 @@
           <p:cNvPr id="12" name="Pe = 28 − 0,5 × 32 = € 12 per fietsbel">
             <a:extLst xmlns:a="http://schemas.openxmlformats.org/drawingml/2006/main">
               <a:ext uri="{FF2B5EF4-FFF2-40B4-BE49-F238E27FC236}">
-                <a16:creationId xmlns:a16="http://schemas.microsoft.com/office/drawing/2014/main" id="{2CD93CAD-8B55-43AC-8E34-BD44158CE9F5}"/>
+                <a16:creationId xmlns:a16="http://schemas.microsoft.com/office/drawing/2014/main" id="{2AB96E2F-6220-4D31-B78A-DEE3352FD39A}"/>
               </a:ext>
             </a:extLst>
           </p:cNvPr>
@@ -34812,7 +34812,7 @@
           <p:cNvPr id="13" name="Controle in aanbod: 4 + 0,25 × 32 = 12">
             <a:extLst xmlns:a="http://schemas.openxmlformats.org/drawingml/2006/main">
               <a:ext uri="{FF2B5EF4-FFF2-40B4-BE49-F238E27FC236}">
-                <a16:creationId xmlns:a16="http://schemas.microsoft.com/office/drawing/2014/main" id="{76FDF790-5262-4761-8CF0-E3F3AE4866E1}"/>
+                <a16:creationId xmlns:a16="http://schemas.microsoft.com/office/drawing/2014/main" id="{CBAAC5FF-A5FB-44E3-BD0B-6C326F5C8D86}"/>
               </a:ext>
             </a:extLst>
           </p:cNvPr>
@@ -34867,7 +34867,7 @@
     </p:spTree>
     <p:extLst>
       <p:ext uri="{BB962C8B-B14F-4D97-AF65-F5344CB8AC3E}">
-        <p14:creationId xmlns:p14="http://schemas.microsoft.com/office/powerpoint/2010/main" val="1140540966"/>
+        <p14:creationId xmlns:p14="http://schemas.microsoft.com/office/powerpoint/2010/main" val="1804349215"/>
       </p:ext>
     </p:extLst>
   </p:cSld>
@@ -34898,7 +34898,7 @@
           <p:cNvPr id="10" name="Het evenwicht in de grafiek">
             <a:extLst xmlns:a="http://schemas.openxmlformats.org/drawingml/2006/main">
               <a:ext uri="{FF2B5EF4-FFF2-40B4-BE49-F238E27FC236}">
-                <a16:creationId xmlns:a16="http://schemas.microsoft.com/office/drawing/2014/main" id="{466E294D-A861-4E3C-9049-79F11A0D16EB}"/>
+                <a16:creationId xmlns:a16="http://schemas.microsoft.com/office/drawing/2014/main" id="{81F09A7B-1B6E-4EFA-85A4-B0D3EACEC970}"/>
               </a:ext>
             </a:extLst>
           </p:cNvPr>
@@ -34955,7 +34955,7 @@
           <p:cNvPr id="2" name="">
             <a:extLst xmlns:a="http://schemas.openxmlformats.org/drawingml/2006/main">
               <a:ext uri="{FF2B5EF4-FFF2-40B4-BE49-F238E27FC236}">
-                <a16:creationId xmlns:a16="http://schemas.microsoft.com/office/drawing/2014/main" id="{1CC2972C-D30B-4F11-BA2A-415E7AB28723}"/>
+                <a16:creationId xmlns:a16="http://schemas.microsoft.com/office/drawing/2014/main" id="{8B359A2D-EB94-4334-B2C7-45CDD5ACA6D0}"/>
               </a:ext>
             </a:extLst>
           </p:cNvPr>
@@ -34984,7 +34984,7 @@
           <p:cNvPr id="3" name="§2.3.2 Producentensurplus en totaal surplus">
             <a:extLst xmlns:a="http://schemas.openxmlformats.org/drawingml/2006/main">
               <a:ext uri="{FF2B5EF4-FFF2-40B4-BE49-F238E27FC236}">
-                <a16:creationId xmlns:a16="http://schemas.microsoft.com/office/drawing/2014/main" id="{4EEE1243-A7F6-437D-BBB4-1E8FD124BA80}"/>
+                <a16:creationId xmlns:a16="http://schemas.microsoft.com/office/drawing/2014/main" id="{08316476-CA9F-47BB-A572-54FD9FBF31BF}"/>
               </a:ext>
             </a:extLst>
           </p:cNvPr>
@@ -35041,7 +35041,7 @@
           <p:cNvPr id="4" name="8">
             <a:extLst xmlns:a="http://schemas.openxmlformats.org/drawingml/2006/main">
               <a:ext uri="{FF2B5EF4-FFF2-40B4-BE49-F238E27FC236}">
-                <a16:creationId xmlns:a16="http://schemas.microsoft.com/office/drawing/2014/main" id="{4A25C55F-AB7B-41EA-8461-3CCEB0814BD0}"/>
+                <a16:creationId xmlns:a16="http://schemas.microsoft.com/office/drawing/2014/main" id="{793804EF-D3DD-49A6-92E3-39AA981EFE9C}"/>
               </a:ext>
             </a:extLst>
           </p:cNvPr>
@@ -35098,7 +35098,7 @@
           <p:cNvPr id="5" name="Uitlegvoorbeeld — niet uit het boek · Fietsbellen">
             <a:extLst xmlns:a="http://schemas.openxmlformats.org/drawingml/2006/main">
               <a:ext uri="{FF2B5EF4-FFF2-40B4-BE49-F238E27FC236}">
-                <a16:creationId xmlns:a16="http://schemas.microsoft.com/office/drawing/2014/main" id="{66DB9CFC-0789-4EBF-A82C-AFB3411D2C05}"/>
+                <a16:creationId xmlns:a16="http://schemas.microsoft.com/office/drawing/2014/main" id="{133E45F6-CE77-4609-A0F4-FE79887AEE2A}"/>
               </a:ext>
             </a:extLst>
           </p:cNvPr>
@@ -35162,7 +35162,7 @@
         </p:xfrm>
         <a:graphic xmlns:a="http://schemas.openxmlformats.org/drawingml/2006/main">
           <a:graphicData uri="http://schemas.openxmlformats.org/drawingml/2006/chart">
-            <c:chart xmlns:r="http://schemas.openxmlformats.org/officeDocument/2006/relationships" xmlns:c="http://schemas.openxmlformats.org/drawingml/2006/chart" r:id="R74ebce0a6cdc4946"/>
+            <c:chart xmlns:r="http://schemas.openxmlformats.org/officeDocument/2006/relationships" xmlns:c="http://schemas.openxmlformats.org/drawingml/2006/chart" r:id="R02877e5238e24494"/>
           </a:graphicData>
         </a:graphic>
       </p:graphicFrame>
@@ -35171,7 +35171,7 @@
           <p:cNvPr id="7" name="E = (32; 12)">
             <a:extLst xmlns:a="http://schemas.openxmlformats.org/drawingml/2006/main">
               <a:ext uri="{FF2B5EF4-FFF2-40B4-BE49-F238E27FC236}">
-                <a16:creationId xmlns:a16="http://schemas.microsoft.com/office/drawing/2014/main" id="{45C2A5DE-6FE1-42B6-9293-DA4EB29276BE}"/>
+                <a16:creationId xmlns:a16="http://schemas.microsoft.com/office/drawing/2014/main" id="{CB1BC36F-F953-40E6-8F36-2C5C314F44FD}"/>
               </a:ext>
             </a:extLst>
           </p:cNvPr>
@@ -35228,7 +35228,7 @@
           <p:cNvPr id="8" name="Qe = 32 fietsbellen&#10;&#10;Pe = € 12&#10;per fietsbel">
             <a:extLst xmlns:a="http://schemas.openxmlformats.org/drawingml/2006/main">
               <a:ext uri="{FF2B5EF4-FFF2-40B4-BE49-F238E27FC236}">
-                <a16:creationId xmlns:a16="http://schemas.microsoft.com/office/drawing/2014/main" id="{4AE4B3ED-6523-4CCE-86D8-3E0F20D4DEB2}"/>
+                <a16:creationId xmlns:a16="http://schemas.microsoft.com/office/drawing/2014/main" id="{2C5B1CAD-0194-4B21-BC0A-91CB3F432659}"/>
               </a:ext>
             </a:extLst>
           </p:cNvPr>
@@ -35336,7 +35336,7 @@
           <p:cNvPr id="9" name="Beide lijnen geven&#10;bij Q = 32&#10;dezelfde prijs.">
             <a:extLst xmlns:a="http://schemas.openxmlformats.org/drawingml/2006/main">
               <a:ext uri="{FF2B5EF4-FFF2-40B4-BE49-F238E27FC236}">
-                <a16:creationId xmlns:a16="http://schemas.microsoft.com/office/drawing/2014/main" id="{21E4C832-77FB-456D-950B-DA69A6A3DECD}"/>
+                <a16:creationId xmlns:a16="http://schemas.microsoft.com/office/drawing/2014/main" id="{17082BE2-E217-4E41-A6AE-33E8CC711A17}"/>
               </a:ext>
             </a:extLst>
           </p:cNvPr>
@@ -35437,7 +35437,7 @@
     </p:spTree>
     <p:extLst>
       <p:ext uri="{BB962C8B-B14F-4D97-AF65-F5344CB8AC3E}">
-        <p14:creationId xmlns:p14="http://schemas.microsoft.com/office/powerpoint/2010/main" val="1169450626"/>
+        <p14:creationId xmlns:p14="http://schemas.microsoft.com/office/powerpoint/2010/main" val="2057550536"/>
       </p:ext>
     </p:extLst>
   </p:cSld>
@@ -35468,7 +35468,7 @@
           <p:cNvPr id="10" name="Consumentensurplus boven de prijs">
             <a:extLst xmlns:a="http://schemas.openxmlformats.org/drawingml/2006/main">
               <a:ext uri="{FF2B5EF4-FFF2-40B4-BE49-F238E27FC236}">
-                <a16:creationId xmlns:a16="http://schemas.microsoft.com/office/drawing/2014/main" id="{994152B4-BDED-4DBF-9731-018F539477A5}"/>
+                <a16:creationId xmlns:a16="http://schemas.microsoft.com/office/drawing/2014/main" id="{DCAF682F-2C6A-400C-951D-945EA99185B3}"/>
               </a:ext>
             </a:extLst>
           </p:cNvPr>
@@ -35525,7 +35525,7 @@
           <p:cNvPr id="2" name="">
             <a:extLst xmlns:a="http://schemas.openxmlformats.org/drawingml/2006/main">
               <a:ext uri="{FF2B5EF4-FFF2-40B4-BE49-F238E27FC236}">
-                <a16:creationId xmlns:a16="http://schemas.microsoft.com/office/drawing/2014/main" id="{36465309-79E6-4F54-8EE8-983C705B7638}"/>
+                <a16:creationId xmlns:a16="http://schemas.microsoft.com/office/drawing/2014/main" id="{01FBF2E7-ACCB-4995-ABA7-42B2F4EFA626}"/>
               </a:ext>
             </a:extLst>
           </p:cNvPr>
@@ -35554,7 +35554,7 @@
           <p:cNvPr id="3" name="§2.3.2 Producentensurplus en totaal surplus">
             <a:extLst xmlns:a="http://schemas.openxmlformats.org/drawingml/2006/main">
               <a:ext uri="{FF2B5EF4-FFF2-40B4-BE49-F238E27FC236}">
-                <a16:creationId xmlns:a16="http://schemas.microsoft.com/office/drawing/2014/main" id="{FF4F2ABA-D863-45E0-97FE-6E3D7FCC1778}"/>
+                <a16:creationId xmlns:a16="http://schemas.microsoft.com/office/drawing/2014/main" id="{9F791313-1B70-4413-A984-244D92E2E238}"/>
               </a:ext>
             </a:extLst>
           </p:cNvPr>
@@ -35611,7 +35611,7 @@
           <p:cNvPr id="4" name="9">
             <a:extLst xmlns:a="http://schemas.openxmlformats.org/drawingml/2006/main">
               <a:ext uri="{FF2B5EF4-FFF2-40B4-BE49-F238E27FC236}">
-                <a16:creationId xmlns:a16="http://schemas.microsoft.com/office/drawing/2014/main" id="{2A153F06-A16F-445D-B8E6-C822E2BF8A19}"/>
+                <a16:creationId xmlns:a16="http://schemas.microsoft.com/office/drawing/2014/main" id="{EDE31EC8-A318-4965-857C-5A1E49A5223D}"/>
               </a:ext>
             </a:extLst>
           </p:cNvPr>
@@ -35668,7 +35668,7 @@
           <p:cNvPr id="5" name="Uitlegvoorbeeld — niet uit het boek · Fietsbellen">
             <a:extLst xmlns:a="http://schemas.openxmlformats.org/drawingml/2006/main">
               <a:ext uri="{FF2B5EF4-FFF2-40B4-BE49-F238E27FC236}">
-                <a16:creationId xmlns:a16="http://schemas.microsoft.com/office/drawing/2014/main" id="{A6B445E3-8F5D-464E-A5C9-CD77D4046FA3}"/>
+                <a16:creationId xmlns:a16="http://schemas.microsoft.com/office/drawing/2014/main" id="{B882F189-6C29-44F9-B763-62008FF453CC}"/>
               </a:ext>
             </a:extLst>
           </p:cNvPr>
@@ -35732,7 +35732,7 @@
         </p:xfrm>
         <a:graphic xmlns:a="http://schemas.openxmlformats.org/drawingml/2006/main">
           <a:graphicData uri="http://schemas.openxmlformats.org/drawingml/2006/chart">
-            <c:chart xmlns:r="http://schemas.openxmlformats.org/officeDocument/2006/relationships" xmlns:c="http://schemas.openxmlformats.org/drawingml/2006/chart" r:id="Rd447151a26d6452f"/>
+            <c:chart xmlns:r="http://schemas.openxmlformats.org/officeDocument/2006/relationships" xmlns:c="http://schemas.openxmlformats.org/drawingml/2006/chart" r:id="R8b5200e254ac4faa"/>
           </a:graphicData>
         </a:graphic>
       </p:graphicFrame>
@@ -35741,7 +35741,7 @@
           <p:cNvPr id="7" name="Basis: 32 fietsbellen">
             <a:extLst xmlns:a="http://schemas.openxmlformats.org/drawingml/2006/main">
               <a:ext uri="{FF2B5EF4-FFF2-40B4-BE49-F238E27FC236}">
-                <a16:creationId xmlns:a16="http://schemas.microsoft.com/office/drawing/2014/main" id="{37CEC563-A74B-4B9A-ACD1-E36D6AD160FE}"/>
+                <a16:creationId xmlns:a16="http://schemas.microsoft.com/office/drawing/2014/main" id="{E2C2B2DD-18B3-4F0F-8311-A1A1C0DB4861}"/>
               </a:ext>
             </a:extLst>
           </p:cNvPr>
@@ -35798,7 +35798,7 @@
           <p:cNvPr id="8" name="Hoogte:&#10;28 − 12 = € 16&#10;per fietsbel">
             <a:extLst xmlns:a="http://schemas.openxmlformats.org/drawingml/2006/main">
               <a:ext uri="{FF2B5EF4-FFF2-40B4-BE49-F238E27FC236}">
-                <a16:creationId xmlns:a16="http://schemas.microsoft.com/office/drawing/2014/main" id="{58C47295-9F71-435D-A801-8D735DC64458}"/>
+                <a16:creationId xmlns:a16="http://schemas.microsoft.com/office/drawing/2014/main" id="{68EFE8AC-025A-4FA1-885A-C8AA5EB46BAD}"/>
               </a:ext>
             </a:extLst>
           </p:cNvPr>
@@ -35901,7 +35901,7 @@
           <p:cNvPr id="9" name="CS = ½ × 32 × 16&#10;= € 256">
             <a:extLst xmlns:a="http://schemas.openxmlformats.org/drawingml/2006/main">
               <a:ext uri="{FF2B5EF4-FFF2-40B4-BE49-F238E27FC236}">
-                <a16:creationId xmlns:a16="http://schemas.microsoft.com/office/drawing/2014/main" id="{576E7788-4CA3-4800-ADDA-E614E6C7D8C8}"/>
+                <a16:creationId xmlns:a16="http://schemas.microsoft.com/office/drawing/2014/main" id="{6232BCDD-1C0C-4D66-AFDF-2CF744FDBA26}"/>
               </a:ext>
             </a:extLst>
           </p:cNvPr>
@@ -35979,7 +35979,7 @@
     </p:spTree>
     <p:extLst>
       <p:ext uri="{BB962C8B-B14F-4D97-AF65-F5344CB8AC3E}">
-        <p14:creationId xmlns:p14="http://schemas.microsoft.com/office/powerpoint/2010/main" val="161708063"/>
+        <p14:creationId xmlns:p14="http://schemas.microsoft.com/office/powerpoint/2010/main" val="1636723936"/>
       </p:ext>
     </p:extLst>
   </p:cSld>
